--- a/Презентация.pptx
+++ b/Презентация.pptx
@@ -68,19 +68,16 @@
             <a:noAutofit/>
           </a:bodyPr>
           <a:p>
-            <a:r>
-              <a:rPr b="0" lang="ru-RU" sz="1400" spc="-1" strike="noStrike">
-                <a:solidFill>
-                  <a:srgbClr val="000000"/>
-                </a:solidFill>
+            <a:pPr algn="ctr">
+              <a:buNone/>
+            </a:pPr>
+            <a:r>
+              <a:rPr b="0" lang="ru-RU" sz="4400" spc="-1" strike="noStrike">
                 <a:latin typeface="Arial"/>
               </a:rPr>
               <a:t>Для перемещения страницы щёлкните мышью</a:t>
             </a:r>
-            <a:endParaRPr b="0" lang="ru-RU" sz="1400" spc="-1" strike="noStrike">
-              <a:solidFill>
-                <a:srgbClr val="000000"/>
-              </a:solidFill>
+            <a:endParaRPr b="0" lang="ru-RU" sz="4400" spc="-1" strike="noStrike">
               <a:latin typeface="Arial"/>
             </a:endParaRPr>
           </a:p>
@@ -303,7 +300,7 @@
             <a:pPr algn="r">
               <a:buNone/>
             </a:pPr>
-            <a:fld id="{8F8A98BF-39FE-462C-9C3E-6301C9477C11}" type="slidenum">
+            <a:fld id="{683532CD-3D8B-463C-90A5-0FA2D729B66C}" type="slidenum">
               <a:rPr b="0" lang="ru-RU" sz="1400" spc="-1" strike="noStrike">
                 <a:latin typeface="Times New Roman"/>
               </a:rPr>
@@ -351,7 +348,7 @@
         <p:spPr>
           <a:xfrm>
             <a:off x="380880" y="685800"/>
-            <a:ext cx="6095520" cy="3428640"/>
+            <a:ext cx="6095160" cy="3428280"/>
           </a:xfrm>
           <a:prstGeom prst="rect">
             <a:avLst/>
@@ -374,18 +371,18 @@
         <p:spPr>
           <a:xfrm>
             <a:off x="685800" y="4343400"/>
-            <a:ext cx="5486040" cy="4114440"/>
-          </a:xfrm>
-          <a:prstGeom prst="rect">
-            <a:avLst/>
-          </a:prstGeom>
-          <a:noFill/>
-          <a:ln w="0">
-            <a:noFill/>
-          </a:ln>
-        </p:spPr>
-        <p:txBody>
-          <a:bodyPr anchor="t">
+            <a:ext cx="5485680" cy="4114080"/>
+          </a:xfrm>
+          <a:prstGeom prst="rect">
+            <a:avLst/>
+          </a:prstGeom>
+          <a:noFill/>
+          <a:ln w="0">
+            <a:noFill/>
+          </a:ln>
+        </p:spPr>
+        <p:txBody>
+          <a:bodyPr lIns="0" rIns="0" tIns="0" bIns="0" anchor="t">
             <a:noAutofit/>
           </a:bodyPr>
           <a:p>
@@ -408,18 +405,18 @@
         <p:spPr>
           <a:xfrm>
             <a:off x="3884760" y="8685360"/>
-            <a:ext cx="2971440" cy="456840"/>
-          </a:xfrm>
-          <a:prstGeom prst="rect">
-            <a:avLst/>
-          </a:prstGeom>
-          <a:noFill/>
-          <a:ln w="0">
-            <a:noFill/>
-          </a:ln>
-        </p:spPr>
-        <p:txBody>
-          <a:bodyPr anchor="b">
+            <a:ext cx="2971080" cy="456480"/>
+          </a:xfrm>
+          <a:prstGeom prst="rect">
+            <a:avLst/>
+          </a:prstGeom>
+          <a:noFill/>
+          <a:ln w="0">
+            <a:noFill/>
+          </a:ln>
+        </p:spPr>
+        <p:txBody>
+          <a:bodyPr lIns="0" rIns="0" tIns="0" bIns="0" anchor="b">
             <a:noAutofit/>
           </a:bodyPr>
           <a:lstStyle>
@@ -450,7 +447,7 @@
                 <a:tab algn="l" pos="0"/>
               </a:tabLst>
             </a:pPr>
-            <a:fld id="{9D9888A2-CD58-4C83-BFDD-BEA37955B2A2}" type="slidenum">
+            <a:fld id="{43B07842-84FC-4F0F-ADFA-F64B7A7F1EAF}" type="slidenum">
               <a:rPr b="0" lang="ru" sz="1400" spc="-1" strike="noStrike">
                 <a:solidFill>
                   <a:srgbClr val="000000"/>
@@ -502,7 +499,7 @@
         <p:txBody>
           <a:bodyPr/>
           <a:p>
-            <a:fld id="{ECB22C20-97A3-4BDE-A417-63BDC0B47480}" type="slidenum">
+            <a:fld id="{99FCCFCA-1F6A-4DCF-AA93-C22946CEB6A3}" type="slidenum">
               <a:t>&lt;#&gt;</a:t>
             </a:fld>
           </a:p>
@@ -543,7 +540,7 @@
         <p:spPr>
           <a:xfrm>
             <a:off x="311760" y="744480"/>
-            <a:ext cx="8520120" cy="2052360"/>
+            <a:ext cx="8519760" cy="2052000"/>
           </a:xfrm>
           <a:prstGeom prst="rect">
             <a:avLst/>
@@ -558,10 +555,10 @@
             <a:noAutofit/>
           </a:bodyPr>
           <a:p>
-            <a:endParaRPr b="0" lang="ru-RU" sz="1400" spc="-1" strike="noStrike">
-              <a:solidFill>
-                <a:srgbClr val="000000"/>
-              </a:solidFill>
+            <a:pPr algn="ctr">
+              <a:buNone/>
+            </a:pPr>
+            <a:endParaRPr b="0" lang="ru-RU" sz="4400" spc="-1" strike="noStrike">
               <a:latin typeface="Arial"/>
             </a:endParaRPr>
           </a:p>
@@ -595,10 +592,7 @@
             <a:normAutofit/>
           </a:bodyPr>
           <a:p>
-            <a:endParaRPr b="0" lang="ru-RU" sz="1400" spc="-1" strike="noStrike">
-              <a:solidFill>
-                <a:srgbClr val="000000"/>
-              </a:solidFill>
+            <a:endParaRPr b="0" lang="ru-RU" sz="3200" spc="-1" strike="noStrike">
               <a:latin typeface="Arial"/>
             </a:endParaRPr>
           </a:p>
@@ -632,10 +626,7 @@
             <a:normAutofit/>
           </a:bodyPr>
           <a:p>
-            <a:endParaRPr b="0" lang="ru-RU" sz="1400" spc="-1" strike="noStrike">
-              <a:solidFill>
-                <a:srgbClr val="000000"/>
-              </a:solidFill>
+            <a:endParaRPr b="0" lang="ru-RU" sz="3200" spc="-1" strike="noStrike">
               <a:latin typeface="Arial"/>
             </a:endParaRPr>
           </a:p>
@@ -655,7 +646,7 @@
         <p:txBody>
           <a:bodyPr/>
           <a:p>
-            <a:fld id="{C03AFDC9-2B70-46B9-8C7D-66EEB92676D1}" type="slidenum">
+            <a:fld id="{4408EE2F-1AD6-4326-8AC7-23E64DB6ED48}" type="slidenum">
               <a:t>&lt;#&gt;</a:t>
             </a:fld>
           </a:p>
@@ -696,7 +687,7 @@
         <p:spPr>
           <a:xfrm>
             <a:off x="311760" y="744480"/>
-            <a:ext cx="8520120" cy="2052360"/>
+            <a:ext cx="8519760" cy="2052000"/>
           </a:xfrm>
           <a:prstGeom prst="rect">
             <a:avLst/>
@@ -711,10 +702,10 @@
             <a:noAutofit/>
           </a:bodyPr>
           <a:p>
-            <a:endParaRPr b="0" lang="ru-RU" sz="1400" spc="-1" strike="noStrike">
-              <a:solidFill>
-                <a:srgbClr val="000000"/>
-              </a:solidFill>
+            <a:pPr algn="ctr">
+              <a:buNone/>
+            </a:pPr>
+            <a:endParaRPr b="0" lang="ru-RU" sz="4400" spc="-1" strike="noStrike">
               <a:latin typeface="Arial"/>
             </a:endParaRPr>
           </a:p>
@@ -748,10 +739,7 @@
             <a:normAutofit/>
           </a:bodyPr>
           <a:p>
-            <a:endParaRPr b="0" lang="ru-RU" sz="1400" spc="-1" strike="noStrike">
-              <a:solidFill>
-                <a:srgbClr val="000000"/>
-              </a:solidFill>
+            <a:endParaRPr b="0" lang="ru-RU" sz="3200" spc="-1" strike="noStrike">
               <a:latin typeface="Arial"/>
             </a:endParaRPr>
           </a:p>
@@ -785,10 +773,7 @@
             <a:normAutofit/>
           </a:bodyPr>
           <a:p>
-            <a:endParaRPr b="0" lang="ru-RU" sz="1400" spc="-1" strike="noStrike">
-              <a:solidFill>
-                <a:srgbClr val="000000"/>
-              </a:solidFill>
+            <a:endParaRPr b="0" lang="ru-RU" sz="3200" spc="-1" strike="noStrike">
               <a:latin typeface="Arial"/>
             </a:endParaRPr>
           </a:p>
@@ -822,10 +807,7 @@
             <a:normAutofit/>
           </a:bodyPr>
           <a:p>
-            <a:endParaRPr b="0" lang="ru-RU" sz="1400" spc="-1" strike="noStrike">
-              <a:solidFill>
-                <a:srgbClr val="000000"/>
-              </a:solidFill>
+            <a:endParaRPr b="0" lang="ru-RU" sz="3200" spc="-1" strike="noStrike">
               <a:latin typeface="Arial"/>
             </a:endParaRPr>
           </a:p>
@@ -859,10 +841,7 @@
             <a:normAutofit/>
           </a:bodyPr>
           <a:p>
-            <a:endParaRPr b="0" lang="ru-RU" sz="1400" spc="-1" strike="noStrike">
-              <a:solidFill>
-                <a:srgbClr val="000000"/>
-              </a:solidFill>
+            <a:endParaRPr b="0" lang="ru-RU" sz="3200" spc="-1" strike="noStrike">
               <a:latin typeface="Arial"/>
             </a:endParaRPr>
           </a:p>
@@ -882,7 +861,7 @@
         <p:txBody>
           <a:bodyPr/>
           <a:p>
-            <a:fld id="{7177F67A-46AB-4039-9C2B-74FF7B70EDF9}" type="slidenum">
+            <a:fld id="{462AF8DD-E4F8-43E7-901B-60DFCDF7E844}" type="slidenum">
               <a:t>&lt;#&gt;</a:t>
             </a:fld>
           </a:p>
@@ -923,7 +902,7 @@
         <p:spPr>
           <a:xfrm>
             <a:off x="311760" y="744480"/>
-            <a:ext cx="8520120" cy="2052360"/>
+            <a:ext cx="8519760" cy="2052000"/>
           </a:xfrm>
           <a:prstGeom prst="rect">
             <a:avLst/>
@@ -938,10 +917,10 @@
             <a:noAutofit/>
           </a:bodyPr>
           <a:p>
-            <a:endParaRPr b="0" lang="ru-RU" sz="1400" spc="-1" strike="noStrike">
-              <a:solidFill>
-                <a:srgbClr val="000000"/>
-              </a:solidFill>
+            <a:pPr algn="ctr">
+              <a:buNone/>
+            </a:pPr>
+            <a:endParaRPr b="0" lang="ru-RU" sz="4400" spc="-1" strike="noStrike">
               <a:latin typeface="Arial"/>
             </a:endParaRPr>
           </a:p>
@@ -972,13 +951,10 @@
         </p:spPr>
         <p:txBody>
           <a:bodyPr lIns="0" rIns="0" tIns="0" bIns="0" anchor="t">
-            <a:normAutofit/>
+            <a:normAutofit fontScale="73000"/>
           </a:bodyPr>
           <a:p>
-            <a:endParaRPr b="0" lang="ru-RU" sz="1400" spc="-1" strike="noStrike">
-              <a:solidFill>
-                <a:srgbClr val="000000"/>
-              </a:solidFill>
+            <a:endParaRPr b="0" lang="ru-RU" sz="3200" spc="-1" strike="noStrike">
               <a:latin typeface="Arial"/>
             </a:endParaRPr>
           </a:p>
@@ -1009,13 +985,10 @@
         </p:spPr>
         <p:txBody>
           <a:bodyPr lIns="0" rIns="0" tIns="0" bIns="0" anchor="t">
-            <a:normAutofit/>
+            <a:normAutofit fontScale="73000"/>
           </a:bodyPr>
           <a:p>
-            <a:endParaRPr b="0" lang="ru-RU" sz="1400" spc="-1" strike="noStrike">
-              <a:solidFill>
-                <a:srgbClr val="000000"/>
-              </a:solidFill>
+            <a:endParaRPr b="0" lang="ru-RU" sz="3200" spc="-1" strike="noStrike">
               <a:latin typeface="Arial"/>
             </a:endParaRPr>
           </a:p>
@@ -1046,13 +1019,10 @@
         </p:spPr>
         <p:txBody>
           <a:bodyPr lIns="0" rIns="0" tIns="0" bIns="0" anchor="t">
-            <a:normAutofit/>
+            <a:normAutofit fontScale="73000"/>
           </a:bodyPr>
           <a:p>
-            <a:endParaRPr b="0" lang="ru-RU" sz="1400" spc="-1" strike="noStrike">
-              <a:solidFill>
-                <a:srgbClr val="000000"/>
-              </a:solidFill>
+            <a:endParaRPr b="0" lang="ru-RU" sz="3200" spc="-1" strike="noStrike">
               <a:latin typeface="Arial"/>
             </a:endParaRPr>
           </a:p>
@@ -1083,13 +1053,10 @@
         </p:spPr>
         <p:txBody>
           <a:bodyPr lIns="0" rIns="0" tIns="0" bIns="0" anchor="t">
-            <a:normAutofit/>
+            <a:normAutofit fontScale="73000"/>
           </a:bodyPr>
           <a:p>
-            <a:endParaRPr b="0" lang="ru-RU" sz="1400" spc="-1" strike="noStrike">
-              <a:solidFill>
-                <a:srgbClr val="000000"/>
-              </a:solidFill>
+            <a:endParaRPr b="0" lang="ru-RU" sz="3200" spc="-1" strike="noStrike">
               <a:latin typeface="Arial"/>
             </a:endParaRPr>
           </a:p>
@@ -1120,13 +1087,10 @@
         </p:spPr>
         <p:txBody>
           <a:bodyPr lIns="0" rIns="0" tIns="0" bIns="0" anchor="t">
-            <a:normAutofit/>
+            <a:normAutofit fontScale="73000"/>
           </a:bodyPr>
           <a:p>
-            <a:endParaRPr b="0" lang="ru-RU" sz="1400" spc="-1" strike="noStrike">
-              <a:solidFill>
-                <a:srgbClr val="000000"/>
-              </a:solidFill>
+            <a:endParaRPr b="0" lang="ru-RU" sz="3200" spc="-1" strike="noStrike">
               <a:latin typeface="Arial"/>
             </a:endParaRPr>
           </a:p>
@@ -1157,13 +1121,10 @@
         </p:spPr>
         <p:txBody>
           <a:bodyPr lIns="0" rIns="0" tIns="0" bIns="0" anchor="t">
-            <a:normAutofit/>
+            <a:normAutofit fontScale="73000"/>
           </a:bodyPr>
           <a:p>
-            <a:endParaRPr b="0" lang="ru-RU" sz="1400" spc="-1" strike="noStrike">
-              <a:solidFill>
-                <a:srgbClr val="000000"/>
-              </a:solidFill>
+            <a:endParaRPr b="0" lang="ru-RU" sz="3200" spc="-1" strike="noStrike">
               <a:latin typeface="Arial"/>
             </a:endParaRPr>
           </a:p>
@@ -1183,7 +1144,7 @@
         <p:txBody>
           <a:bodyPr/>
           <a:p>
-            <a:fld id="{1E3EB133-0672-434B-A669-A70209FE1185}" type="slidenum">
+            <a:fld id="{303F0031-8CE7-456A-B0EE-5542E79F9242}" type="slidenum">
               <a:t>&lt;#&gt;</a:t>
             </a:fld>
           </a:p>
@@ -1218,7 +1179,7 @@
             <a:spLocks noGrp="1"/>
           </p:cNvSpPr>
           <p:nvPr>
-            <p:ph type="ftr" idx="3"/>
+            <p:ph type="ftr" idx="2"/>
           </p:nvPr>
         </p:nvSpPr>
         <p:spPr/>
@@ -1238,14 +1199,14 @@
             <a:spLocks noGrp="1"/>
           </p:cNvSpPr>
           <p:nvPr>
-            <p:ph type="sldNum" idx="4"/>
+            <p:ph type="sldNum" idx="3"/>
           </p:nvPr>
         </p:nvSpPr>
         <p:spPr/>
         <p:txBody>
           <a:bodyPr/>
           <a:p>
-            <a:fld id="{6A5BF90A-0D04-4CF6-AC55-7B050CA7202A}" type="slidenum">
+            <a:fld id="{76F8427F-58AA-4FF9-BFCE-ED4C09E90063}" type="slidenum">
               <a:t>&lt;#&gt;</a:t>
             </a:fld>
           </a:p>
@@ -1258,7 +1219,7 @@
             <a:spLocks noGrp="1"/>
           </p:cNvSpPr>
           <p:nvPr>
-            <p:ph type="dt" idx="2"/>
+            <p:ph type="dt" idx="4"/>
           </p:nvPr>
         </p:nvSpPr>
         <p:spPr/>
@@ -1307,7 +1268,7 @@
         <p:spPr>
           <a:xfrm>
             <a:off x="311760" y="744480"/>
-            <a:ext cx="8520120" cy="2052360"/>
+            <a:ext cx="8519760" cy="2052000"/>
           </a:xfrm>
           <a:prstGeom prst="rect">
             <a:avLst/>
@@ -1322,10 +1283,10 @@
             <a:noAutofit/>
           </a:bodyPr>
           <a:p>
-            <a:endParaRPr b="0" lang="ru-RU" sz="1400" spc="-1" strike="noStrike">
-              <a:solidFill>
-                <a:srgbClr val="000000"/>
-              </a:solidFill>
+            <a:pPr algn="ctr">
+              <a:buNone/>
+            </a:pPr>
+            <a:endParaRPr b="0" lang="ru-RU" sz="4400" spc="-1" strike="noStrike">
               <a:latin typeface="Arial"/>
             </a:endParaRPr>
           </a:p>
@@ -1375,7 +1336,7 @@
             <a:spLocks noGrp="1"/>
           </p:cNvSpPr>
           <p:nvPr>
-            <p:ph type="ftr" idx="3"/>
+            <p:ph type="ftr" idx="2"/>
           </p:nvPr>
         </p:nvSpPr>
         <p:spPr/>
@@ -1395,14 +1356,14 @@
             <a:spLocks noGrp="1"/>
           </p:cNvSpPr>
           <p:nvPr>
-            <p:ph type="sldNum" idx="4"/>
+            <p:ph type="sldNum" idx="3"/>
           </p:nvPr>
         </p:nvSpPr>
         <p:spPr/>
         <p:txBody>
           <a:bodyPr/>
           <a:p>
-            <a:fld id="{DBD42371-05BF-42B4-945E-A2E2402099E9}" type="slidenum">
+            <a:fld id="{D48DF6C9-3659-400B-9AD1-5D3582BE8DE0}" type="slidenum">
               <a:t>&lt;#&gt;</a:t>
             </a:fld>
           </a:p>
@@ -1415,7 +1376,7 @@
             <a:spLocks noGrp="1"/>
           </p:cNvSpPr>
           <p:nvPr>
-            <p:ph type="dt" idx="2"/>
+            <p:ph type="dt" idx="4"/>
           </p:nvPr>
         </p:nvSpPr>
         <p:spPr/>
@@ -1464,7 +1425,7 @@
         <p:spPr>
           <a:xfrm>
             <a:off x="311760" y="744480"/>
-            <a:ext cx="8520120" cy="2052360"/>
+            <a:ext cx="8519760" cy="2052000"/>
           </a:xfrm>
           <a:prstGeom prst="rect">
             <a:avLst/>
@@ -1479,10 +1440,10 @@
             <a:noAutofit/>
           </a:bodyPr>
           <a:p>
-            <a:endParaRPr b="0" lang="ru-RU" sz="1400" spc="-1" strike="noStrike">
-              <a:solidFill>
-                <a:srgbClr val="000000"/>
-              </a:solidFill>
+            <a:pPr algn="ctr">
+              <a:buNone/>
+            </a:pPr>
+            <a:endParaRPr b="0" lang="ru-RU" sz="4400" spc="-1" strike="noStrike">
               <a:latin typeface="Arial"/>
             </a:endParaRPr>
           </a:p>
@@ -1516,10 +1477,7 @@
             <a:normAutofit/>
           </a:bodyPr>
           <a:p>
-            <a:endParaRPr b="0" lang="ru-RU" sz="1400" spc="-1" strike="noStrike">
-              <a:solidFill>
-                <a:srgbClr val="000000"/>
-              </a:solidFill>
+            <a:endParaRPr b="0" lang="ru-RU" sz="3200" spc="-1" strike="noStrike">
               <a:latin typeface="Arial"/>
             </a:endParaRPr>
           </a:p>
@@ -1532,7 +1490,7 @@
             <a:spLocks noGrp="1"/>
           </p:cNvSpPr>
           <p:nvPr>
-            <p:ph type="ftr" idx="3"/>
+            <p:ph type="ftr" idx="2"/>
           </p:nvPr>
         </p:nvSpPr>
         <p:spPr/>
@@ -1552,14 +1510,14 @@
             <a:spLocks noGrp="1"/>
           </p:cNvSpPr>
           <p:nvPr>
-            <p:ph type="sldNum" idx="4"/>
+            <p:ph type="sldNum" idx="3"/>
           </p:nvPr>
         </p:nvSpPr>
         <p:spPr/>
         <p:txBody>
           <a:bodyPr/>
           <a:p>
-            <a:fld id="{1984AF7E-FDD2-4997-AB51-DFE969DD6B4C}" type="slidenum">
+            <a:fld id="{4EBA8A51-1C6B-4BFB-B591-77C88C339AF2}" type="slidenum">
               <a:t>&lt;#&gt;</a:t>
             </a:fld>
           </a:p>
@@ -1572,7 +1530,7 @@
             <a:spLocks noGrp="1"/>
           </p:cNvSpPr>
           <p:nvPr>
-            <p:ph type="dt" idx="2"/>
+            <p:ph type="dt" idx="4"/>
           </p:nvPr>
         </p:nvSpPr>
         <p:spPr/>
@@ -1621,7 +1579,7 @@
         <p:spPr>
           <a:xfrm>
             <a:off x="311760" y="744480"/>
-            <a:ext cx="8520120" cy="2052360"/>
+            <a:ext cx="8519760" cy="2052000"/>
           </a:xfrm>
           <a:prstGeom prst="rect">
             <a:avLst/>
@@ -1636,10 +1594,10 @@
             <a:noAutofit/>
           </a:bodyPr>
           <a:p>
-            <a:endParaRPr b="0" lang="ru-RU" sz="1400" spc="-1" strike="noStrike">
-              <a:solidFill>
-                <a:srgbClr val="000000"/>
-              </a:solidFill>
+            <a:pPr algn="ctr">
+              <a:buNone/>
+            </a:pPr>
+            <a:endParaRPr b="0" lang="ru-RU" sz="4400" spc="-1" strike="noStrike">
               <a:latin typeface="Arial"/>
             </a:endParaRPr>
           </a:p>
@@ -1673,10 +1631,7 @@
             <a:normAutofit/>
           </a:bodyPr>
           <a:p>
-            <a:endParaRPr b="0" lang="ru-RU" sz="1400" spc="-1" strike="noStrike">
-              <a:solidFill>
-                <a:srgbClr val="000000"/>
-              </a:solidFill>
+            <a:endParaRPr b="0" lang="ru-RU" sz="3200" spc="-1" strike="noStrike">
               <a:latin typeface="Arial"/>
             </a:endParaRPr>
           </a:p>
@@ -1710,10 +1665,7 @@
             <a:normAutofit/>
           </a:bodyPr>
           <a:p>
-            <a:endParaRPr b="0" lang="ru-RU" sz="1400" spc="-1" strike="noStrike">
-              <a:solidFill>
-                <a:srgbClr val="000000"/>
-              </a:solidFill>
+            <a:endParaRPr b="0" lang="ru-RU" sz="3200" spc="-1" strike="noStrike">
               <a:latin typeface="Arial"/>
             </a:endParaRPr>
           </a:p>
@@ -1726,7 +1678,7 @@
             <a:spLocks noGrp="1"/>
           </p:cNvSpPr>
           <p:nvPr>
-            <p:ph type="ftr" idx="3"/>
+            <p:ph type="ftr" idx="2"/>
           </p:nvPr>
         </p:nvSpPr>
         <p:spPr/>
@@ -1746,14 +1698,14 @@
             <a:spLocks noGrp="1"/>
           </p:cNvSpPr>
           <p:nvPr>
-            <p:ph type="sldNum" idx="4"/>
+            <p:ph type="sldNum" idx="3"/>
           </p:nvPr>
         </p:nvSpPr>
         <p:spPr/>
         <p:txBody>
           <a:bodyPr/>
           <a:p>
-            <a:fld id="{32CC55A6-E302-45CC-971C-EE87E26E1CD3}" type="slidenum">
+            <a:fld id="{94D6DF67-D1FB-4B88-8F37-C4B404E24BA4}" type="slidenum">
               <a:t>&lt;#&gt;</a:t>
             </a:fld>
           </a:p>
@@ -1766,7 +1718,7 @@
             <a:spLocks noGrp="1"/>
           </p:cNvSpPr>
           <p:nvPr>
-            <p:ph type="dt" idx="2"/>
+            <p:ph type="dt" idx="4"/>
           </p:nvPr>
         </p:nvSpPr>
         <p:spPr/>
@@ -1815,7 +1767,7 @@
         <p:spPr>
           <a:xfrm>
             <a:off x="311760" y="744480"/>
-            <a:ext cx="8520120" cy="2052360"/>
+            <a:ext cx="8519760" cy="2052000"/>
           </a:xfrm>
           <a:prstGeom prst="rect">
             <a:avLst/>
@@ -1830,10 +1782,10 @@
             <a:noAutofit/>
           </a:bodyPr>
           <a:p>
-            <a:endParaRPr b="0" lang="ru-RU" sz="1400" spc="-1" strike="noStrike">
-              <a:solidFill>
-                <a:srgbClr val="000000"/>
-              </a:solidFill>
+            <a:pPr algn="ctr">
+              <a:buNone/>
+            </a:pPr>
+            <a:endParaRPr b="0" lang="ru-RU" sz="4400" spc="-1" strike="noStrike">
               <a:latin typeface="Arial"/>
             </a:endParaRPr>
           </a:p>
@@ -1846,7 +1798,7 @@
             <a:spLocks noGrp="1"/>
           </p:cNvSpPr>
           <p:nvPr>
-            <p:ph type="ftr" idx="3"/>
+            <p:ph type="ftr" idx="2"/>
           </p:nvPr>
         </p:nvSpPr>
         <p:spPr/>
@@ -1866,14 +1818,14 @@
             <a:spLocks noGrp="1"/>
           </p:cNvSpPr>
           <p:nvPr>
-            <p:ph type="sldNum" idx="4"/>
+            <p:ph type="sldNum" idx="3"/>
           </p:nvPr>
         </p:nvSpPr>
         <p:spPr/>
         <p:txBody>
           <a:bodyPr/>
           <a:p>
-            <a:fld id="{49C81E8B-6919-49A6-B26A-09949E5C74DE}" type="slidenum">
+            <a:fld id="{F72F0E3C-F96E-4821-950A-7678160EE6B9}" type="slidenum">
               <a:t>&lt;#&gt;</a:t>
             </a:fld>
           </a:p>
@@ -1886,7 +1838,7 @@
             <a:spLocks noGrp="1"/>
           </p:cNvSpPr>
           <p:nvPr>
-            <p:ph type="dt" idx="2"/>
+            <p:ph type="dt" idx="4"/>
           </p:nvPr>
         </p:nvSpPr>
         <p:spPr/>
@@ -1935,7 +1887,7 @@
         <p:spPr>
           <a:xfrm>
             <a:off x="311760" y="744480"/>
-            <a:ext cx="8520120" cy="9514800"/>
+            <a:ext cx="8519760" cy="9513000"/>
           </a:xfrm>
           <a:prstGeom prst="rect">
             <a:avLst/>
@@ -1966,7 +1918,7 @@
             <a:spLocks noGrp="1"/>
           </p:cNvSpPr>
           <p:nvPr>
-            <p:ph type="ftr" idx="3"/>
+            <p:ph type="ftr" idx="2"/>
           </p:nvPr>
         </p:nvSpPr>
         <p:spPr/>
@@ -1986,14 +1938,14 @@
             <a:spLocks noGrp="1"/>
           </p:cNvSpPr>
           <p:nvPr>
-            <p:ph type="sldNum" idx="4"/>
+            <p:ph type="sldNum" idx="3"/>
           </p:nvPr>
         </p:nvSpPr>
         <p:spPr/>
         <p:txBody>
           <a:bodyPr/>
           <a:p>
-            <a:fld id="{C41D64EF-1AEA-4E2E-A914-667B93FB0289}" type="slidenum">
+            <a:fld id="{F53967BE-830E-4502-B0E4-DA99CA926A48}" type="slidenum">
               <a:t>&lt;#&gt;</a:t>
             </a:fld>
           </a:p>
@@ -2006,7 +1958,7 @@
             <a:spLocks noGrp="1"/>
           </p:cNvSpPr>
           <p:nvPr>
-            <p:ph type="dt" idx="2"/>
+            <p:ph type="dt" idx="4"/>
           </p:nvPr>
         </p:nvSpPr>
         <p:spPr/>
@@ -2055,7 +2007,7 @@
         <p:spPr>
           <a:xfrm>
             <a:off x="311760" y="744480"/>
-            <a:ext cx="8520120" cy="2052360"/>
+            <a:ext cx="8519760" cy="2052000"/>
           </a:xfrm>
           <a:prstGeom prst="rect">
             <a:avLst/>
@@ -2070,10 +2022,10 @@
             <a:noAutofit/>
           </a:bodyPr>
           <a:p>
-            <a:endParaRPr b="0" lang="ru-RU" sz="1400" spc="-1" strike="noStrike">
-              <a:solidFill>
-                <a:srgbClr val="000000"/>
-              </a:solidFill>
+            <a:pPr algn="ctr">
+              <a:buNone/>
+            </a:pPr>
+            <a:endParaRPr b="0" lang="ru-RU" sz="4400" spc="-1" strike="noStrike">
               <a:latin typeface="Arial"/>
             </a:endParaRPr>
           </a:p>
@@ -2107,10 +2059,7 @@
             <a:normAutofit/>
           </a:bodyPr>
           <a:p>
-            <a:endParaRPr b="0" lang="ru-RU" sz="1400" spc="-1" strike="noStrike">
-              <a:solidFill>
-                <a:srgbClr val="000000"/>
-              </a:solidFill>
+            <a:endParaRPr b="0" lang="ru-RU" sz="3200" spc="-1" strike="noStrike">
               <a:latin typeface="Arial"/>
             </a:endParaRPr>
           </a:p>
@@ -2144,10 +2093,7 @@
             <a:normAutofit/>
           </a:bodyPr>
           <a:p>
-            <a:endParaRPr b="0" lang="ru-RU" sz="1400" spc="-1" strike="noStrike">
-              <a:solidFill>
-                <a:srgbClr val="000000"/>
-              </a:solidFill>
+            <a:endParaRPr b="0" lang="ru-RU" sz="3200" spc="-1" strike="noStrike">
               <a:latin typeface="Arial"/>
             </a:endParaRPr>
           </a:p>
@@ -2181,10 +2127,7 @@
             <a:normAutofit/>
           </a:bodyPr>
           <a:p>
-            <a:endParaRPr b="0" lang="ru-RU" sz="1400" spc="-1" strike="noStrike">
-              <a:solidFill>
-                <a:srgbClr val="000000"/>
-              </a:solidFill>
+            <a:endParaRPr b="0" lang="ru-RU" sz="3200" spc="-1" strike="noStrike">
               <a:latin typeface="Arial"/>
             </a:endParaRPr>
           </a:p>
@@ -2197,7 +2140,7 @@
             <a:spLocks noGrp="1"/>
           </p:cNvSpPr>
           <p:nvPr>
-            <p:ph type="ftr" idx="3"/>
+            <p:ph type="ftr" idx="2"/>
           </p:nvPr>
         </p:nvSpPr>
         <p:spPr/>
@@ -2217,14 +2160,14 @@
             <a:spLocks noGrp="1"/>
           </p:cNvSpPr>
           <p:nvPr>
-            <p:ph type="sldNum" idx="4"/>
+            <p:ph type="sldNum" idx="3"/>
           </p:nvPr>
         </p:nvSpPr>
         <p:spPr/>
         <p:txBody>
           <a:bodyPr/>
           <a:p>
-            <a:fld id="{C60D5316-401B-470E-A4B8-9403368DD340}" type="slidenum">
+            <a:fld id="{97B2254C-3AD5-4D54-8F10-DBC0E38655EF}" type="slidenum">
               <a:t>&lt;#&gt;</a:t>
             </a:fld>
           </a:p>
@@ -2237,7 +2180,7 @@
             <a:spLocks noGrp="1"/>
           </p:cNvSpPr>
           <p:nvPr>
-            <p:ph type="dt" idx="2"/>
+            <p:ph type="dt" idx="4"/>
           </p:nvPr>
         </p:nvSpPr>
         <p:spPr/>
@@ -2286,7 +2229,7 @@
         <p:spPr>
           <a:xfrm>
             <a:off x="311760" y="744480"/>
-            <a:ext cx="8520120" cy="2052360"/>
+            <a:ext cx="8519760" cy="2052000"/>
           </a:xfrm>
           <a:prstGeom prst="rect">
             <a:avLst/>
@@ -2301,10 +2244,10 @@
             <a:noAutofit/>
           </a:bodyPr>
           <a:p>
-            <a:endParaRPr b="0" lang="ru-RU" sz="1400" spc="-1" strike="noStrike">
-              <a:solidFill>
-                <a:srgbClr val="000000"/>
-              </a:solidFill>
+            <a:pPr algn="ctr">
+              <a:buNone/>
+            </a:pPr>
+            <a:endParaRPr b="0" lang="ru-RU" sz="4400" spc="-1" strike="noStrike">
               <a:latin typeface="Arial"/>
             </a:endParaRPr>
           </a:p>
@@ -2361,7 +2304,7 @@
         <p:txBody>
           <a:bodyPr/>
           <a:p>
-            <a:fld id="{800F0173-FDF6-40B9-84BB-42E982ACD4F1}" type="slidenum">
+            <a:fld id="{03E48BA8-BC25-4DA2-B248-C710B11A1AC7}" type="slidenum">
               <a:t>&lt;#&gt;</a:t>
             </a:fld>
           </a:p>
@@ -2402,7 +2345,7 @@
         <p:spPr>
           <a:xfrm>
             <a:off x="311760" y="744480"/>
-            <a:ext cx="8520120" cy="2052360"/>
+            <a:ext cx="8519760" cy="2052000"/>
           </a:xfrm>
           <a:prstGeom prst="rect">
             <a:avLst/>
@@ -2417,10 +2360,10 @@
             <a:noAutofit/>
           </a:bodyPr>
           <a:p>
-            <a:endParaRPr b="0" lang="ru-RU" sz="1400" spc="-1" strike="noStrike">
-              <a:solidFill>
-                <a:srgbClr val="000000"/>
-              </a:solidFill>
+            <a:pPr algn="ctr">
+              <a:buNone/>
+            </a:pPr>
+            <a:endParaRPr b="0" lang="ru-RU" sz="4400" spc="-1" strike="noStrike">
               <a:latin typeface="Arial"/>
             </a:endParaRPr>
           </a:p>
@@ -2454,10 +2397,7 @@
             <a:normAutofit/>
           </a:bodyPr>
           <a:p>
-            <a:endParaRPr b="0" lang="ru-RU" sz="1400" spc="-1" strike="noStrike">
-              <a:solidFill>
-                <a:srgbClr val="000000"/>
-              </a:solidFill>
+            <a:endParaRPr b="0" lang="ru-RU" sz="3200" spc="-1" strike="noStrike">
               <a:latin typeface="Arial"/>
             </a:endParaRPr>
           </a:p>
@@ -2491,10 +2431,7 @@
             <a:normAutofit/>
           </a:bodyPr>
           <a:p>
-            <a:endParaRPr b="0" lang="ru-RU" sz="1400" spc="-1" strike="noStrike">
-              <a:solidFill>
-                <a:srgbClr val="000000"/>
-              </a:solidFill>
+            <a:endParaRPr b="0" lang="ru-RU" sz="3200" spc="-1" strike="noStrike">
               <a:latin typeface="Arial"/>
             </a:endParaRPr>
           </a:p>
@@ -2528,10 +2465,7 @@
             <a:normAutofit/>
           </a:bodyPr>
           <a:p>
-            <a:endParaRPr b="0" lang="ru-RU" sz="1400" spc="-1" strike="noStrike">
-              <a:solidFill>
-                <a:srgbClr val="000000"/>
-              </a:solidFill>
+            <a:endParaRPr b="0" lang="ru-RU" sz="3200" spc="-1" strike="noStrike">
               <a:latin typeface="Arial"/>
             </a:endParaRPr>
           </a:p>
@@ -2544,7 +2478,7 @@
             <a:spLocks noGrp="1"/>
           </p:cNvSpPr>
           <p:nvPr>
-            <p:ph type="ftr" idx="3"/>
+            <p:ph type="ftr" idx="2"/>
           </p:nvPr>
         </p:nvSpPr>
         <p:spPr/>
@@ -2564,14 +2498,14 @@
             <a:spLocks noGrp="1"/>
           </p:cNvSpPr>
           <p:nvPr>
-            <p:ph type="sldNum" idx="4"/>
+            <p:ph type="sldNum" idx="3"/>
           </p:nvPr>
         </p:nvSpPr>
         <p:spPr/>
         <p:txBody>
           <a:bodyPr/>
           <a:p>
-            <a:fld id="{2867C907-11BF-47BA-B54E-A3D46734F3A0}" type="slidenum">
+            <a:fld id="{63D0149B-1CEA-4F24-A1BC-D3A3FAEBB079}" type="slidenum">
               <a:t>&lt;#&gt;</a:t>
             </a:fld>
           </a:p>
@@ -2584,7 +2518,7 @@
             <a:spLocks noGrp="1"/>
           </p:cNvSpPr>
           <p:nvPr>
-            <p:ph type="dt" idx="2"/>
+            <p:ph type="dt" idx="4"/>
           </p:nvPr>
         </p:nvSpPr>
         <p:spPr/>
@@ -2633,7 +2567,7 @@
         <p:spPr>
           <a:xfrm>
             <a:off x="311760" y="744480"/>
-            <a:ext cx="8520120" cy="2052360"/>
+            <a:ext cx="8519760" cy="2052000"/>
           </a:xfrm>
           <a:prstGeom prst="rect">
             <a:avLst/>
@@ -2648,10 +2582,10 @@
             <a:noAutofit/>
           </a:bodyPr>
           <a:p>
-            <a:endParaRPr b="0" lang="ru-RU" sz="1400" spc="-1" strike="noStrike">
-              <a:solidFill>
-                <a:srgbClr val="000000"/>
-              </a:solidFill>
+            <a:pPr algn="ctr">
+              <a:buNone/>
+            </a:pPr>
+            <a:endParaRPr b="0" lang="ru-RU" sz="4400" spc="-1" strike="noStrike">
               <a:latin typeface="Arial"/>
             </a:endParaRPr>
           </a:p>
@@ -2685,10 +2619,7 @@
             <a:normAutofit/>
           </a:bodyPr>
           <a:p>
-            <a:endParaRPr b="0" lang="ru-RU" sz="1400" spc="-1" strike="noStrike">
-              <a:solidFill>
-                <a:srgbClr val="000000"/>
-              </a:solidFill>
+            <a:endParaRPr b="0" lang="ru-RU" sz="3200" spc="-1" strike="noStrike">
               <a:latin typeface="Arial"/>
             </a:endParaRPr>
           </a:p>
@@ -2722,10 +2653,7 @@
             <a:normAutofit/>
           </a:bodyPr>
           <a:p>
-            <a:endParaRPr b="0" lang="ru-RU" sz="1400" spc="-1" strike="noStrike">
-              <a:solidFill>
-                <a:srgbClr val="000000"/>
-              </a:solidFill>
+            <a:endParaRPr b="0" lang="ru-RU" sz="3200" spc="-1" strike="noStrike">
               <a:latin typeface="Arial"/>
             </a:endParaRPr>
           </a:p>
@@ -2759,10 +2687,7 @@
             <a:normAutofit/>
           </a:bodyPr>
           <a:p>
-            <a:endParaRPr b="0" lang="ru-RU" sz="1400" spc="-1" strike="noStrike">
-              <a:solidFill>
-                <a:srgbClr val="000000"/>
-              </a:solidFill>
+            <a:endParaRPr b="0" lang="ru-RU" sz="3200" spc="-1" strike="noStrike">
               <a:latin typeface="Arial"/>
             </a:endParaRPr>
           </a:p>
@@ -2775,7 +2700,7 @@
             <a:spLocks noGrp="1"/>
           </p:cNvSpPr>
           <p:nvPr>
-            <p:ph type="ftr" idx="3"/>
+            <p:ph type="ftr" idx="2"/>
           </p:nvPr>
         </p:nvSpPr>
         <p:spPr/>
@@ -2795,14 +2720,14 @@
             <a:spLocks noGrp="1"/>
           </p:cNvSpPr>
           <p:nvPr>
-            <p:ph type="sldNum" idx="4"/>
+            <p:ph type="sldNum" idx="3"/>
           </p:nvPr>
         </p:nvSpPr>
         <p:spPr/>
         <p:txBody>
           <a:bodyPr/>
           <a:p>
-            <a:fld id="{02C1D2FE-C6EE-438B-B815-15875DF5217E}" type="slidenum">
+            <a:fld id="{89CF4204-3699-414B-8150-D08646724336}" type="slidenum">
               <a:t>&lt;#&gt;</a:t>
             </a:fld>
           </a:p>
@@ -2815,7 +2740,7 @@
             <a:spLocks noGrp="1"/>
           </p:cNvSpPr>
           <p:nvPr>
-            <p:ph type="dt" idx="2"/>
+            <p:ph type="dt" idx="4"/>
           </p:nvPr>
         </p:nvSpPr>
         <p:spPr/>
@@ -2864,7 +2789,7 @@
         <p:spPr>
           <a:xfrm>
             <a:off x="311760" y="744480"/>
-            <a:ext cx="8520120" cy="2052360"/>
+            <a:ext cx="8519760" cy="2052000"/>
           </a:xfrm>
           <a:prstGeom prst="rect">
             <a:avLst/>
@@ -2879,10 +2804,10 @@
             <a:noAutofit/>
           </a:bodyPr>
           <a:p>
-            <a:endParaRPr b="0" lang="ru-RU" sz="1400" spc="-1" strike="noStrike">
-              <a:solidFill>
-                <a:srgbClr val="000000"/>
-              </a:solidFill>
+            <a:pPr algn="ctr">
+              <a:buNone/>
+            </a:pPr>
+            <a:endParaRPr b="0" lang="ru-RU" sz="4400" spc="-1" strike="noStrike">
               <a:latin typeface="Arial"/>
             </a:endParaRPr>
           </a:p>
@@ -2916,10 +2841,7 @@
             <a:normAutofit/>
           </a:bodyPr>
           <a:p>
-            <a:endParaRPr b="0" lang="ru-RU" sz="1400" spc="-1" strike="noStrike">
-              <a:solidFill>
-                <a:srgbClr val="000000"/>
-              </a:solidFill>
+            <a:endParaRPr b="0" lang="ru-RU" sz="3200" spc="-1" strike="noStrike">
               <a:latin typeface="Arial"/>
             </a:endParaRPr>
           </a:p>
@@ -2953,10 +2875,7 @@
             <a:normAutofit/>
           </a:bodyPr>
           <a:p>
-            <a:endParaRPr b="0" lang="ru-RU" sz="1400" spc="-1" strike="noStrike">
-              <a:solidFill>
-                <a:srgbClr val="000000"/>
-              </a:solidFill>
+            <a:endParaRPr b="0" lang="ru-RU" sz="3200" spc="-1" strike="noStrike">
               <a:latin typeface="Arial"/>
             </a:endParaRPr>
           </a:p>
@@ -2969,7 +2888,7 @@
             <a:spLocks noGrp="1"/>
           </p:cNvSpPr>
           <p:nvPr>
-            <p:ph type="ftr" idx="3"/>
+            <p:ph type="ftr" idx="2"/>
           </p:nvPr>
         </p:nvSpPr>
         <p:spPr/>
@@ -2989,14 +2908,14 @@
             <a:spLocks noGrp="1"/>
           </p:cNvSpPr>
           <p:nvPr>
-            <p:ph type="sldNum" idx="4"/>
+            <p:ph type="sldNum" idx="3"/>
           </p:nvPr>
         </p:nvSpPr>
         <p:spPr/>
         <p:txBody>
           <a:bodyPr/>
           <a:p>
-            <a:fld id="{7B170663-9750-45D2-9463-A8F26B163E75}" type="slidenum">
+            <a:fld id="{5E92DA0C-3F83-4BEC-99A3-A156AFFF3539}" type="slidenum">
               <a:t>&lt;#&gt;</a:t>
             </a:fld>
           </a:p>
@@ -3009,7 +2928,7 @@
             <a:spLocks noGrp="1"/>
           </p:cNvSpPr>
           <p:nvPr>
-            <p:ph type="dt" idx="2"/>
+            <p:ph type="dt" idx="4"/>
           </p:nvPr>
         </p:nvSpPr>
         <p:spPr/>
@@ -3058,7 +2977,7 @@
         <p:spPr>
           <a:xfrm>
             <a:off x="311760" y="744480"/>
-            <a:ext cx="8520120" cy="2052360"/>
+            <a:ext cx="8519760" cy="2052000"/>
           </a:xfrm>
           <a:prstGeom prst="rect">
             <a:avLst/>
@@ -3073,10 +2992,10 @@
             <a:noAutofit/>
           </a:bodyPr>
           <a:p>
-            <a:endParaRPr b="0" lang="ru-RU" sz="1400" spc="-1" strike="noStrike">
-              <a:solidFill>
-                <a:srgbClr val="000000"/>
-              </a:solidFill>
+            <a:pPr algn="ctr">
+              <a:buNone/>
+            </a:pPr>
+            <a:endParaRPr b="0" lang="ru-RU" sz="4400" spc="-1" strike="noStrike">
               <a:latin typeface="Arial"/>
             </a:endParaRPr>
           </a:p>
@@ -3110,10 +3029,7 @@
             <a:normAutofit/>
           </a:bodyPr>
           <a:p>
-            <a:endParaRPr b="0" lang="ru-RU" sz="1400" spc="-1" strike="noStrike">
-              <a:solidFill>
-                <a:srgbClr val="000000"/>
-              </a:solidFill>
+            <a:endParaRPr b="0" lang="ru-RU" sz="3200" spc="-1" strike="noStrike">
               <a:latin typeface="Arial"/>
             </a:endParaRPr>
           </a:p>
@@ -3147,10 +3063,7 @@
             <a:normAutofit/>
           </a:bodyPr>
           <a:p>
-            <a:endParaRPr b="0" lang="ru-RU" sz="1400" spc="-1" strike="noStrike">
-              <a:solidFill>
-                <a:srgbClr val="000000"/>
-              </a:solidFill>
+            <a:endParaRPr b="0" lang="ru-RU" sz="3200" spc="-1" strike="noStrike">
               <a:latin typeface="Arial"/>
             </a:endParaRPr>
           </a:p>
@@ -3184,10 +3097,7 @@
             <a:normAutofit/>
           </a:bodyPr>
           <a:p>
-            <a:endParaRPr b="0" lang="ru-RU" sz="1400" spc="-1" strike="noStrike">
-              <a:solidFill>
-                <a:srgbClr val="000000"/>
-              </a:solidFill>
+            <a:endParaRPr b="0" lang="ru-RU" sz="3200" spc="-1" strike="noStrike">
               <a:latin typeface="Arial"/>
             </a:endParaRPr>
           </a:p>
@@ -3221,10 +3131,7 @@
             <a:normAutofit/>
           </a:bodyPr>
           <a:p>
-            <a:endParaRPr b="0" lang="ru-RU" sz="1400" spc="-1" strike="noStrike">
-              <a:solidFill>
-                <a:srgbClr val="000000"/>
-              </a:solidFill>
+            <a:endParaRPr b="0" lang="ru-RU" sz="3200" spc="-1" strike="noStrike">
               <a:latin typeface="Arial"/>
             </a:endParaRPr>
           </a:p>
@@ -3237,7 +3144,7 @@
             <a:spLocks noGrp="1"/>
           </p:cNvSpPr>
           <p:nvPr>
-            <p:ph type="ftr" idx="3"/>
+            <p:ph type="ftr" idx="2"/>
           </p:nvPr>
         </p:nvSpPr>
         <p:spPr/>
@@ -3257,14 +3164,14 @@
             <a:spLocks noGrp="1"/>
           </p:cNvSpPr>
           <p:nvPr>
-            <p:ph type="sldNum" idx="4"/>
+            <p:ph type="sldNum" idx="3"/>
           </p:nvPr>
         </p:nvSpPr>
         <p:spPr/>
         <p:txBody>
           <a:bodyPr/>
           <a:p>
-            <a:fld id="{49BE3B03-FEF9-4B04-AACE-C6C5811F5B89}" type="slidenum">
+            <a:fld id="{84ED048B-55B1-4927-863C-A5E5B0AFF279}" type="slidenum">
               <a:t>&lt;#&gt;</a:t>
             </a:fld>
           </a:p>
@@ -3277,7 +3184,7 @@
             <a:spLocks noGrp="1"/>
           </p:cNvSpPr>
           <p:nvPr>
-            <p:ph type="dt" idx="2"/>
+            <p:ph type="dt" idx="4"/>
           </p:nvPr>
         </p:nvSpPr>
         <p:spPr/>
@@ -3326,7 +3233,7 @@
         <p:spPr>
           <a:xfrm>
             <a:off x="311760" y="744480"/>
-            <a:ext cx="8520120" cy="2052360"/>
+            <a:ext cx="8519760" cy="2052000"/>
           </a:xfrm>
           <a:prstGeom prst="rect">
             <a:avLst/>
@@ -3341,10 +3248,10 @@
             <a:noAutofit/>
           </a:bodyPr>
           <a:p>
-            <a:endParaRPr b="0" lang="ru-RU" sz="1400" spc="-1" strike="noStrike">
-              <a:solidFill>
-                <a:srgbClr val="000000"/>
-              </a:solidFill>
+            <a:pPr algn="ctr">
+              <a:buNone/>
+            </a:pPr>
+            <a:endParaRPr b="0" lang="ru-RU" sz="4400" spc="-1" strike="noStrike">
               <a:latin typeface="Arial"/>
             </a:endParaRPr>
           </a:p>
@@ -3375,13 +3282,10 @@
         </p:spPr>
         <p:txBody>
           <a:bodyPr lIns="0" rIns="0" tIns="0" bIns="0" anchor="t">
-            <a:normAutofit/>
+            <a:normAutofit fontScale="73000"/>
           </a:bodyPr>
           <a:p>
-            <a:endParaRPr b="0" lang="ru-RU" sz="1400" spc="-1" strike="noStrike">
-              <a:solidFill>
-                <a:srgbClr val="000000"/>
-              </a:solidFill>
+            <a:endParaRPr b="0" lang="ru-RU" sz="3200" spc="-1" strike="noStrike">
               <a:latin typeface="Arial"/>
             </a:endParaRPr>
           </a:p>
@@ -3412,13 +3316,10 @@
         </p:spPr>
         <p:txBody>
           <a:bodyPr lIns="0" rIns="0" tIns="0" bIns="0" anchor="t">
-            <a:normAutofit/>
+            <a:normAutofit fontScale="73000"/>
           </a:bodyPr>
           <a:p>
-            <a:endParaRPr b="0" lang="ru-RU" sz="1400" spc="-1" strike="noStrike">
-              <a:solidFill>
-                <a:srgbClr val="000000"/>
-              </a:solidFill>
+            <a:endParaRPr b="0" lang="ru-RU" sz="3200" spc="-1" strike="noStrike">
               <a:latin typeface="Arial"/>
             </a:endParaRPr>
           </a:p>
@@ -3449,13 +3350,10 @@
         </p:spPr>
         <p:txBody>
           <a:bodyPr lIns="0" rIns="0" tIns="0" bIns="0" anchor="t">
-            <a:normAutofit/>
+            <a:normAutofit fontScale="73000"/>
           </a:bodyPr>
           <a:p>
-            <a:endParaRPr b="0" lang="ru-RU" sz="1400" spc="-1" strike="noStrike">
-              <a:solidFill>
-                <a:srgbClr val="000000"/>
-              </a:solidFill>
+            <a:endParaRPr b="0" lang="ru-RU" sz="3200" spc="-1" strike="noStrike">
               <a:latin typeface="Arial"/>
             </a:endParaRPr>
           </a:p>
@@ -3486,13 +3384,10 @@
         </p:spPr>
         <p:txBody>
           <a:bodyPr lIns="0" rIns="0" tIns="0" bIns="0" anchor="t">
-            <a:normAutofit/>
+            <a:normAutofit fontScale="73000"/>
           </a:bodyPr>
           <a:p>
-            <a:endParaRPr b="0" lang="ru-RU" sz="1400" spc="-1" strike="noStrike">
-              <a:solidFill>
-                <a:srgbClr val="000000"/>
-              </a:solidFill>
+            <a:endParaRPr b="0" lang="ru-RU" sz="3200" spc="-1" strike="noStrike">
               <a:latin typeface="Arial"/>
             </a:endParaRPr>
           </a:p>
@@ -3523,13 +3418,10 @@
         </p:spPr>
         <p:txBody>
           <a:bodyPr lIns="0" rIns="0" tIns="0" bIns="0" anchor="t">
-            <a:normAutofit/>
+            <a:normAutofit fontScale="73000"/>
           </a:bodyPr>
           <a:p>
-            <a:endParaRPr b="0" lang="ru-RU" sz="1400" spc="-1" strike="noStrike">
-              <a:solidFill>
-                <a:srgbClr val="000000"/>
-              </a:solidFill>
+            <a:endParaRPr b="0" lang="ru-RU" sz="3200" spc="-1" strike="noStrike">
               <a:latin typeface="Arial"/>
             </a:endParaRPr>
           </a:p>
@@ -3560,13 +3452,10 @@
         </p:spPr>
         <p:txBody>
           <a:bodyPr lIns="0" rIns="0" tIns="0" bIns="0" anchor="t">
-            <a:normAutofit/>
+            <a:normAutofit fontScale="73000"/>
           </a:bodyPr>
           <a:p>
-            <a:endParaRPr b="0" lang="ru-RU" sz="1400" spc="-1" strike="noStrike">
-              <a:solidFill>
-                <a:srgbClr val="000000"/>
-              </a:solidFill>
+            <a:endParaRPr b="0" lang="ru-RU" sz="3200" spc="-1" strike="noStrike">
               <a:latin typeface="Arial"/>
             </a:endParaRPr>
           </a:p>
@@ -3579,7 +3468,7 @@
             <a:spLocks noGrp="1"/>
           </p:cNvSpPr>
           <p:nvPr>
-            <p:ph type="ftr" idx="3"/>
+            <p:ph type="ftr" idx="2"/>
           </p:nvPr>
         </p:nvSpPr>
         <p:spPr/>
@@ -3599,14 +3488,14 @@
             <a:spLocks noGrp="1"/>
           </p:cNvSpPr>
           <p:nvPr>
-            <p:ph type="sldNum" idx="4"/>
+            <p:ph type="sldNum" idx="3"/>
           </p:nvPr>
         </p:nvSpPr>
         <p:spPr/>
         <p:txBody>
           <a:bodyPr/>
           <a:p>
-            <a:fld id="{E7B80E59-1A4A-4A1E-B158-DB6B992FE4A5}" type="slidenum">
+            <a:fld id="{C8A3ADE6-442C-4342-957C-0A8BE6D270AC}" type="slidenum">
               <a:t>&lt;#&gt;</a:t>
             </a:fld>
           </a:p>
@@ -3619,7 +3508,7 @@
             <a:spLocks noGrp="1"/>
           </p:cNvSpPr>
           <p:nvPr>
-            <p:ph type="dt" idx="2"/>
+            <p:ph type="dt" idx="4"/>
           </p:nvPr>
         </p:nvSpPr>
         <p:spPr/>
@@ -3668,7 +3557,7 @@
         <p:spPr>
           <a:xfrm>
             <a:off x="311760" y="744480"/>
-            <a:ext cx="8520120" cy="2052360"/>
+            <a:ext cx="8519760" cy="2052000"/>
           </a:xfrm>
           <a:prstGeom prst="rect">
             <a:avLst/>
@@ -3683,10 +3572,10 @@
             <a:noAutofit/>
           </a:bodyPr>
           <a:p>
-            <a:endParaRPr b="0" lang="ru-RU" sz="1400" spc="-1" strike="noStrike">
-              <a:solidFill>
-                <a:srgbClr val="000000"/>
-              </a:solidFill>
+            <a:pPr algn="ctr">
+              <a:buNone/>
+            </a:pPr>
+            <a:endParaRPr b="0" lang="ru-RU" sz="4400" spc="-1" strike="noStrike">
               <a:latin typeface="Arial"/>
             </a:endParaRPr>
           </a:p>
@@ -3720,10 +3609,7 @@
             <a:normAutofit/>
           </a:bodyPr>
           <a:p>
-            <a:endParaRPr b="0" lang="ru-RU" sz="1400" spc="-1" strike="noStrike">
-              <a:solidFill>
-                <a:srgbClr val="000000"/>
-              </a:solidFill>
+            <a:endParaRPr b="0" lang="ru-RU" sz="3200" spc="-1" strike="noStrike">
               <a:latin typeface="Arial"/>
             </a:endParaRPr>
           </a:p>
@@ -3743,7 +3629,7 @@
         <p:txBody>
           <a:bodyPr/>
           <a:p>
-            <a:fld id="{E6C7CD27-A4A5-4DBF-8940-3C853A8DD2CE}" type="slidenum">
+            <a:fld id="{5118EFB5-2CD9-4BF9-8945-4FDD99BB22E9}" type="slidenum">
               <a:t>&lt;#&gt;</a:t>
             </a:fld>
           </a:p>
@@ -3784,7 +3670,7 @@
         <p:spPr>
           <a:xfrm>
             <a:off x="311760" y="744480"/>
-            <a:ext cx="8520120" cy="2052360"/>
+            <a:ext cx="8519760" cy="2052000"/>
           </a:xfrm>
           <a:prstGeom prst="rect">
             <a:avLst/>
@@ -3799,10 +3685,10 @@
             <a:noAutofit/>
           </a:bodyPr>
           <a:p>
-            <a:endParaRPr b="0" lang="ru-RU" sz="1400" spc="-1" strike="noStrike">
-              <a:solidFill>
-                <a:srgbClr val="000000"/>
-              </a:solidFill>
+            <a:pPr algn="ctr">
+              <a:buNone/>
+            </a:pPr>
+            <a:endParaRPr b="0" lang="ru-RU" sz="4400" spc="-1" strike="noStrike">
               <a:latin typeface="Arial"/>
             </a:endParaRPr>
           </a:p>
@@ -3836,10 +3722,7 @@
             <a:normAutofit/>
           </a:bodyPr>
           <a:p>
-            <a:endParaRPr b="0" lang="ru-RU" sz="1400" spc="-1" strike="noStrike">
-              <a:solidFill>
-                <a:srgbClr val="000000"/>
-              </a:solidFill>
+            <a:endParaRPr b="0" lang="ru-RU" sz="3200" spc="-1" strike="noStrike">
               <a:latin typeface="Arial"/>
             </a:endParaRPr>
           </a:p>
@@ -3873,10 +3756,7 @@
             <a:normAutofit/>
           </a:bodyPr>
           <a:p>
-            <a:endParaRPr b="0" lang="ru-RU" sz="1400" spc="-1" strike="noStrike">
-              <a:solidFill>
-                <a:srgbClr val="000000"/>
-              </a:solidFill>
+            <a:endParaRPr b="0" lang="ru-RU" sz="3200" spc="-1" strike="noStrike">
               <a:latin typeface="Arial"/>
             </a:endParaRPr>
           </a:p>
@@ -3896,7 +3776,7 @@
         <p:txBody>
           <a:bodyPr/>
           <a:p>
-            <a:fld id="{C7EB2ACB-BC41-440A-B838-1C2D4DE97B09}" type="slidenum">
+            <a:fld id="{5293023D-BCA9-4FB6-8A78-11687B85E59D}" type="slidenum">
               <a:t>&lt;#&gt;</a:t>
             </a:fld>
           </a:p>
@@ -3937,7 +3817,7 @@
         <p:spPr>
           <a:xfrm>
             <a:off x="311760" y="744480"/>
-            <a:ext cx="8520120" cy="2052360"/>
+            <a:ext cx="8519760" cy="2052000"/>
           </a:xfrm>
           <a:prstGeom prst="rect">
             <a:avLst/>
@@ -3952,10 +3832,10 @@
             <a:noAutofit/>
           </a:bodyPr>
           <a:p>
-            <a:endParaRPr b="0" lang="ru-RU" sz="1400" spc="-1" strike="noStrike">
-              <a:solidFill>
-                <a:srgbClr val="000000"/>
-              </a:solidFill>
+            <a:pPr algn="ctr">
+              <a:buNone/>
+            </a:pPr>
+            <a:endParaRPr b="0" lang="ru-RU" sz="4400" spc="-1" strike="noStrike">
               <a:latin typeface="Arial"/>
             </a:endParaRPr>
           </a:p>
@@ -3975,7 +3855,7 @@
         <p:txBody>
           <a:bodyPr/>
           <a:p>
-            <a:fld id="{F7972EA0-6FF3-42EE-B488-88C31854422D}" type="slidenum">
+            <a:fld id="{47078F9D-8C0D-417A-AEF2-5787687221E2}" type="slidenum">
               <a:t>&lt;#&gt;</a:t>
             </a:fld>
           </a:p>
@@ -4016,7 +3896,7 @@
         <p:spPr>
           <a:xfrm>
             <a:off x="311760" y="744480"/>
-            <a:ext cx="8520120" cy="9514800"/>
+            <a:ext cx="8519760" cy="9513000"/>
           </a:xfrm>
           <a:prstGeom prst="rect">
             <a:avLst/>
@@ -4054,7 +3934,7 @@
         <p:txBody>
           <a:bodyPr/>
           <a:p>
-            <a:fld id="{094DF881-A8C5-4737-9713-5CEF416EB80B}" type="slidenum">
+            <a:fld id="{44AC6E89-FFA3-452E-84DD-D7CB950E75A8}" type="slidenum">
               <a:t>&lt;#&gt;</a:t>
             </a:fld>
           </a:p>
@@ -4095,7 +3975,7 @@
         <p:spPr>
           <a:xfrm>
             <a:off x="311760" y="744480"/>
-            <a:ext cx="8520120" cy="2052360"/>
+            <a:ext cx="8519760" cy="2052000"/>
           </a:xfrm>
           <a:prstGeom prst="rect">
             <a:avLst/>
@@ -4110,10 +3990,10 @@
             <a:noAutofit/>
           </a:bodyPr>
           <a:p>
-            <a:endParaRPr b="0" lang="ru-RU" sz="1400" spc="-1" strike="noStrike">
-              <a:solidFill>
-                <a:srgbClr val="000000"/>
-              </a:solidFill>
+            <a:pPr algn="ctr">
+              <a:buNone/>
+            </a:pPr>
+            <a:endParaRPr b="0" lang="ru-RU" sz="4400" spc="-1" strike="noStrike">
               <a:latin typeface="Arial"/>
             </a:endParaRPr>
           </a:p>
@@ -4147,10 +4027,7 @@
             <a:normAutofit/>
           </a:bodyPr>
           <a:p>
-            <a:endParaRPr b="0" lang="ru-RU" sz="1400" spc="-1" strike="noStrike">
-              <a:solidFill>
-                <a:srgbClr val="000000"/>
-              </a:solidFill>
+            <a:endParaRPr b="0" lang="ru-RU" sz="3200" spc="-1" strike="noStrike">
               <a:latin typeface="Arial"/>
             </a:endParaRPr>
           </a:p>
@@ -4184,10 +4061,7 @@
             <a:normAutofit/>
           </a:bodyPr>
           <a:p>
-            <a:endParaRPr b="0" lang="ru-RU" sz="1400" spc="-1" strike="noStrike">
-              <a:solidFill>
-                <a:srgbClr val="000000"/>
-              </a:solidFill>
+            <a:endParaRPr b="0" lang="ru-RU" sz="3200" spc="-1" strike="noStrike">
               <a:latin typeface="Arial"/>
             </a:endParaRPr>
           </a:p>
@@ -4221,10 +4095,7 @@
             <a:normAutofit/>
           </a:bodyPr>
           <a:p>
-            <a:endParaRPr b="0" lang="ru-RU" sz="1400" spc="-1" strike="noStrike">
-              <a:solidFill>
-                <a:srgbClr val="000000"/>
-              </a:solidFill>
+            <a:endParaRPr b="0" lang="ru-RU" sz="3200" spc="-1" strike="noStrike">
               <a:latin typeface="Arial"/>
             </a:endParaRPr>
           </a:p>
@@ -4244,7 +4115,7 @@
         <p:txBody>
           <a:bodyPr/>
           <a:p>
-            <a:fld id="{FB240623-448F-4F16-B09D-7E83B217E0C0}" type="slidenum">
+            <a:fld id="{F67EF232-3F7A-4E22-81E0-6A0DE8F73A5C}" type="slidenum">
               <a:t>&lt;#&gt;</a:t>
             </a:fld>
           </a:p>
@@ -4285,7 +4156,7 @@
         <p:spPr>
           <a:xfrm>
             <a:off x="311760" y="744480"/>
-            <a:ext cx="8520120" cy="2052360"/>
+            <a:ext cx="8519760" cy="2052000"/>
           </a:xfrm>
           <a:prstGeom prst="rect">
             <a:avLst/>
@@ -4300,10 +4171,10 @@
             <a:noAutofit/>
           </a:bodyPr>
           <a:p>
-            <a:endParaRPr b="0" lang="ru-RU" sz="1400" spc="-1" strike="noStrike">
-              <a:solidFill>
-                <a:srgbClr val="000000"/>
-              </a:solidFill>
+            <a:pPr algn="ctr">
+              <a:buNone/>
+            </a:pPr>
+            <a:endParaRPr b="0" lang="ru-RU" sz="4400" spc="-1" strike="noStrike">
               <a:latin typeface="Arial"/>
             </a:endParaRPr>
           </a:p>
@@ -4337,10 +4208,7 @@
             <a:normAutofit/>
           </a:bodyPr>
           <a:p>
-            <a:endParaRPr b="0" lang="ru-RU" sz="1400" spc="-1" strike="noStrike">
-              <a:solidFill>
-                <a:srgbClr val="000000"/>
-              </a:solidFill>
+            <a:endParaRPr b="0" lang="ru-RU" sz="3200" spc="-1" strike="noStrike">
               <a:latin typeface="Arial"/>
             </a:endParaRPr>
           </a:p>
@@ -4374,10 +4242,7 @@
             <a:normAutofit/>
           </a:bodyPr>
           <a:p>
-            <a:endParaRPr b="0" lang="ru-RU" sz="1400" spc="-1" strike="noStrike">
-              <a:solidFill>
-                <a:srgbClr val="000000"/>
-              </a:solidFill>
+            <a:endParaRPr b="0" lang="ru-RU" sz="3200" spc="-1" strike="noStrike">
               <a:latin typeface="Arial"/>
             </a:endParaRPr>
           </a:p>
@@ -4411,10 +4276,7 @@
             <a:normAutofit/>
           </a:bodyPr>
           <a:p>
-            <a:endParaRPr b="0" lang="ru-RU" sz="1400" spc="-1" strike="noStrike">
-              <a:solidFill>
-                <a:srgbClr val="000000"/>
-              </a:solidFill>
+            <a:endParaRPr b="0" lang="ru-RU" sz="3200" spc="-1" strike="noStrike">
               <a:latin typeface="Arial"/>
             </a:endParaRPr>
           </a:p>
@@ -4434,7 +4296,7 @@
         <p:txBody>
           <a:bodyPr/>
           <a:p>
-            <a:fld id="{3A4E407A-685D-4805-8165-198EE03029C7}" type="slidenum">
+            <a:fld id="{98B0ACD5-516C-4492-A9C0-FE7691DB3659}" type="slidenum">
               <a:t>&lt;#&gt;</a:t>
             </a:fld>
           </a:p>
@@ -4475,7 +4337,7 @@
         <p:spPr>
           <a:xfrm>
             <a:off x="311760" y="744480"/>
-            <a:ext cx="8520120" cy="2052360"/>
+            <a:ext cx="8519760" cy="2052000"/>
           </a:xfrm>
           <a:prstGeom prst="rect">
             <a:avLst/>
@@ -4490,10 +4352,10 @@
             <a:noAutofit/>
           </a:bodyPr>
           <a:p>
-            <a:endParaRPr b="0" lang="ru-RU" sz="1400" spc="-1" strike="noStrike">
-              <a:solidFill>
-                <a:srgbClr val="000000"/>
-              </a:solidFill>
+            <a:pPr algn="ctr">
+              <a:buNone/>
+            </a:pPr>
+            <a:endParaRPr b="0" lang="ru-RU" sz="4400" spc="-1" strike="noStrike">
               <a:latin typeface="Arial"/>
             </a:endParaRPr>
           </a:p>
@@ -4527,10 +4389,7 @@
             <a:normAutofit/>
           </a:bodyPr>
           <a:p>
-            <a:endParaRPr b="0" lang="ru-RU" sz="1400" spc="-1" strike="noStrike">
-              <a:solidFill>
-                <a:srgbClr val="000000"/>
-              </a:solidFill>
+            <a:endParaRPr b="0" lang="ru-RU" sz="3200" spc="-1" strike="noStrike">
               <a:latin typeface="Arial"/>
             </a:endParaRPr>
           </a:p>
@@ -4564,10 +4423,7 @@
             <a:normAutofit/>
           </a:bodyPr>
           <a:p>
-            <a:endParaRPr b="0" lang="ru-RU" sz="1400" spc="-1" strike="noStrike">
-              <a:solidFill>
-                <a:srgbClr val="000000"/>
-              </a:solidFill>
+            <a:endParaRPr b="0" lang="ru-RU" sz="3200" spc="-1" strike="noStrike">
               <a:latin typeface="Arial"/>
             </a:endParaRPr>
           </a:p>
@@ -4601,10 +4457,7 @@
             <a:normAutofit/>
           </a:bodyPr>
           <a:p>
-            <a:endParaRPr b="0" lang="ru-RU" sz="1400" spc="-1" strike="noStrike">
-              <a:solidFill>
-                <a:srgbClr val="000000"/>
-              </a:solidFill>
+            <a:endParaRPr b="0" lang="ru-RU" sz="3200" spc="-1" strike="noStrike">
               <a:latin typeface="Arial"/>
             </a:endParaRPr>
           </a:p>
@@ -4624,7 +4477,7 @@
         <p:txBody>
           <a:bodyPr/>
           <a:p>
-            <a:fld id="{517E9F10-46E1-4E55-A1F1-0CDAA6F38759}" type="slidenum">
+            <a:fld id="{D7266B34-64E4-4836-B762-9F563FB348B0}" type="slidenum">
               <a:t>&lt;#&gt;</a:t>
             </a:fld>
           </a:p>
@@ -4672,34 +4525,28 @@
         <p:spPr>
           <a:xfrm>
             <a:off x="311760" y="744480"/>
-            <a:ext cx="8520120" cy="2052360"/>
-          </a:xfrm>
-          <a:prstGeom prst="rect">
-            <a:avLst/>
-          </a:prstGeom>
-          <a:noFill/>
-          <a:ln w="0">
-            <a:noFill/>
-          </a:ln>
-        </p:spPr>
-        <p:txBody>
-          <a:bodyPr tIns="91440" bIns="91440" anchor="b">
-            <a:normAutofit fontScale="88000"/>
+            <a:ext cx="8519760" cy="2052000"/>
+          </a:xfrm>
+          <a:prstGeom prst="rect">
+            <a:avLst/>
+          </a:prstGeom>
+          <a:noFill/>
+          <a:ln w="0">
+            <a:noFill/>
+          </a:ln>
+        </p:spPr>
+        <p:txBody>
+          <a:bodyPr lIns="0" rIns="0" tIns="0" bIns="0" anchor="ctr">
+            <a:noAutofit/>
           </a:bodyPr>
           <a:p>
             <a:r>
-              <a:rPr b="0" lang="ru-RU" sz="5200" spc="-1" strike="noStrike">
-                <a:solidFill>
-                  <a:srgbClr val="000000"/>
-                </a:solidFill>
+              <a:rPr b="0" lang="ru-RU" sz="1800" spc="-1" strike="noStrike">
                 <a:latin typeface="Arial"/>
               </a:rPr>
               <a:t>Для правки текста заглавия щёлкните мышью</a:t>
             </a:r>
-            <a:endParaRPr b="0" lang="ru-RU" sz="5200" spc="-1" strike="noStrike">
-              <a:solidFill>
-                <a:srgbClr val="000000"/>
-              </a:solidFill>
+            <a:endParaRPr b="0" lang="ru-RU" sz="1800" spc="-1" strike="noStrike">
               <a:latin typeface="Arial"/>
             </a:endParaRPr>
           </a:p>
@@ -4718,19 +4565,19 @@
         <p:spPr>
           <a:xfrm>
             <a:off x="8472600" y="4663080"/>
-            <a:ext cx="548280" cy="393120"/>
-          </a:xfrm>
-          <a:prstGeom prst="rect">
-            <a:avLst/>
-          </a:prstGeom>
-          <a:noFill/>
-          <a:ln w="0">
-            <a:noFill/>
-          </a:ln>
-        </p:spPr>
-        <p:txBody>
-          <a:bodyPr tIns="91440" bIns="91440" anchor="ctr">
-            <a:normAutofit/>
+            <a:ext cx="547920" cy="392760"/>
+          </a:xfrm>
+          <a:prstGeom prst="rect">
+            <a:avLst/>
+          </a:prstGeom>
+          <a:noFill/>
+          <a:ln w="0">
+            <a:noFill/>
+          </a:ln>
+        </p:spPr>
+        <p:txBody>
+          <a:bodyPr lIns="90000" rIns="90000" tIns="91440" bIns="91440" anchor="ctr">
+            <a:noAutofit/>
           </a:bodyPr>
           <a:lstStyle>
             <a:lvl1pPr algn="r">
@@ -4760,7 +4607,7 @@
                 <a:tab algn="l" pos="0"/>
               </a:tabLst>
             </a:pPr>
-            <a:fld id="{2E6F7994-E0B1-4066-AACB-192A676EE927}" type="slidenum">
+            <a:fld id="{45C3FBE4-F694-474E-BBCC-249339B4E4D8}" type="slidenum">
               <a:rPr b="0" lang="ru" sz="1000" spc="-1" strike="noStrike">
                 <a:solidFill>
                   <a:srgbClr val="595959"/>
@@ -4768,7 +4615,7 @@
                 <a:latin typeface="Arial"/>
                 <a:ea typeface="Arial"/>
               </a:rPr>
-              <a:t>&lt;номер&gt;</a:t>
+              <a:t>8</a:t>
             </a:fld>
             <a:endParaRPr b="0" lang="ru-RU" sz="1000" spc="-1" strike="noStrike">
               <a:latin typeface="Times New Roman"/>
@@ -4816,18 +4663,12 @@
               <a:buChar char=""/>
             </a:pPr>
             <a:r>
-              <a:rPr b="0" lang="ru-RU" sz="1400" spc="-1" strike="noStrike">
-                <a:solidFill>
-                  <a:srgbClr val="000000"/>
-                </a:solidFill>
+              <a:rPr b="0" lang="ru-RU" sz="3200" spc="-1" strike="noStrike">
                 <a:latin typeface="Arial"/>
               </a:rPr>
               <a:t>Для правки структуры щёлкните мышью</a:t>
             </a:r>
-            <a:endParaRPr b="0" lang="ru-RU" sz="1400" spc="-1" strike="noStrike">
-              <a:solidFill>
-                <a:srgbClr val="000000"/>
-              </a:solidFill>
+            <a:endParaRPr b="0" lang="ru-RU" sz="3200" spc="-1" strike="noStrike">
               <a:latin typeface="Arial"/>
             </a:endParaRPr>
           </a:p>
@@ -4844,18 +4685,12 @@
               <a:buChar char=""/>
             </a:pPr>
             <a:r>
-              <a:rPr b="0" lang="ru-RU" sz="1400" spc="-1" strike="noStrike">
-                <a:solidFill>
-                  <a:srgbClr val="000000"/>
-                </a:solidFill>
+              <a:rPr b="0" lang="ru-RU" sz="2800" spc="-1" strike="noStrike">
                 <a:latin typeface="Arial"/>
               </a:rPr>
               <a:t>Второй уровень структуры</a:t>
             </a:r>
-            <a:endParaRPr b="0" lang="ru-RU" sz="1400" spc="-1" strike="noStrike">
-              <a:solidFill>
-                <a:srgbClr val="000000"/>
-              </a:solidFill>
+            <a:endParaRPr b="0" lang="ru-RU" sz="2800" spc="-1" strike="noStrike">
               <a:latin typeface="Arial"/>
             </a:endParaRPr>
           </a:p>
@@ -4872,18 +4707,12 @@
               <a:buChar char=""/>
             </a:pPr>
             <a:r>
-              <a:rPr b="0" lang="ru-RU" sz="1400" spc="-1" strike="noStrike">
-                <a:solidFill>
-                  <a:srgbClr val="000000"/>
-                </a:solidFill>
+              <a:rPr b="0" lang="ru-RU" sz="2400" spc="-1" strike="noStrike">
                 <a:latin typeface="Arial"/>
               </a:rPr>
               <a:t>Третий уровень структуры</a:t>
             </a:r>
-            <a:endParaRPr b="0" lang="ru-RU" sz="1400" spc="-1" strike="noStrike">
-              <a:solidFill>
-                <a:srgbClr val="000000"/>
-              </a:solidFill>
+            <a:endParaRPr b="0" lang="ru-RU" sz="2400" spc="-1" strike="noStrike">
               <a:latin typeface="Arial"/>
             </a:endParaRPr>
           </a:p>
@@ -4900,18 +4729,12 @@
               <a:buChar char=""/>
             </a:pPr>
             <a:r>
-              <a:rPr b="0" lang="ru-RU" sz="1400" spc="-1" strike="noStrike">
-                <a:solidFill>
-                  <a:srgbClr val="000000"/>
-                </a:solidFill>
+              <a:rPr b="0" lang="ru-RU" sz="2000" spc="-1" strike="noStrike">
                 <a:latin typeface="Arial"/>
               </a:rPr>
               <a:t>Четвёртый уровень структуры</a:t>
             </a:r>
-            <a:endParaRPr b="0" lang="ru-RU" sz="1400" spc="-1" strike="noStrike">
-              <a:solidFill>
-                <a:srgbClr val="000000"/>
-              </a:solidFill>
+            <a:endParaRPr b="0" lang="ru-RU" sz="2000" spc="-1" strike="noStrike">
               <a:latin typeface="Arial"/>
             </a:endParaRPr>
           </a:p>
@@ -4929,17 +4752,11 @@
             </a:pPr>
             <a:r>
               <a:rPr b="0" lang="ru-RU" sz="2000" spc="-1" strike="noStrike">
-                <a:solidFill>
-                  <a:srgbClr val="000000"/>
-                </a:solidFill>
                 <a:latin typeface="Arial"/>
               </a:rPr>
               <a:t>Пятый уровень структуры</a:t>
             </a:r>
             <a:endParaRPr b="0" lang="ru-RU" sz="2000" spc="-1" strike="noStrike">
-              <a:solidFill>
-                <a:srgbClr val="000000"/>
-              </a:solidFill>
               <a:latin typeface="Arial"/>
             </a:endParaRPr>
           </a:p>
@@ -4957,17 +4774,11 @@
             </a:pPr>
             <a:r>
               <a:rPr b="0" lang="ru-RU" sz="2000" spc="-1" strike="noStrike">
-                <a:solidFill>
-                  <a:srgbClr val="000000"/>
-                </a:solidFill>
                 <a:latin typeface="Arial"/>
               </a:rPr>
               <a:t>Шестой уровень структуры</a:t>
             </a:r>
             <a:endParaRPr b="0" lang="ru-RU" sz="2000" spc="-1" strike="noStrike">
-              <a:solidFill>
-                <a:srgbClr val="000000"/>
-              </a:solidFill>
               <a:latin typeface="Arial"/>
             </a:endParaRPr>
           </a:p>
@@ -4985,17 +4796,11 @@
             </a:pPr>
             <a:r>
               <a:rPr b="0" lang="ru-RU" sz="2000" spc="-1" strike="noStrike">
-                <a:solidFill>
-                  <a:srgbClr val="000000"/>
-                </a:solidFill>
                 <a:latin typeface="Arial"/>
               </a:rPr>
               <a:t>Седьмой уровень структуры</a:t>
             </a:r>
             <a:endParaRPr b="0" lang="ru-RU" sz="2000" spc="-1" strike="noStrike">
-              <a:solidFill>
-                <a:srgbClr val="000000"/>
-              </a:solidFill>
               <a:latin typeface="Arial"/>
             </a:endParaRPr>
           </a:p>
@@ -5052,48 +4857,220 @@
             <a:spLocks noGrp="1"/>
           </p:cNvSpPr>
           <p:nvPr>
+            <p:ph type="ftr" idx="2"/>
+          </p:nvPr>
+        </p:nvSpPr>
+        <p:spPr>
+          <a:xfrm>
+            <a:off x="3124080" y="4767120"/>
+            <a:ext cx="2894760" cy="273240"/>
+          </a:xfrm>
+          <a:prstGeom prst="rect">
+            <a:avLst/>
+          </a:prstGeom>
+          <a:noFill/>
+          <a:ln w="0">
+            <a:noFill/>
+          </a:ln>
+        </p:spPr>
+        <p:txBody>
+          <a:bodyPr lIns="90000" rIns="90000" tIns="45000" bIns="45000" anchor="ctr">
+            <a:noAutofit/>
+          </a:bodyPr>
+          <a:lstStyle>
+            <a:lvl1pPr algn="ctr">
+              <a:lnSpc>
+                <a:spcPct val="100000"/>
+              </a:lnSpc>
+              <a:buNone/>
+              <a:defRPr b="0" lang="ru-RU" sz="1400" spc="-1" strike="noStrike">
+                <a:latin typeface="Times New Roman"/>
+              </a:defRPr>
+            </a:lvl1pPr>
+          </a:lstStyle>
+          <a:p>
+            <a:pPr algn="ctr">
+              <a:lnSpc>
+                <a:spcPct val="100000"/>
+              </a:lnSpc>
+              <a:buNone/>
+            </a:pPr>
+            <a:r>
+              <a:rPr b="0" lang="ru-RU" sz="1400" spc="-1" strike="noStrike">
+                <a:latin typeface="Times New Roman"/>
+              </a:rPr>
+              <a:t>&lt;нижний колонтитул&gt;</a:t>
+            </a:r>
+            <a:endParaRPr b="0" lang="ru-RU" sz="1400" spc="-1" strike="noStrike">
+              <a:latin typeface="Times New Roman"/>
+            </a:endParaRPr>
+          </a:p>
+        </p:txBody>
+      </p:sp>
+      <p:sp>
+        <p:nvSpPr>
+          <p:cNvPr id="40" name="PlaceHolder 2"/>
+          <p:cNvSpPr>
+            <a:spLocks noGrp="1"/>
+          </p:cNvSpPr>
+          <p:nvPr>
+            <p:ph type="sldNum" idx="3"/>
+          </p:nvPr>
+        </p:nvSpPr>
+        <p:spPr>
+          <a:xfrm>
+            <a:off x="6553080" y="4767120"/>
+            <a:ext cx="2133000" cy="273240"/>
+          </a:xfrm>
+          <a:prstGeom prst="rect">
+            <a:avLst/>
+          </a:prstGeom>
+          <a:noFill/>
+          <a:ln w="0">
+            <a:noFill/>
+          </a:ln>
+        </p:spPr>
+        <p:txBody>
+          <a:bodyPr lIns="90000" rIns="90000" tIns="45000" bIns="45000" anchor="ctr">
+            <a:noAutofit/>
+          </a:bodyPr>
+          <a:lstStyle>
+            <a:lvl1pPr algn="r">
+              <a:lnSpc>
+                <a:spcPct val="100000"/>
+              </a:lnSpc>
+              <a:buNone/>
+              <a:tabLst>
+                <a:tab algn="l" pos="0"/>
+              </a:tabLst>
+              <a:defRPr b="0" lang="ru" sz="900" spc="-1" strike="noStrike">
+                <a:solidFill>
+                  <a:srgbClr val="888888"/>
+                </a:solidFill>
+                <a:latin typeface="Calibri"/>
+                <a:ea typeface="Calibri"/>
+              </a:defRPr>
+            </a:lvl1pPr>
+          </a:lstStyle>
+          <a:p>
+            <a:pPr algn="r">
+              <a:lnSpc>
+                <a:spcPct val="100000"/>
+              </a:lnSpc>
+              <a:buNone/>
+              <a:tabLst>
+                <a:tab algn="l" pos="0"/>
+              </a:tabLst>
+            </a:pPr>
+            <a:fld id="{C7725CF6-006B-4560-8B01-F2B4578DD4D7}" type="slidenum">
+              <a:rPr b="0" lang="ru" sz="900" spc="-1" strike="noStrike">
+                <a:solidFill>
+                  <a:srgbClr val="888888"/>
+                </a:solidFill>
+                <a:latin typeface="Calibri"/>
+                <a:ea typeface="Calibri"/>
+              </a:rPr>
+              <a:t>&lt;номер&gt;</a:t>
+            </a:fld>
+            <a:endParaRPr b="0" lang="ru-RU" sz="900" spc="-1" strike="noStrike">
+              <a:latin typeface="Times New Roman"/>
+            </a:endParaRPr>
+          </a:p>
+        </p:txBody>
+      </p:sp>
+      <p:sp>
+        <p:nvSpPr>
+          <p:cNvPr id="41" name="PlaceHolder 3"/>
+          <p:cNvSpPr>
+            <a:spLocks noGrp="1"/>
+          </p:cNvSpPr>
+          <p:nvPr>
+            <p:ph type="dt" idx="4"/>
+          </p:nvPr>
+        </p:nvSpPr>
+        <p:spPr>
+          <a:xfrm>
+            <a:off x="457200" y="4767120"/>
+            <a:ext cx="2133000" cy="273240"/>
+          </a:xfrm>
+          <a:prstGeom prst="rect">
+            <a:avLst/>
+          </a:prstGeom>
+          <a:noFill/>
+          <a:ln w="0">
+            <a:noFill/>
+          </a:ln>
+        </p:spPr>
+        <p:txBody>
+          <a:bodyPr lIns="90000" rIns="90000" tIns="45000" bIns="45000" anchor="ctr">
+            <a:noAutofit/>
+          </a:bodyPr>
+          <a:lstStyle>
+            <a:lvl1pPr>
+              <a:defRPr b="0" lang="ru-RU" sz="1400" spc="-1" strike="noStrike">
+                <a:latin typeface="Times New Roman"/>
+              </a:defRPr>
+            </a:lvl1pPr>
+          </a:lstStyle>
+          <a:p>
+            <a:r>
+              <a:rPr b="0" lang="ru-RU" sz="1400" spc="-1" strike="noStrike">
+                <a:latin typeface="Times New Roman"/>
+              </a:rPr>
+              <a:t>&lt;дата/время&gt;</a:t>
+            </a:r>
+            <a:endParaRPr b="0" lang="ru-RU" sz="1400" spc="-1" strike="noStrike">
+              <a:latin typeface="Times New Roman"/>
+            </a:endParaRPr>
+          </a:p>
+        </p:txBody>
+      </p:sp>
+      <p:sp>
+        <p:nvSpPr>
+          <p:cNvPr id="42" name="PlaceHolder 4"/>
+          <p:cNvSpPr>
+            <a:spLocks noGrp="1"/>
+          </p:cNvSpPr>
+          <p:nvPr>
             <p:ph type="title"/>
           </p:nvPr>
         </p:nvSpPr>
         <p:spPr>
           <a:xfrm>
-            <a:off x="457200" y="205920"/>
-            <a:ext cx="8229240" cy="857160"/>
-          </a:xfrm>
-          <a:prstGeom prst="rect">
-            <a:avLst/>
-          </a:prstGeom>
-          <a:noFill/>
-          <a:ln w="0">
-            <a:noFill/>
-          </a:ln>
-        </p:spPr>
-        <p:txBody>
-          <a:bodyPr anchor="ctr">
-            <a:normAutofit/>
+            <a:off x="457200" y="205200"/>
+            <a:ext cx="8229240" cy="858600"/>
+          </a:xfrm>
+          <a:prstGeom prst="rect">
+            <a:avLst/>
+          </a:prstGeom>
+          <a:noFill/>
+          <a:ln w="0">
+            <a:noFill/>
+          </a:ln>
+        </p:spPr>
+        <p:txBody>
+          <a:bodyPr lIns="0" rIns="0" tIns="0" bIns="0" anchor="ctr">
+            <a:noAutofit/>
           </a:bodyPr>
           <a:p>
-            <a:r>
-              <a:rPr b="0" lang="ru-RU" sz="2800" spc="-1" strike="noStrike">
-                <a:solidFill>
-                  <a:srgbClr val="000000"/>
-                </a:solidFill>
+            <a:pPr algn="ctr">
+              <a:buNone/>
+            </a:pPr>
+            <a:r>
+              <a:rPr b="0" lang="ru-RU" sz="4400" spc="-1" strike="noStrike">
                 <a:latin typeface="Arial"/>
               </a:rPr>
               <a:t>Для правки текста заглавия щёлкните мышью</a:t>
             </a:r>
-            <a:endParaRPr b="0" lang="ru-RU" sz="2800" spc="-1" strike="noStrike">
-              <a:solidFill>
-                <a:srgbClr val="000000"/>
-              </a:solidFill>
-              <a:latin typeface="Arial"/>
-            </a:endParaRPr>
-          </a:p>
-        </p:txBody>
-      </p:sp>
-      <p:sp>
-        <p:nvSpPr>
-          <p:cNvPr id="40" name="PlaceHolder 2"/>
+            <a:endParaRPr b="0" lang="ru-RU" sz="4400" spc="-1" strike="noStrike">
+              <a:latin typeface="Arial"/>
+            </a:endParaRPr>
+          </a:p>
+        </p:txBody>
+      </p:sp>
+      <p:sp>
+        <p:nvSpPr>
+          <p:cNvPr id="43" name="PlaceHolder 5"/>
           <p:cNvSpPr>
             <a:spLocks noGrp="1"/>
           </p:cNvSpPr>
@@ -5103,19 +5080,19 @@
         </p:nvSpPr>
         <p:spPr>
           <a:xfrm>
-            <a:off x="457200" y="1200240"/>
-            <a:ext cx="8229240" cy="3394080"/>
-          </a:xfrm>
-          <a:prstGeom prst="rect">
-            <a:avLst/>
-          </a:prstGeom>
-          <a:noFill/>
-          <a:ln w="0">
-            <a:noFill/>
-          </a:ln>
-        </p:spPr>
-        <p:txBody>
-          <a:bodyPr anchor="t">
+            <a:off x="457200" y="1203480"/>
+            <a:ext cx="8229240" cy="2982960"/>
+          </a:xfrm>
+          <a:prstGeom prst="rect">
+            <a:avLst/>
+          </a:prstGeom>
+          <a:noFill/>
+          <a:ln w="0">
+            <a:noFill/>
+          </a:ln>
+        </p:spPr>
+        <p:txBody>
+          <a:bodyPr lIns="0" rIns="0" tIns="0" bIns="0" anchor="t">
             <a:normAutofit/>
           </a:bodyPr>
           <a:p>
@@ -5131,18 +5108,12 @@
               <a:buChar char=""/>
             </a:pPr>
             <a:r>
-              <a:rPr b="0" lang="ru-RU" sz="1800" spc="-1" strike="noStrike">
-                <a:solidFill>
-                  <a:srgbClr val="000000"/>
-                </a:solidFill>
+              <a:rPr b="0" lang="ru-RU" sz="3200" spc="-1" strike="noStrike">
                 <a:latin typeface="Arial"/>
               </a:rPr>
               <a:t>Для правки структуры щёлкните мышью</a:t>
             </a:r>
-            <a:endParaRPr b="0" lang="ru-RU" sz="1800" spc="-1" strike="noStrike">
-              <a:solidFill>
-                <a:srgbClr val="000000"/>
-              </a:solidFill>
+            <a:endParaRPr b="0" lang="ru-RU" sz="3200" spc="-1" strike="noStrike">
               <a:latin typeface="Arial"/>
             </a:endParaRPr>
           </a:p>
@@ -5159,18 +5130,12 @@
               <a:buChar char=""/>
             </a:pPr>
             <a:r>
-              <a:rPr b="0" lang="ru-RU" sz="1800" spc="-1" strike="noStrike">
-                <a:solidFill>
-                  <a:srgbClr val="000000"/>
-                </a:solidFill>
+              <a:rPr b="0" lang="ru-RU" sz="2800" spc="-1" strike="noStrike">
                 <a:latin typeface="Arial"/>
               </a:rPr>
               <a:t>Второй уровень структуры</a:t>
             </a:r>
-            <a:endParaRPr b="0" lang="ru-RU" sz="1800" spc="-1" strike="noStrike">
-              <a:solidFill>
-                <a:srgbClr val="000000"/>
-              </a:solidFill>
+            <a:endParaRPr b="0" lang="ru-RU" sz="2800" spc="-1" strike="noStrike">
               <a:latin typeface="Arial"/>
             </a:endParaRPr>
           </a:p>
@@ -5187,18 +5152,12 @@
               <a:buChar char=""/>
             </a:pPr>
             <a:r>
-              <a:rPr b="0" lang="ru-RU" sz="1800" spc="-1" strike="noStrike">
-                <a:solidFill>
-                  <a:srgbClr val="000000"/>
-                </a:solidFill>
+              <a:rPr b="0" lang="ru-RU" sz="2400" spc="-1" strike="noStrike">
                 <a:latin typeface="Arial"/>
               </a:rPr>
               <a:t>Третий уровень структуры</a:t>
             </a:r>
-            <a:endParaRPr b="0" lang="ru-RU" sz="1800" spc="-1" strike="noStrike">
-              <a:solidFill>
-                <a:srgbClr val="000000"/>
-              </a:solidFill>
+            <a:endParaRPr b="0" lang="ru-RU" sz="2400" spc="-1" strike="noStrike">
               <a:latin typeface="Arial"/>
             </a:endParaRPr>
           </a:p>
@@ -5215,18 +5174,12 @@
               <a:buChar char=""/>
             </a:pPr>
             <a:r>
-              <a:rPr b="0" lang="ru-RU" sz="1800" spc="-1" strike="noStrike">
-                <a:solidFill>
-                  <a:srgbClr val="000000"/>
-                </a:solidFill>
+              <a:rPr b="0" lang="ru-RU" sz="2000" spc="-1" strike="noStrike">
                 <a:latin typeface="Arial"/>
               </a:rPr>
               <a:t>Четвёртый уровень структуры</a:t>
             </a:r>
-            <a:endParaRPr b="0" lang="ru-RU" sz="1800" spc="-1" strike="noStrike">
-              <a:solidFill>
-                <a:srgbClr val="000000"/>
-              </a:solidFill>
+            <a:endParaRPr b="0" lang="ru-RU" sz="2000" spc="-1" strike="noStrike">
               <a:latin typeface="Arial"/>
             </a:endParaRPr>
           </a:p>
@@ -5243,18 +5196,12 @@
               <a:buChar char=""/>
             </a:pPr>
             <a:r>
-              <a:rPr b="0" lang="ru-RU" sz="1800" spc="-1" strike="noStrike">
-                <a:solidFill>
-                  <a:srgbClr val="000000"/>
-                </a:solidFill>
+              <a:rPr b="0" lang="ru-RU" sz="2000" spc="-1" strike="noStrike">
                 <a:latin typeface="Arial"/>
               </a:rPr>
               <a:t>Пятый уровень структуры</a:t>
             </a:r>
-            <a:endParaRPr b="0" lang="ru-RU" sz="1800" spc="-1" strike="noStrike">
-              <a:solidFill>
-                <a:srgbClr val="000000"/>
-              </a:solidFill>
+            <a:endParaRPr b="0" lang="ru-RU" sz="2000" spc="-1" strike="noStrike">
               <a:latin typeface="Arial"/>
             </a:endParaRPr>
           </a:p>
@@ -5271,18 +5218,12 @@
               <a:buChar char=""/>
             </a:pPr>
             <a:r>
-              <a:rPr b="0" lang="ru-RU" sz="1800" spc="-1" strike="noStrike">
-                <a:solidFill>
-                  <a:srgbClr val="000000"/>
-                </a:solidFill>
+              <a:rPr b="0" lang="ru-RU" sz="2000" spc="-1" strike="noStrike">
                 <a:latin typeface="Arial"/>
               </a:rPr>
               <a:t>Шестой уровень структуры</a:t>
             </a:r>
-            <a:endParaRPr b="0" lang="ru-RU" sz="1800" spc="-1" strike="noStrike">
-              <a:solidFill>
-                <a:srgbClr val="000000"/>
-              </a:solidFill>
+            <a:endParaRPr b="0" lang="ru-RU" sz="2000" spc="-1" strike="noStrike">
               <a:latin typeface="Arial"/>
             </a:endParaRPr>
           </a:p>
@@ -5299,188 +5240,13 @@
               <a:buChar char=""/>
             </a:pPr>
             <a:r>
-              <a:rPr b="0" lang="ru-RU" sz="1800" spc="-1" strike="noStrike">
-                <a:solidFill>
-                  <a:srgbClr val="000000"/>
-                </a:solidFill>
+              <a:rPr b="0" lang="ru-RU" sz="2000" spc="-1" strike="noStrike">
                 <a:latin typeface="Arial"/>
               </a:rPr>
               <a:t>Седьмой уровень структуры</a:t>
             </a:r>
-            <a:endParaRPr b="0" lang="ru-RU" sz="1800" spc="-1" strike="noStrike">
-              <a:solidFill>
-                <a:srgbClr val="000000"/>
-              </a:solidFill>
-              <a:latin typeface="Arial"/>
-            </a:endParaRPr>
-          </a:p>
-        </p:txBody>
-      </p:sp>
-      <p:sp>
-        <p:nvSpPr>
-          <p:cNvPr id="41" name="PlaceHolder 3"/>
-          <p:cNvSpPr>
-            <a:spLocks noGrp="1"/>
-          </p:cNvSpPr>
-          <p:nvPr>
-            <p:ph type="dt" idx="2"/>
-          </p:nvPr>
-        </p:nvSpPr>
-        <p:spPr>
-          <a:xfrm>
-            <a:off x="457200" y="4767120"/>
-            <a:ext cx="2133360" cy="273600"/>
-          </a:xfrm>
-          <a:prstGeom prst="rect">
-            <a:avLst/>
-          </a:prstGeom>
-          <a:noFill/>
-          <a:ln w="0">
-            <a:noFill/>
-          </a:ln>
-        </p:spPr>
-        <p:txBody>
-          <a:bodyPr anchor="ctr">
-            <a:noAutofit/>
-          </a:bodyPr>
-          <a:lstStyle>
-            <a:lvl1pPr>
-              <a:defRPr b="0" lang="ru-RU" sz="1400" spc="-1" strike="noStrike">
-                <a:latin typeface="Times New Roman"/>
-              </a:defRPr>
-            </a:lvl1pPr>
-          </a:lstStyle>
-          <a:p>
-            <a:r>
-              <a:rPr b="0" lang="ru-RU" sz="1400" spc="-1" strike="noStrike">
-                <a:latin typeface="Times New Roman"/>
-              </a:rPr>
-              <a:t>&lt;дата/время&gt;</a:t>
-            </a:r>
-            <a:endParaRPr b="0" lang="ru-RU" sz="1400" spc="-1" strike="noStrike">
-              <a:latin typeface="Times New Roman"/>
-            </a:endParaRPr>
-          </a:p>
-        </p:txBody>
-      </p:sp>
-      <p:sp>
-        <p:nvSpPr>
-          <p:cNvPr id="42" name="PlaceHolder 4"/>
-          <p:cNvSpPr>
-            <a:spLocks noGrp="1"/>
-          </p:cNvSpPr>
-          <p:nvPr>
-            <p:ph type="ftr" idx="3"/>
-          </p:nvPr>
-        </p:nvSpPr>
-        <p:spPr>
-          <a:xfrm>
-            <a:off x="3124080" y="4767120"/>
-            <a:ext cx="2895120" cy="273600"/>
-          </a:xfrm>
-          <a:prstGeom prst="rect">
-            <a:avLst/>
-          </a:prstGeom>
-          <a:noFill/>
-          <a:ln w="0">
-            <a:noFill/>
-          </a:ln>
-        </p:spPr>
-        <p:txBody>
-          <a:bodyPr anchor="ctr">
-            <a:noAutofit/>
-          </a:bodyPr>
-          <a:lstStyle>
-            <a:lvl1pPr algn="ctr">
-              <a:buNone/>
-              <a:defRPr b="0" lang="ru-RU" sz="1400" spc="-1" strike="noStrike">
-                <a:latin typeface="Times New Roman"/>
-              </a:defRPr>
-            </a:lvl1pPr>
-          </a:lstStyle>
-          <a:p>
-            <a:pPr algn="ctr">
-              <a:buNone/>
-            </a:pPr>
-            <a:r>
-              <a:rPr b="0" lang="ru-RU" sz="1400" spc="-1" strike="noStrike">
-                <a:latin typeface="Times New Roman"/>
-              </a:rPr>
-              <a:t>&lt;нижний колонтитул&gt;</a:t>
-            </a:r>
-            <a:endParaRPr b="0" lang="ru-RU" sz="1400" spc="-1" strike="noStrike">
-              <a:latin typeface="Times New Roman"/>
-            </a:endParaRPr>
-          </a:p>
-        </p:txBody>
-      </p:sp>
-      <p:sp>
-        <p:nvSpPr>
-          <p:cNvPr id="43" name="PlaceHolder 5"/>
-          <p:cNvSpPr>
-            <a:spLocks noGrp="1"/>
-          </p:cNvSpPr>
-          <p:nvPr>
-            <p:ph type="sldNum" idx="4"/>
-          </p:nvPr>
-        </p:nvSpPr>
-        <p:spPr>
-          <a:xfrm>
-            <a:off x="6553080" y="4767120"/>
-            <a:ext cx="2133360" cy="273600"/>
-          </a:xfrm>
-          <a:prstGeom prst="rect">
-            <a:avLst/>
-          </a:prstGeom>
-          <a:noFill/>
-          <a:ln w="0">
-            <a:noFill/>
-          </a:ln>
-        </p:spPr>
-        <p:txBody>
-          <a:bodyPr anchor="ctr">
-            <a:normAutofit/>
-          </a:bodyPr>
-          <a:lstStyle>
-            <a:lvl1pPr algn="r">
-              <a:lnSpc>
-                <a:spcPct val="100000"/>
-              </a:lnSpc>
-              <a:buNone/>
-              <a:tabLst>
-                <a:tab algn="l" pos="0"/>
-              </a:tabLst>
-              <a:defRPr b="0" lang="ru" sz="900" spc="-1" strike="noStrike">
-                <a:solidFill>
-                  <a:srgbClr val="888888"/>
-                </a:solidFill>
-                <a:latin typeface="Calibri"/>
-                <a:ea typeface="Calibri"/>
-              </a:defRPr>
-            </a:lvl1pPr>
-          </a:lstStyle>
-          <a:p>
-            <a:pPr algn="r">
-              <a:lnSpc>
-                <a:spcPct val="100000"/>
-              </a:lnSpc>
-              <a:buNone/>
-              <a:tabLst>
-                <a:tab algn="l" pos="0"/>
-              </a:tabLst>
-            </a:pPr>
-            <a:fld id="{08EF0E89-A7C8-4D83-B9D4-3D7073241F21}" type="slidenum">
-              <a:rPr b="0" lang="ru" sz="900" spc="-1" strike="noStrike">
-                <a:solidFill>
-                  <a:srgbClr val="888888"/>
-                </a:solidFill>
-                <a:latin typeface="Calibri"/>
-                <a:ea typeface="Calibri"/>
-              </a:rPr>
-              <a:t>&lt;номер&gt;</a:t>
-            </a:fld>
-            <a:endParaRPr b="0" lang="ru-RU" sz="900" spc="-1" strike="noStrike">
-              <a:latin typeface="Times New Roman"/>
+            <a:endParaRPr b="0" lang="ru-RU" sz="2000" spc="-1" strike="noStrike">
+              <a:latin typeface="Arial"/>
             </a:endParaRPr>
           </a:p>
         </p:txBody>
@@ -5535,7 +5301,7 @@
         <p:spPr>
           <a:xfrm>
             <a:off x="0" y="0"/>
-            <a:ext cx="9143640" cy="5143320"/>
+            <a:ext cx="9143280" cy="5142960"/>
           </a:xfrm>
           <a:prstGeom prst="rect">
             <a:avLst/>
@@ -5558,7 +5324,7 @@
         <p:spPr>
           <a:xfrm>
             <a:off x="853200" y="3867840"/>
-            <a:ext cx="2926440" cy="8280"/>
+            <a:ext cx="2926080" cy="7920"/>
           </a:xfrm>
           <a:prstGeom prst="rect">
             <a:avLst/>
@@ -5581,7 +5347,7 @@
         <p:spPr>
           <a:xfrm>
             <a:off x="725760" y="771480"/>
-            <a:ext cx="3125880" cy="729360"/>
+            <a:ext cx="3125520" cy="729000"/>
           </a:xfrm>
           <a:prstGeom prst="rect">
             <a:avLst/>
@@ -5600,7 +5366,7 @@
         <p:spPr>
           <a:xfrm>
             <a:off x="725760" y="1712160"/>
-            <a:ext cx="8041680" cy="1121040"/>
+            <a:ext cx="8041320" cy="1120680"/>
           </a:xfrm>
           <a:prstGeom prst="rect">
             <a:avLst/>
@@ -5617,7 +5383,7 @@
           <a:fontRef idx="minor"/>
         </p:style>
         <p:txBody>
-          <a:bodyPr anchor="t">
+          <a:bodyPr lIns="90000" rIns="90000" tIns="45000" bIns="45000" anchor="t">
             <a:noAutofit/>
           </a:bodyPr>
           <a:p>
@@ -5680,7 +5446,7 @@
         <p:spPr>
           <a:xfrm>
             <a:off x="755640" y="3241440"/>
-            <a:ext cx="6750360" cy="617400"/>
+            <a:ext cx="6750000" cy="617040"/>
           </a:xfrm>
           <a:prstGeom prst="rect">
             <a:avLst/>
@@ -5697,7 +5463,7 @@
           <a:fontRef idx="minor"/>
         </p:style>
         <p:txBody>
-          <a:bodyPr anchor="t">
+          <a:bodyPr lIns="90000" rIns="90000" tIns="45000" bIns="45000" anchor="t">
             <a:noAutofit/>
           </a:bodyPr>
           <a:p>
@@ -5813,7 +5579,7 @@
         <p:spPr>
           <a:xfrm>
             <a:off x="0" y="0"/>
-            <a:ext cx="9143640" cy="5143320"/>
+            <a:ext cx="9143280" cy="5142960"/>
           </a:xfrm>
           <a:prstGeom prst="rect">
             <a:avLst/>
@@ -5832,7 +5598,7 @@
         <p:spPr>
           <a:xfrm>
             <a:off x="205200" y="196200"/>
-            <a:ext cx="3514320" cy="214920"/>
+            <a:ext cx="3513960" cy="214560"/>
           </a:xfrm>
           <a:prstGeom prst="rect">
             <a:avLst/>
@@ -5849,7 +5615,7 @@
           <a:fontRef idx="minor"/>
         </p:style>
         <p:txBody>
-          <a:bodyPr anchor="t">
+          <a:bodyPr lIns="90000" rIns="90000" tIns="45000" bIns="45000" anchor="t">
             <a:noAutofit/>
           </a:bodyPr>
           <a:p>
@@ -5891,7 +5657,7 @@
         <p:spPr>
           <a:xfrm>
             <a:off x="7812360" y="187920"/>
-            <a:ext cx="1079640" cy="245880"/>
+            <a:ext cx="1079280" cy="245520"/>
           </a:xfrm>
           <a:prstGeom prst="rect">
             <a:avLst/>
@@ -5914,7 +5680,7 @@
         <p:spPr>
           <a:xfrm>
             <a:off x="-1091160" y="474840"/>
-            <a:ext cx="2926440" cy="8280"/>
+            <a:ext cx="2926080" cy="7920"/>
           </a:xfrm>
           <a:prstGeom prst="rect">
             <a:avLst/>
@@ -5933,7 +5699,7 @@
         <p:spPr>
           <a:xfrm>
             <a:off x="323640" y="690120"/>
-            <a:ext cx="3133080" cy="369000"/>
+            <a:ext cx="3132720" cy="368640"/>
           </a:xfrm>
           <a:prstGeom prst="rect">
             <a:avLst/>
@@ -5950,7 +5716,7 @@
           <a:fontRef idx="minor"/>
         </p:style>
         <p:txBody>
-          <a:bodyPr anchor="t">
+          <a:bodyPr lIns="90000" rIns="90000" tIns="45000" bIns="45000" anchor="t">
             <a:noAutofit/>
           </a:bodyPr>
           <a:p>
@@ -5988,7 +5754,7 @@
         <p:spPr>
           <a:xfrm>
             <a:off x="539640" y="1551960"/>
-            <a:ext cx="3528000" cy="1061280"/>
+            <a:ext cx="3527640" cy="1060920"/>
           </a:xfrm>
           <a:prstGeom prst="rect">
             <a:avLst/>
@@ -6014,7 +5780,7 @@
         <p:spPr>
           <a:xfrm>
             <a:off x="526320" y="1244160"/>
-            <a:ext cx="3514320" cy="942120"/>
+            <a:ext cx="3513960" cy="941760"/>
           </a:xfrm>
           <a:prstGeom prst="rect">
             <a:avLst/>
@@ -6031,7 +5797,7 @@
           <a:fontRef idx="minor"/>
         </p:style>
         <p:txBody>
-          <a:bodyPr anchor="t">
+          <a:bodyPr lIns="90000" rIns="90000" tIns="45000" bIns="45000" anchor="t">
             <a:noAutofit/>
           </a:bodyPr>
           <a:p>
@@ -6121,7 +5887,7 @@
         <p:spPr>
           <a:xfrm>
             <a:off x="4816440" y="1551960"/>
-            <a:ext cx="4075560" cy="1269360"/>
+            <a:ext cx="4075200" cy="1269000"/>
           </a:xfrm>
           <a:prstGeom prst="rect">
             <a:avLst/>
@@ -6147,7 +5913,7 @@
         <p:spPr>
           <a:xfrm>
             <a:off x="4803480" y="1244160"/>
-            <a:ext cx="3514320" cy="1134000"/>
+            <a:ext cx="3513960" cy="1133640"/>
           </a:xfrm>
           <a:prstGeom prst="rect">
             <a:avLst/>
@@ -6164,7 +5930,7 @@
           <a:fontRef idx="minor"/>
         </p:style>
         <p:txBody>
-          <a:bodyPr anchor="t">
+          <a:bodyPr lIns="90000" rIns="90000" tIns="45000" bIns="45000" anchor="t">
             <a:noAutofit/>
           </a:bodyPr>
           <a:p>
@@ -6244,7 +6010,7 @@
         <p:spPr>
           <a:xfrm>
             <a:off x="539640" y="3393000"/>
-            <a:ext cx="3528000" cy="1269360"/>
+            <a:ext cx="3527640" cy="1269000"/>
           </a:xfrm>
           <a:prstGeom prst="rect">
             <a:avLst/>
@@ -6270,7 +6036,7 @@
         <p:spPr>
           <a:xfrm>
             <a:off x="532800" y="2378520"/>
-            <a:ext cx="4276800" cy="2359800"/>
+            <a:ext cx="4276440" cy="2359440"/>
           </a:xfrm>
           <a:prstGeom prst="rect">
             <a:avLst/>
@@ -6287,7 +6053,7 @@
           <a:fontRef idx="minor"/>
         </p:style>
         <p:txBody>
-          <a:bodyPr anchor="t">
+          <a:bodyPr lIns="90000" rIns="90000" tIns="45000" bIns="45000" anchor="t">
             <a:noAutofit/>
           </a:bodyPr>
           <a:p>
@@ -6441,7 +6207,7 @@
         <p:spPr>
           <a:xfrm>
             <a:off x="4501080" y="1347480"/>
-            <a:ext cx="70560" cy="70560"/>
+            <a:ext cx="70200" cy="70200"/>
           </a:xfrm>
           <a:prstGeom prst="ellipse">
             <a:avLst/>
@@ -6469,7 +6235,7 @@
         <p:spPr>
           <a:xfrm>
             <a:off x="-73080" y="3056040"/>
-            <a:ext cx="468360" cy="307440"/>
+            <a:ext cx="468000" cy="307080"/>
           </a:xfrm>
           <a:prstGeom prst="rect">
             <a:avLst/>
@@ -6529,7 +6295,7 @@
         <p:spPr>
           <a:xfrm>
             <a:off x="0" y="0"/>
-            <a:ext cx="9143640" cy="5143320"/>
+            <a:ext cx="9143280" cy="5142960"/>
           </a:xfrm>
           <a:prstGeom prst="rect">
             <a:avLst/>
@@ -6552,7 +6318,7 @@
         <p:spPr>
           <a:xfrm>
             <a:off x="7812360" y="187920"/>
-            <a:ext cx="1079640" cy="245880"/>
+            <a:ext cx="1079280" cy="245520"/>
           </a:xfrm>
           <a:prstGeom prst="rect">
             <a:avLst/>
@@ -6575,7 +6341,7 @@
         <p:spPr>
           <a:xfrm>
             <a:off x="-659160" y="474840"/>
-            <a:ext cx="2926440" cy="8280"/>
+            <a:ext cx="2926080" cy="7920"/>
           </a:xfrm>
           <a:prstGeom prst="rect">
             <a:avLst/>
@@ -6594,7 +6360,7 @@
         <p:spPr>
           <a:xfrm>
             <a:off x="362880" y="1456200"/>
-            <a:ext cx="4313520" cy="369000"/>
+            <a:ext cx="4313160" cy="368640"/>
           </a:xfrm>
           <a:prstGeom prst="rect">
             <a:avLst/>
@@ -6620,7 +6386,7 @@
         <p:spPr>
           <a:xfrm>
             <a:off x="284400" y="2523600"/>
-            <a:ext cx="4392360" cy="1199880"/>
+            <a:ext cx="4392000" cy="1199520"/>
           </a:xfrm>
           <a:prstGeom prst="rect">
             <a:avLst/>
@@ -6637,7 +6403,7 @@
           <a:fontRef idx="minor"/>
         </p:style>
         <p:txBody>
-          <a:bodyPr anchor="t">
+          <a:bodyPr lIns="90000" rIns="90000" tIns="45000" bIns="45000" anchor="t">
             <a:noAutofit/>
           </a:bodyPr>
           <a:p>
@@ -6707,7 +6473,7 @@
         <p:spPr>
           <a:xfrm>
             <a:off x="849240" y="1117800"/>
-            <a:ext cx="3110760" cy="369000"/>
+            <a:ext cx="3110400" cy="368640"/>
           </a:xfrm>
           <a:prstGeom prst="rect">
             <a:avLst/>
@@ -6724,7 +6490,7 @@
           <a:fontRef idx="minor"/>
         </p:style>
         <p:txBody>
-          <a:bodyPr anchor="t">
+          <a:bodyPr lIns="90000" rIns="90000" tIns="45000" bIns="45000" anchor="t">
             <a:noAutofit/>
           </a:bodyPr>
           <a:p>
@@ -6762,7 +6528,7 @@
         <p:spPr>
           <a:xfrm>
             <a:off x="876960" y="1463040"/>
-            <a:ext cx="2903040" cy="369000"/>
+            <a:ext cx="2902680" cy="368640"/>
           </a:xfrm>
           <a:prstGeom prst="rect">
             <a:avLst/>
@@ -6779,7 +6545,7 @@
           <a:fontRef idx="minor"/>
         </p:style>
         <p:txBody>
-          <a:bodyPr anchor="t">
+          <a:bodyPr lIns="90000" rIns="90000" tIns="45000" bIns="45000" anchor="t">
             <a:noAutofit/>
           </a:bodyPr>
           <a:p>
@@ -6827,7 +6593,7 @@
         <p:spPr>
           <a:xfrm>
             <a:off x="804240" y="2192040"/>
-            <a:ext cx="1187640" cy="369000"/>
+            <a:ext cx="1187280" cy="368640"/>
           </a:xfrm>
           <a:prstGeom prst="rect">
             <a:avLst/>
@@ -6844,7 +6610,7 @@
           <a:fontRef idx="minor"/>
         </p:style>
         <p:txBody>
-          <a:bodyPr anchor="t">
+          <a:bodyPr lIns="90000" rIns="90000" tIns="45000" bIns="45000" anchor="t">
             <a:noAutofit/>
           </a:bodyPr>
           <a:p>
@@ -6882,7 +6648,7 @@
         <p:spPr>
           <a:xfrm>
             <a:off x="849240" y="2558880"/>
-            <a:ext cx="1301760" cy="369000"/>
+            <a:ext cx="2390760" cy="368640"/>
           </a:xfrm>
           <a:prstGeom prst="rect">
             <a:avLst/>
@@ -6899,7 +6665,7 @@
           <a:fontRef idx="minor"/>
         </p:style>
         <p:txBody>
-          <a:bodyPr anchor="t">
+          <a:bodyPr lIns="90000" rIns="90000" tIns="45000" bIns="45000" anchor="t">
             <a:noAutofit/>
           </a:bodyPr>
           <a:p>
@@ -6920,7 +6686,7 @@
                 <a:latin typeface="Roboto"/>
                 <a:ea typeface="Roboto"/>
               </a:rPr>
-              <a:t>всего проекта: 10 </a:t>
+              <a:t>На весь проект: 10 </a:t>
             </a:r>
             <a:r>
               <a:rPr b="1" lang="ru-RU" sz="1050" spc="-1" strike="noStrike">
@@ -6947,7 +6713,7 @@
         <p:spPr>
           <a:xfrm>
             <a:off x="4795200" y="1117800"/>
-            <a:ext cx="4228200" cy="3970440"/>
+            <a:ext cx="4227840" cy="3970080"/>
           </a:xfrm>
           <a:prstGeom prst="rect">
             <a:avLst/>
@@ -6964,7 +6730,7 @@
           <a:fontRef idx="minor"/>
         </p:style>
         <p:txBody>
-          <a:bodyPr anchor="t">
+          <a:bodyPr lIns="90000" rIns="90000" tIns="45000" bIns="45000" anchor="t">
             <a:noAutofit/>
           </a:bodyPr>
           <a:p>
@@ -7581,7 +7347,7 @@
         <p:spPr>
           <a:xfrm>
             <a:off x="358920" y="699480"/>
-            <a:ext cx="2977920" cy="369000"/>
+            <a:ext cx="2977560" cy="368640"/>
           </a:xfrm>
           <a:prstGeom prst="rect">
             <a:avLst/>
@@ -7598,7 +7364,7 @@
           <a:fontRef idx="minor"/>
         </p:style>
         <p:txBody>
-          <a:bodyPr anchor="t">
+          <a:bodyPr lIns="90000" rIns="90000" tIns="45000" bIns="45000" anchor="t">
             <a:noAutofit/>
           </a:bodyPr>
           <a:p>
@@ -7640,7 +7406,7 @@
         <p:spPr>
           <a:xfrm>
             <a:off x="4274280" y="1072080"/>
-            <a:ext cx="462240" cy="460080"/>
+            <a:ext cx="461880" cy="459720"/>
           </a:xfrm>
           <a:prstGeom prst="rect">
             <a:avLst/>
@@ -7663,7 +7429,7 @@
         <p:spPr>
           <a:xfrm>
             <a:off x="402480" y="2163600"/>
-            <a:ext cx="446040" cy="446040"/>
+            <a:ext cx="445680" cy="445680"/>
           </a:xfrm>
           <a:prstGeom prst="rect">
             <a:avLst/>
@@ -7686,7 +7452,7 @@
         <p:spPr>
           <a:xfrm>
             <a:off x="421560" y="1101600"/>
-            <a:ext cx="455040" cy="457200"/>
+            <a:ext cx="454680" cy="456840"/>
           </a:xfrm>
           <a:prstGeom prst="rect">
             <a:avLst/>
@@ -7705,7 +7471,7 @@
         <p:spPr>
           <a:xfrm>
             <a:off x="205200" y="196200"/>
-            <a:ext cx="3514320" cy="214920"/>
+            <a:ext cx="3513960" cy="214560"/>
           </a:xfrm>
           <a:prstGeom prst="rect">
             <a:avLst/>
@@ -7765,7 +7531,7 @@
         <p:spPr>
           <a:xfrm>
             <a:off x="0" y="0"/>
-            <a:ext cx="9143640" cy="5143320"/>
+            <a:ext cx="9143280" cy="5142960"/>
           </a:xfrm>
           <a:prstGeom prst="rect">
             <a:avLst/>
@@ -7788,7 +7554,7 @@
         <p:spPr>
           <a:xfrm>
             <a:off x="7812360" y="187920"/>
-            <a:ext cx="1079640" cy="245880"/>
+            <a:ext cx="1079280" cy="245520"/>
           </a:xfrm>
           <a:prstGeom prst="rect">
             <a:avLst/>
@@ -7807,7 +7573,7 @@
         <p:spPr>
           <a:xfrm>
             <a:off x="395640" y="1004040"/>
-            <a:ext cx="4571640" cy="3069000"/>
+            <a:ext cx="4571280" cy="3068640"/>
           </a:xfrm>
           <a:prstGeom prst="rect">
             <a:avLst/>
@@ -7824,7 +7590,7 @@
           <a:fontRef idx="minor"/>
         </p:style>
         <p:txBody>
-          <a:bodyPr anchor="t">
+          <a:bodyPr lIns="90000" rIns="90000" tIns="45000" bIns="45000" anchor="t">
             <a:noAutofit/>
           </a:bodyPr>
           <a:p>
@@ -8064,7 +7830,7 @@
         <p:spPr>
           <a:xfrm>
             <a:off x="395640" y="3166920"/>
-            <a:ext cx="1800000" cy="784440"/>
+            <a:ext cx="1799640" cy="784080"/>
           </a:xfrm>
           <a:prstGeom prst="rect">
             <a:avLst/>
@@ -8090,7 +7856,7 @@
         <p:spPr>
           <a:xfrm>
             <a:off x="413280" y="2643840"/>
-            <a:ext cx="2232000" cy="522720"/>
+            <a:ext cx="2231640" cy="522360"/>
           </a:xfrm>
           <a:prstGeom prst="rect">
             <a:avLst/>
@@ -8116,7 +7882,7 @@
         <p:spPr>
           <a:xfrm>
             <a:off x="395640" y="1396440"/>
-            <a:ext cx="2232000" cy="2554920"/>
+            <a:ext cx="2231640" cy="2554560"/>
           </a:xfrm>
           <a:prstGeom prst="rect">
             <a:avLst/>
@@ -8146,7 +7912,7 @@
         <p:spPr>
           <a:xfrm>
             <a:off x="-1476720" y="474840"/>
-            <a:ext cx="2926440" cy="8280"/>
+            <a:ext cx="2926080" cy="7920"/>
           </a:xfrm>
           <a:prstGeom prst="rect">
             <a:avLst/>
@@ -8165,7 +7931,7 @@
         <p:spPr>
           <a:xfrm>
             <a:off x="2483640" y="3363840"/>
-            <a:ext cx="1872000" cy="507600"/>
+            <a:ext cx="1871640" cy="507240"/>
           </a:xfrm>
           <a:prstGeom prst="rect">
             <a:avLst/>
@@ -8191,7 +7957,7 @@
         <p:spPr>
           <a:xfrm>
             <a:off x="2501640" y="2643840"/>
-            <a:ext cx="1926000" cy="738360"/>
+            <a:ext cx="1925640" cy="738000"/>
           </a:xfrm>
           <a:prstGeom prst="rect">
             <a:avLst/>
@@ -8217,7 +7983,7 @@
         <p:spPr>
           <a:xfrm>
             <a:off x="4644000" y="3363840"/>
-            <a:ext cx="1872000" cy="784440"/>
+            <a:ext cx="1871640" cy="784080"/>
           </a:xfrm>
           <a:prstGeom prst="rect">
             <a:avLst/>
@@ -8243,7 +8009,7 @@
         <p:spPr>
           <a:xfrm>
             <a:off x="4662000" y="2643840"/>
-            <a:ext cx="2142000" cy="738360"/>
+            <a:ext cx="2141640" cy="738000"/>
           </a:xfrm>
           <a:prstGeom prst="rect">
             <a:avLst/>
@@ -8269,7 +8035,7 @@
         <p:spPr>
           <a:xfrm>
             <a:off x="6804360" y="3166920"/>
-            <a:ext cx="1912680" cy="923040"/>
+            <a:ext cx="1912320" cy="922680"/>
           </a:xfrm>
           <a:prstGeom prst="rect">
             <a:avLst/>
@@ -8295,7 +8061,7 @@
         <p:spPr>
           <a:xfrm>
             <a:off x="6822000" y="2643840"/>
-            <a:ext cx="2232000" cy="522720"/>
+            <a:ext cx="2231640" cy="522360"/>
           </a:xfrm>
           <a:prstGeom prst="rect">
             <a:avLst/>
@@ -8321,7 +8087,7 @@
         <p:spPr>
           <a:xfrm>
             <a:off x="205200" y="196200"/>
-            <a:ext cx="3514320" cy="214920"/>
+            <a:ext cx="3513960" cy="214560"/>
           </a:xfrm>
           <a:prstGeom prst="rect">
             <a:avLst/>
@@ -8338,7 +8104,7 @@
           <a:fontRef idx="minor"/>
         </p:style>
         <p:txBody>
-          <a:bodyPr anchor="t">
+          <a:bodyPr lIns="90000" rIns="90000" tIns="45000" bIns="45000" anchor="t">
             <a:noAutofit/>
           </a:bodyPr>
           <a:p>
@@ -8410,7 +8176,7 @@
         <p:spPr>
           <a:xfrm>
             <a:off x="0" y="0"/>
-            <a:ext cx="9143640" cy="5143320"/>
+            <a:ext cx="9143280" cy="5142960"/>
           </a:xfrm>
           <a:prstGeom prst="rect">
             <a:avLst/>
@@ -8433,7 +8199,7 @@
         <p:spPr>
           <a:xfrm>
             <a:off x="7812360" y="187920"/>
-            <a:ext cx="1079640" cy="245880"/>
+            <a:ext cx="1079280" cy="245520"/>
           </a:xfrm>
           <a:prstGeom prst="rect">
             <a:avLst/>
@@ -8452,7 +8218,7 @@
         <p:spPr>
           <a:xfrm>
             <a:off x="359640" y="464760"/>
-            <a:ext cx="4571640" cy="4490640"/>
+            <a:ext cx="4571280" cy="4490280"/>
           </a:xfrm>
           <a:prstGeom prst="rect">
             <a:avLst/>
@@ -8469,7 +8235,7 @@
           <a:fontRef idx="minor"/>
         </p:style>
         <p:txBody>
-          <a:bodyPr anchor="t">
+          <a:bodyPr lIns="90000" rIns="90000" tIns="45000" bIns="45000" anchor="t">
             <a:noAutofit/>
           </a:bodyPr>
           <a:p>
@@ -8843,7 +8609,7 @@
         <p:spPr>
           <a:xfrm>
             <a:off x="395640" y="3166920"/>
-            <a:ext cx="1800000" cy="784440"/>
+            <a:ext cx="1799640" cy="784080"/>
           </a:xfrm>
           <a:prstGeom prst="rect">
             <a:avLst/>
@@ -8869,7 +8635,7 @@
         <p:spPr>
           <a:xfrm>
             <a:off x="413280" y="2643840"/>
-            <a:ext cx="2232000" cy="522720"/>
+            <a:ext cx="2231640" cy="522360"/>
           </a:xfrm>
           <a:prstGeom prst="rect">
             <a:avLst/>
@@ -8895,7 +8661,7 @@
         <p:spPr>
           <a:xfrm>
             <a:off x="395640" y="1396440"/>
-            <a:ext cx="3548160" cy="2888640"/>
+            <a:ext cx="3547800" cy="2888280"/>
           </a:xfrm>
           <a:prstGeom prst="rect">
             <a:avLst/>
@@ -8925,7 +8691,7 @@
         <p:spPr>
           <a:xfrm>
             <a:off x="-1476720" y="474840"/>
-            <a:ext cx="2926440" cy="8280"/>
+            <a:ext cx="2926080" cy="7920"/>
           </a:xfrm>
           <a:prstGeom prst="rect">
             <a:avLst/>
@@ -8944,7 +8710,7 @@
         <p:spPr>
           <a:xfrm>
             <a:off x="2483640" y="3363840"/>
-            <a:ext cx="1872000" cy="507600"/>
+            <a:ext cx="1871640" cy="507240"/>
           </a:xfrm>
           <a:prstGeom prst="rect">
             <a:avLst/>
@@ -8970,7 +8736,7 @@
         <p:spPr>
           <a:xfrm>
             <a:off x="2501640" y="2643840"/>
-            <a:ext cx="1926000" cy="738360"/>
+            <a:ext cx="1925640" cy="738000"/>
           </a:xfrm>
           <a:prstGeom prst="rect">
             <a:avLst/>
@@ -8996,7 +8762,7 @@
         <p:spPr>
           <a:xfrm>
             <a:off x="4644000" y="3363840"/>
-            <a:ext cx="1872000" cy="784440"/>
+            <a:ext cx="1871640" cy="784080"/>
           </a:xfrm>
           <a:prstGeom prst="rect">
             <a:avLst/>
@@ -9022,7 +8788,7 @@
         <p:spPr>
           <a:xfrm>
             <a:off x="4662000" y="2643840"/>
-            <a:ext cx="2142000" cy="738360"/>
+            <a:ext cx="2141640" cy="738000"/>
           </a:xfrm>
           <a:prstGeom prst="rect">
             <a:avLst/>
@@ -9048,7 +8814,7 @@
         <p:spPr>
           <a:xfrm>
             <a:off x="6804360" y="3166920"/>
-            <a:ext cx="1912680" cy="923040"/>
+            <a:ext cx="1912320" cy="922680"/>
           </a:xfrm>
           <a:prstGeom prst="rect">
             <a:avLst/>
@@ -9074,7 +8840,7 @@
         <p:spPr>
           <a:xfrm>
             <a:off x="6822000" y="2643840"/>
-            <a:ext cx="2232000" cy="522720"/>
+            <a:ext cx="2231640" cy="522360"/>
           </a:xfrm>
           <a:prstGeom prst="rect">
             <a:avLst/>
@@ -9100,7 +8866,7 @@
         <p:spPr>
           <a:xfrm>
             <a:off x="205200" y="196200"/>
-            <a:ext cx="3514320" cy="214920"/>
+            <a:ext cx="3513960" cy="214560"/>
           </a:xfrm>
           <a:prstGeom prst="rect">
             <a:avLst/>
@@ -9117,7 +8883,7 @@
           <a:fontRef idx="minor"/>
         </p:style>
         <p:txBody>
-          <a:bodyPr anchor="t">
+          <a:bodyPr lIns="90000" rIns="90000" tIns="45000" bIns="45000" anchor="t">
             <a:noAutofit/>
           </a:bodyPr>
           <a:p>
@@ -9189,7 +8955,7 @@
         <p:spPr>
           <a:xfrm>
             <a:off x="-7920" y="0"/>
-            <a:ext cx="9143640" cy="5143320"/>
+            <a:ext cx="9143280" cy="5142960"/>
           </a:xfrm>
           <a:prstGeom prst="rect">
             <a:avLst/>
@@ -9212,7 +8978,7 @@
         <p:spPr>
           <a:xfrm>
             <a:off x="7812360" y="187920"/>
-            <a:ext cx="1079640" cy="245880"/>
+            <a:ext cx="1079280" cy="245520"/>
           </a:xfrm>
           <a:prstGeom prst="rect">
             <a:avLst/>
@@ -9235,7 +9001,7 @@
         <p:spPr>
           <a:xfrm>
             <a:off x="-803160" y="474840"/>
-            <a:ext cx="2926440" cy="8280"/>
+            <a:ext cx="2926080" cy="7920"/>
           </a:xfrm>
           <a:prstGeom prst="rect">
             <a:avLst/>
@@ -9254,7 +9020,7 @@
         <p:spPr>
           <a:xfrm>
             <a:off x="286920" y="690120"/>
-            <a:ext cx="5536440" cy="369000"/>
+            <a:ext cx="5536080" cy="368640"/>
           </a:xfrm>
           <a:prstGeom prst="rect">
             <a:avLst/>
@@ -9271,7 +9037,7 @@
           <a:fontRef idx="minor"/>
         </p:style>
         <p:txBody>
-          <a:bodyPr anchor="t">
+          <a:bodyPr lIns="90000" rIns="90000" tIns="45000" bIns="45000" anchor="t">
             <a:noAutofit/>
           </a:bodyPr>
           <a:p>
@@ -9326,7 +9092,7 @@
         <p:spPr>
           <a:xfrm>
             <a:off x="539640" y="1551960"/>
-            <a:ext cx="3888000" cy="1476720"/>
+            <a:ext cx="3887640" cy="1476360"/>
           </a:xfrm>
           <a:prstGeom prst="rect">
             <a:avLst/>
@@ -9352,7 +9118,7 @@
         <p:spPr>
           <a:xfrm>
             <a:off x="526320" y="1244160"/>
-            <a:ext cx="3514320" cy="307440"/>
+            <a:ext cx="3513960" cy="307080"/>
           </a:xfrm>
           <a:prstGeom prst="rect">
             <a:avLst/>
@@ -9378,7 +9144,7 @@
         <p:spPr>
           <a:xfrm>
             <a:off x="293760" y="1182600"/>
-            <a:ext cx="3018600" cy="1292400"/>
+            <a:ext cx="3018240" cy="1292040"/>
           </a:xfrm>
           <a:prstGeom prst="rect">
             <a:avLst/>
@@ -9395,7 +9161,7 @@
           <a:fontRef idx="minor"/>
         </p:style>
         <p:txBody>
-          <a:bodyPr anchor="t">
+          <a:bodyPr lIns="90000" rIns="90000" tIns="45000" bIns="45000" anchor="t">
             <a:noAutofit/>
           </a:bodyPr>
           <a:p>
@@ -9472,7 +9238,7 @@
         <p:spPr>
           <a:xfrm>
             <a:off x="4600440" y="1551960"/>
-            <a:ext cx="4404600" cy="923040"/>
+            <a:ext cx="4404240" cy="922680"/>
           </a:xfrm>
           <a:prstGeom prst="rect">
             <a:avLst/>
@@ -9498,7 +9264,7 @@
         <p:spPr>
           <a:xfrm>
             <a:off x="4587480" y="1244160"/>
-            <a:ext cx="3514320" cy="307440"/>
+            <a:ext cx="3513960" cy="307080"/>
           </a:xfrm>
           <a:prstGeom prst="rect">
             <a:avLst/>
@@ -9524,7 +9290,7 @@
         <p:spPr>
           <a:xfrm>
             <a:off x="293760" y="2562840"/>
-            <a:ext cx="3513960" cy="1239480"/>
+            <a:ext cx="3513600" cy="1239120"/>
           </a:xfrm>
           <a:prstGeom prst="rect">
             <a:avLst/>
@@ -9541,7 +9307,7 @@
           <a:fontRef idx="minor"/>
         </p:style>
         <p:txBody>
-          <a:bodyPr anchor="t">
+          <a:bodyPr lIns="90000" rIns="90000" tIns="45000" bIns="45000" anchor="t">
             <a:noAutofit/>
           </a:bodyPr>
           <a:p>
@@ -9598,7 +9364,7 @@
         <p:spPr>
           <a:xfrm>
             <a:off x="539640" y="3543840"/>
-            <a:ext cx="3528000" cy="1269360"/>
+            <a:ext cx="3527640" cy="1269000"/>
           </a:xfrm>
           <a:prstGeom prst="rect">
             <a:avLst/>
@@ -9624,7 +9390,7 @@
         <p:spPr>
           <a:xfrm>
             <a:off x="526320" y="3065400"/>
-            <a:ext cx="4276800" cy="522720"/>
+            <a:ext cx="4276440" cy="522360"/>
           </a:xfrm>
           <a:prstGeom prst="rect">
             <a:avLst/>
@@ -9650,7 +9416,7 @@
         <p:spPr>
           <a:xfrm>
             <a:off x="4428000" y="1244160"/>
-            <a:ext cx="2953800" cy="996480"/>
+            <a:ext cx="2953440" cy="996120"/>
           </a:xfrm>
           <a:prstGeom prst="rect">
             <a:avLst/>
@@ -9667,7 +9433,7 @@
           <a:fontRef idx="minor"/>
         </p:style>
         <p:txBody>
-          <a:bodyPr anchor="t">
+          <a:bodyPr lIns="90000" rIns="90000" tIns="45000" bIns="45000" anchor="t">
             <a:noAutofit/>
           </a:bodyPr>
           <a:p>
@@ -9713,7 +9479,7 @@
         <p:spPr>
           <a:xfrm>
             <a:off x="4816440" y="3579840"/>
-            <a:ext cx="4075560" cy="715320"/>
+            <a:ext cx="4075200" cy="714960"/>
           </a:xfrm>
           <a:prstGeom prst="rect">
             <a:avLst/>
@@ -9739,7 +9505,7 @@
         <p:spPr>
           <a:xfrm>
             <a:off x="4803480" y="3065400"/>
-            <a:ext cx="4088520" cy="522720"/>
+            <a:ext cx="4088160" cy="522360"/>
           </a:xfrm>
           <a:prstGeom prst="rect">
             <a:avLst/>
@@ -9765,7 +9531,7 @@
         <p:spPr>
           <a:xfrm>
             <a:off x="4464360" y="2561040"/>
-            <a:ext cx="3398760" cy="1560240"/>
+            <a:ext cx="3398400" cy="1559880"/>
           </a:xfrm>
           <a:prstGeom prst="rect">
             <a:avLst/>
@@ -9782,7 +9548,7 @@
           <a:fontRef idx="minor"/>
         </p:style>
         <p:txBody>
-          <a:bodyPr anchor="t">
+          <a:bodyPr lIns="90000" rIns="90000" tIns="45000" bIns="45000" anchor="t">
             <a:noAutofit/>
           </a:bodyPr>
           <a:p>
@@ -9828,7 +9594,7 @@
         <p:spPr>
           <a:xfrm>
             <a:off x="-73080" y="3035880"/>
-            <a:ext cx="468360" cy="307440"/>
+            <a:ext cx="468000" cy="307080"/>
           </a:xfrm>
           <a:prstGeom prst="rect">
             <a:avLst/>
@@ -9854,7 +9620,7 @@
         <p:spPr>
           <a:xfrm>
             <a:off x="205200" y="196200"/>
-            <a:ext cx="3514320" cy="214920"/>
+            <a:ext cx="3513960" cy="214560"/>
           </a:xfrm>
           <a:prstGeom prst="rect">
             <a:avLst/>
@@ -9871,7 +9637,7 @@
           <a:fontRef idx="minor"/>
         </p:style>
         <p:txBody>
-          <a:bodyPr anchor="t">
+          <a:bodyPr lIns="90000" rIns="90000" tIns="45000" bIns="45000" anchor="t">
             <a:noAutofit/>
           </a:bodyPr>
           <a:p>
@@ -9909,7 +9675,7 @@
         <p:spPr>
           <a:xfrm>
             <a:off x="323640" y="3712680"/>
-            <a:ext cx="2953800" cy="1004400"/>
+            <a:ext cx="2953440" cy="1002960"/>
           </a:xfrm>
           <a:prstGeom prst="rect">
             <a:avLst/>
@@ -9926,7 +9692,7 @@
           <a:fontRef idx="minor"/>
         </p:style>
         <p:txBody>
-          <a:bodyPr anchor="t">
+          <a:bodyPr lIns="90000" rIns="90000" tIns="45000" bIns="45000" anchor="t">
             <a:spAutoFit/>
           </a:bodyPr>
           <a:p>
@@ -10006,7 +9772,7 @@
         <p:spPr>
           <a:xfrm>
             <a:off x="0" y="0"/>
-            <a:ext cx="9143640" cy="5143320"/>
+            <a:ext cx="9143280" cy="5142960"/>
           </a:xfrm>
           <a:prstGeom prst="rect">
             <a:avLst/>
@@ -10029,7 +9795,7 @@
         <p:spPr>
           <a:xfrm>
             <a:off x="7812360" y="187920"/>
-            <a:ext cx="1079640" cy="245880"/>
+            <a:ext cx="1079280" cy="245520"/>
           </a:xfrm>
           <a:prstGeom prst="rect">
             <a:avLst/>
@@ -10052,7 +9818,7 @@
         <p:spPr>
           <a:xfrm>
             <a:off x="-1836720" y="474840"/>
-            <a:ext cx="2926440" cy="8280"/>
+            <a:ext cx="2926080" cy="7920"/>
           </a:xfrm>
           <a:prstGeom prst="rect">
             <a:avLst/>
@@ -10071,7 +9837,7 @@
         <p:spPr>
           <a:xfrm>
             <a:off x="323640" y="555480"/>
-            <a:ext cx="4248360" cy="369000"/>
+            <a:ext cx="4248000" cy="368640"/>
           </a:xfrm>
           <a:prstGeom prst="rect">
             <a:avLst/>
@@ -10088,7 +9854,7 @@
           <a:fontRef idx="minor"/>
         </p:style>
         <p:txBody>
-          <a:bodyPr anchor="t">
+          <a:bodyPr lIns="90000" rIns="90000" tIns="45000" bIns="45000" anchor="t">
             <a:noAutofit/>
           </a:bodyPr>
           <a:p>
@@ -10126,7 +9892,7 @@
         <p:spPr>
           <a:xfrm>
             <a:off x="539640" y="1715040"/>
-            <a:ext cx="2664000" cy="645840"/>
+            <a:ext cx="2663640" cy="645480"/>
           </a:xfrm>
           <a:prstGeom prst="rect">
             <a:avLst/>
@@ -10152,7 +9918,7 @@
         <p:spPr>
           <a:xfrm>
             <a:off x="526320" y="1244160"/>
-            <a:ext cx="2245320" cy="522720"/>
+            <a:ext cx="2244960" cy="522360"/>
           </a:xfrm>
           <a:prstGeom prst="rect">
             <a:avLst/>
@@ -10178,7 +9944,7 @@
         <p:spPr>
           <a:xfrm>
             <a:off x="205200" y="1850400"/>
-            <a:ext cx="2522160" cy="880920"/>
+            <a:ext cx="2521800" cy="880560"/>
           </a:xfrm>
           <a:prstGeom prst="rect">
             <a:avLst/>
@@ -10195,7 +9961,7 @@
           <a:fontRef idx="minor"/>
         </p:style>
         <p:txBody>
-          <a:bodyPr anchor="t">
+          <a:bodyPr lIns="90000" rIns="90000" tIns="45000" bIns="45000" anchor="t">
             <a:noAutofit/>
           </a:bodyPr>
           <a:p>
@@ -10285,7 +10051,7 @@
         <p:spPr>
           <a:xfrm>
             <a:off x="3376440" y="1715040"/>
-            <a:ext cx="2420640" cy="645840"/>
+            <a:ext cx="2420280" cy="645480"/>
           </a:xfrm>
           <a:prstGeom prst="rect">
             <a:avLst/>
@@ -10311,7 +10077,7 @@
         <p:spPr>
           <a:xfrm>
             <a:off x="3363120" y="1244160"/>
-            <a:ext cx="2288520" cy="522720"/>
+            <a:ext cx="2288160" cy="522360"/>
           </a:xfrm>
           <a:prstGeom prst="rect">
             <a:avLst/>
@@ -10337,7 +10103,7 @@
         <p:spPr>
           <a:xfrm>
             <a:off x="4644000" y="1182600"/>
-            <a:ext cx="2608560" cy="1792800"/>
+            <a:ext cx="2608200" cy="1792440"/>
           </a:xfrm>
           <a:prstGeom prst="rect">
             <a:avLst/>
@@ -10354,7 +10120,7 @@
           <a:fontRef idx="minor"/>
         </p:style>
         <p:txBody>
-          <a:bodyPr anchor="t">
+          <a:bodyPr lIns="90000" rIns="90000" tIns="45000" bIns="45000" anchor="t">
             <a:noAutofit/>
           </a:bodyPr>
           <a:p>
@@ -10627,7 +10393,7 @@
         <p:spPr>
           <a:xfrm>
             <a:off x="4570920" y="3024000"/>
-            <a:ext cx="184320" cy="369000"/>
+            <a:ext cx="183960" cy="368640"/>
           </a:xfrm>
           <a:prstGeom prst="rect">
             <a:avLst/>
@@ -10653,7 +10419,7 @@
         <p:spPr>
           <a:xfrm>
             <a:off x="2483640" y="1198080"/>
-            <a:ext cx="892080" cy="307440"/>
+            <a:ext cx="891720" cy="307080"/>
           </a:xfrm>
           <a:prstGeom prst="rect">
             <a:avLst/>
@@ -10679,7 +10445,7 @@
         <p:spPr>
           <a:xfrm>
             <a:off x="8215920" y="1203480"/>
-            <a:ext cx="1612440" cy="307440"/>
+            <a:ext cx="1612080" cy="307080"/>
           </a:xfrm>
           <a:prstGeom prst="rect">
             <a:avLst/>
@@ -10705,7 +10471,7 @@
         <p:spPr>
           <a:xfrm>
             <a:off x="5436000" y="1203480"/>
-            <a:ext cx="503640" cy="307440"/>
+            <a:ext cx="503280" cy="307080"/>
           </a:xfrm>
           <a:prstGeom prst="rect">
             <a:avLst/>
@@ -10731,7 +10497,7 @@
         <p:spPr>
           <a:xfrm>
             <a:off x="6112800" y="1722960"/>
-            <a:ext cx="2419560" cy="645840"/>
+            <a:ext cx="2419200" cy="645480"/>
           </a:xfrm>
           <a:prstGeom prst="rect">
             <a:avLst/>
@@ -10757,7 +10523,7 @@
         <p:spPr>
           <a:xfrm>
             <a:off x="6099480" y="1252080"/>
-            <a:ext cx="2288520" cy="522720"/>
+            <a:ext cx="2288160" cy="522360"/>
           </a:xfrm>
           <a:prstGeom prst="rect">
             <a:avLst/>
@@ -10783,7 +10549,7 @@
         <p:spPr>
           <a:xfrm>
             <a:off x="5866920" y="1190520"/>
-            <a:ext cx="317520" cy="369000"/>
+            <a:ext cx="317160" cy="368640"/>
           </a:xfrm>
           <a:prstGeom prst="rect">
             <a:avLst/>
@@ -10809,7 +10575,7 @@
         <p:spPr>
           <a:xfrm>
             <a:off x="526320" y="2831400"/>
-            <a:ext cx="2664000" cy="645840"/>
+            <a:ext cx="2663640" cy="645480"/>
           </a:xfrm>
           <a:prstGeom prst="rect">
             <a:avLst/>
@@ -10835,7 +10601,7 @@
         <p:spPr>
           <a:xfrm>
             <a:off x="526320" y="2526840"/>
-            <a:ext cx="2245320" cy="307440"/>
+            <a:ext cx="2244960" cy="307080"/>
           </a:xfrm>
           <a:prstGeom prst="rect">
             <a:avLst/>
@@ -10861,7 +10627,7 @@
         <p:spPr>
           <a:xfrm>
             <a:off x="205200" y="1173600"/>
-            <a:ext cx="1965960" cy="476640"/>
+            <a:ext cx="1965600" cy="476280"/>
           </a:xfrm>
           <a:prstGeom prst="rect">
             <a:avLst/>
@@ -10878,7 +10644,7 @@
           <a:fontRef idx="minor"/>
         </p:style>
         <p:txBody>
-          <a:bodyPr anchor="t">
+          <a:bodyPr lIns="90000" rIns="90000" tIns="45000" bIns="45000" anchor="t">
             <a:noAutofit/>
           </a:bodyPr>
           <a:p>
@@ -10954,7 +10720,7 @@
         <p:spPr>
           <a:xfrm>
             <a:off x="3376440" y="2997720"/>
-            <a:ext cx="2420640" cy="784440"/>
+            <a:ext cx="2420280" cy="784080"/>
           </a:xfrm>
           <a:prstGeom prst="rect">
             <a:avLst/>
@@ -10980,7 +10746,7 @@
         <p:spPr>
           <a:xfrm>
             <a:off x="3363120" y="2526840"/>
-            <a:ext cx="2288520" cy="522720"/>
+            <a:ext cx="2288160" cy="522360"/>
           </a:xfrm>
           <a:prstGeom prst="rect">
             <a:avLst/>
@@ -11006,7 +10772,7 @@
         <p:spPr>
           <a:xfrm>
             <a:off x="4658040" y="2976120"/>
-            <a:ext cx="2305080" cy="1029600"/>
+            <a:ext cx="2304720" cy="1029240"/>
           </a:xfrm>
           <a:prstGeom prst="rect">
             <a:avLst/>
@@ -11023,7 +10789,7 @@
           <a:fontRef idx="minor"/>
         </p:style>
         <p:txBody>
-          <a:bodyPr anchor="t">
+          <a:bodyPr lIns="90000" rIns="90000" tIns="45000" bIns="45000" anchor="t">
             <a:noAutofit/>
           </a:bodyPr>
           <a:p>
@@ -11144,7 +10910,7 @@
         <p:spPr>
           <a:xfrm>
             <a:off x="6112800" y="3005640"/>
-            <a:ext cx="2635560" cy="784440"/>
+            <a:ext cx="2635200" cy="784080"/>
           </a:xfrm>
           <a:prstGeom prst="rect">
             <a:avLst/>
@@ -11161,7 +10927,7 @@
           <a:fontRef idx="minor"/>
         </p:style>
         <p:txBody>
-          <a:bodyPr anchor="t">
+          <a:bodyPr lIns="90000" rIns="90000" tIns="45000" bIns="45000" anchor="t">
             <a:noAutofit/>
           </a:bodyPr>
           <a:p>
@@ -11203,7 +10969,7 @@
         <p:spPr>
           <a:xfrm>
             <a:off x="6099480" y="2534760"/>
-            <a:ext cx="2288520" cy="522720"/>
+            <a:ext cx="2288160" cy="522360"/>
           </a:xfrm>
           <a:prstGeom prst="rect">
             <a:avLst/>
@@ -11229,7 +10995,7 @@
         <p:spPr>
           <a:xfrm>
             <a:off x="4570920" y="4269960"/>
-            <a:ext cx="184320" cy="369000"/>
+            <a:ext cx="183960" cy="368640"/>
           </a:xfrm>
           <a:prstGeom prst="rect">
             <a:avLst/>
@@ -11255,7 +11021,7 @@
         <p:spPr>
           <a:xfrm>
             <a:off x="507960" y="4281120"/>
-            <a:ext cx="2664000" cy="645840"/>
+            <a:ext cx="2663640" cy="645480"/>
           </a:xfrm>
           <a:prstGeom prst="rect">
             <a:avLst/>
@@ -11281,7 +11047,7 @@
         <p:spPr>
           <a:xfrm>
             <a:off x="526320" y="3773160"/>
-            <a:ext cx="2245320" cy="522720"/>
+            <a:ext cx="2244960" cy="522360"/>
           </a:xfrm>
           <a:prstGeom prst="rect">
             <a:avLst/>
@@ -11307,7 +11073,7 @@
         <p:spPr>
           <a:xfrm>
             <a:off x="3376440" y="4269960"/>
-            <a:ext cx="2673720" cy="645840"/>
+            <a:ext cx="2673360" cy="645480"/>
           </a:xfrm>
           <a:prstGeom prst="rect">
             <a:avLst/>
@@ -11333,7 +11099,7 @@
         <p:spPr>
           <a:xfrm>
             <a:off x="3363120" y="3773160"/>
-            <a:ext cx="2288520" cy="522720"/>
+            <a:ext cx="2288160" cy="522360"/>
           </a:xfrm>
           <a:prstGeom prst="rect">
             <a:avLst/>
@@ -11359,7 +11125,7 @@
         <p:spPr>
           <a:xfrm>
             <a:off x="6194880" y="4042440"/>
-            <a:ext cx="2635560" cy="645840"/>
+            <a:ext cx="2635200" cy="645480"/>
           </a:xfrm>
           <a:prstGeom prst="rect">
             <a:avLst/>
@@ -11385,7 +11151,7 @@
         <p:spPr>
           <a:xfrm>
             <a:off x="6194880" y="3758040"/>
-            <a:ext cx="2985120" cy="307440"/>
+            <a:ext cx="2984760" cy="307080"/>
           </a:xfrm>
           <a:prstGeom prst="rect">
             <a:avLst/>
@@ -11411,7 +11177,7 @@
         <p:spPr>
           <a:xfrm>
             <a:off x="205200" y="196200"/>
-            <a:ext cx="3514320" cy="214920"/>
+            <a:ext cx="3513960" cy="214560"/>
           </a:xfrm>
           <a:prstGeom prst="rect">
             <a:avLst/>
@@ -11428,7 +11194,7 @@
           <a:fontRef idx="minor"/>
         </p:style>
         <p:txBody>
-          <a:bodyPr anchor="t">
+          <a:bodyPr lIns="90000" rIns="90000" tIns="45000" bIns="45000" anchor="t">
             <a:noAutofit/>
           </a:bodyPr>
           <a:p>
@@ -11500,7 +11266,7 @@
         <p:spPr>
           <a:xfrm>
             <a:off x="0" y="0"/>
-            <a:ext cx="9143640" cy="5143320"/>
+            <a:ext cx="9143280" cy="5142960"/>
           </a:xfrm>
           <a:prstGeom prst="rect">
             <a:avLst/>
@@ -11523,7 +11289,7 @@
         <p:spPr>
           <a:xfrm>
             <a:off x="-1260720" y="474840"/>
-            <a:ext cx="2926440" cy="8280"/>
+            <a:ext cx="2926080" cy="7920"/>
           </a:xfrm>
           <a:prstGeom prst="rect">
             <a:avLst/>
@@ -11546,7 +11312,7 @@
         <p:spPr>
           <a:xfrm>
             <a:off x="7821000" y="195480"/>
-            <a:ext cx="1062360" cy="247680"/>
+            <a:ext cx="1062000" cy="247320"/>
           </a:xfrm>
           <a:prstGeom prst="rect">
             <a:avLst/>
@@ -11565,7 +11331,7 @@
         <p:spPr>
           <a:xfrm>
             <a:off x="611640" y="1131480"/>
-            <a:ext cx="4571640" cy="830520"/>
+            <a:ext cx="4571280" cy="830160"/>
           </a:xfrm>
           <a:prstGeom prst="rect">
             <a:avLst/>
@@ -11582,7 +11348,7 @@
           <a:fontRef idx="minor"/>
         </p:style>
         <p:txBody>
-          <a:bodyPr anchor="t">
+          <a:bodyPr lIns="90000" rIns="90000" tIns="45000" bIns="45000" anchor="t">
             <a:noAutofit/>
           </a:bodyPr>
           <a:p>
@@ -11620,7 +11386,7 @@
         <p:spPr>
           <a:xfrm>
             <a:off x="611640" y="1995840"/>
-            <a:ext cx="2232000" cy="307440"/>
+            <a:ext cx="2231640" cy="307080"/>
           </a:xfrm>
           <a:prstGeom prst="rect">
             <a:avLst/>
@@ -11646,7 +11412,7 @@
         <p:spPr>
           <a:xfrm>
             <a:off x="683640" y="2624760"/>
-            <a:ext cx="1728000" cy="522720"/>
+            <a:ext cx="1727640" cy="522360"/>
           </a:xfrm>
           <a:prstGeom prst="rect">
             <a:avLst/>
@@ -11672,7 +11438,7 @@
         <p:spPr>
           <a:xfrm>
             <a:off x="3780000" y="2624760"/>
-            <a:ext cx="1728000" cy="522720"/>
+            <a:ext cx="1727640" cy="522360"/>
           </a:xfrm>
           <a:prstGeom prst="rect">
             <a:avLst/>
@@ -11698,7 +11464,7 @@
         <p:spPr>
           <a:xfrm>
             <a:off x="6732360" y="2624760"/>
-            <a:ext cx="1728000" cy="522720"/>
+            <a:ext cx="1727640" cy="522360"/>
           </a:xfrm>
           <a:prstGeom prst="rect">
             <a:avLst/>
@@ -11724,7 +11490,7 @@
         <p:spPr>
           <a:xfrm>
             <a:off x="3804480" y="3890520"/>
-            <a:ext cx="1728000" cy="522720"/>
+            <a:ext cx="1727640" cy="522360"/>
           </a:xfrm>
           <a:prstGeom prst="rect">
             <a:avLst/>
@@ -11750,7 +11516,7 @@
         <p:spPr>
           <a:xfrm>
             <a:off x="6732360" y="3863160"/>
-            <a:ext cx="1728000" cy="522720"/>
+            <a:ext cx="1727640" cy="522360"/>
           </a:xfrm>
           <a:prstGeom prst="rect">
             <a:avLst/>
@@ -11776,7 +11542,7 @@
         <p:spPr>
           <a:xfrm>
             <a:off x="755640" y="2427840"/>
-            <a:ext cx="143640" cy="143640"/>
+            <a:ext cx="143280" cy="143280"/>
           </a:xfrm>
           <a:prstGeom prst="ellipse">
             <a:avLst/>
@@ -11804,7 +11570,7 @@
         <p:spPr>
           <a:xfrm>
             <a:off x="3852000" y="2427840"/>
-            <a:ext cx="143640" cy="143640"/>
+            <a:ext cx="143280" cy="143280"/>
           </a:xfrm>
           <a:prstGeom prst="ellipse">
             <a:avLst/>
@@ -11832,7 +11598,7 @@
         <p:spPr>
           <a:xfrm>
             <a:off x="6804360" y="2427840"/>
-            <a:ext cx="143640" cy="143640"/>
+            <a:ext cx="143280" cy="143280"/>
           </a:xfrm>
           <a:prstGeom prst="ellipse">
             <a:avLst/>
@@ -11860,7 +11626,7 @@
         <p:spPr>
           <a:xfrm>
             <a:off x="3852000" y="3665880"/>
-            <a:ext cx="143640" cy="143640"/>
+            <a:ext cx="143280" cy="143280"/>
           </a:xfrm>
           <a:prstGeom prst="ellipse">
             <a:avLst/>
@@ -11888,7 +11654,7 @@
         <p:spPr>
           <a:xfrm>
             <a:off x="6807960" y="3665880"/>
-            <a:ext cx="143640" cy="143640"/>
+            <a:ext cx="143280" cy="143280"/>
           </a:xfrm>
           <a:prstGeom prst="ellipse">
             <a:avLst/>
@@ -11916,7 +11682,7 @@
         <p:spPr>
           <a:xfrm>
             <a:off x="683640" y="3863160"/>
-            <a:ext cx="1728000" cy="522720"/>
+            <a:ext cx="1727640" cy="522360"/>
           </a:xfrm>
           <a:prstGeom prst="rect">
             <a:avLst/>
@@ -11942,7 +11708,7 @@
         <p:spPr>
           <a:xfrm>
             <a:off x="755640" y="3666240"/>
-            <a:ext cx="143640" cy="143640"/>
+            <a:ext cx="143280" cy="143280"/>
           </a:xfrm>
           <a:prstGeom prst="ellipse">
             <a:avLst/>
@@ -11970,7 +11736,7 @@
         <p:spPr>
           <a:xfrm>
             <a:off x="205200" y="196200"/>
-            <a:ext cx="3514320" cy="214920"/>
+            <a:ext cx="3513960" cy="214560"/>
           </a:xfrm>
           <a:prstGeom prst="rect">
             <a:avLst/>
@@ -11987,7 +11753,7 @@
           <a:fontRef idx="minor"/>
         </p:style>
         <p:txBody>
-          <a:bodyPr anchor="t">
+          <a:bodyPr lIns="90000" rIns="90000" tIns="45000" bIns="45000" anchor="t">
             <a:noAutofit/>
           </a:bodyPr>
           <a:p>
@@ -12024,7 +11790,7 @@
         </p:nvGraphicFramePr>
         <p:xfrm>
           <a:off x="5364360" y="1044720"/>
-          <a:ext cx="3656160" cy="2214360"/>
+          <a:ext cx="3655800" cy="2214000"/>
         </p:xfrm>
         <a:graphic>
           <a:graphicData uri="http://schemas.openxmlformats.org/drawingml/2006/table">
@@ -12268,8 +12034,8 @@
         </p:nvSpPr>
         <p:spPr>
           <a:xfrm>
-            <a:off x="402480" y="3866400"/>
-            <a:ext cx="8389440" cy="1005840"/>
+            <a:off x="402480" y="3866760"/>
+            <a:ext cx="8389080" cy="1004400"/>
           </a:xfrm>
           <a:prstGeom prst="rect">
             <a:avLst/>
@@ -12286,7 +12052,7 @@
           <a:fontRef idx="minor"/>
         </p:style>
         <p:txBody>
-          <a:bodyPr numCol="1" spcCol="0" anchor="ctr">
+          <a:bodyPr numCol="1" spcCol="0" lIns="90000" rIns="90000" tIns="45000" bIns="45000" anchor="ctr">
             <a:spAutoFit/>
           </a:bodyPr>
           <a:p>
@@ -12352,7 +12118,7 @@
         <p:spPr>
           <a:xfrm>
             <a:off x="402480" y="1040040"/>
-            <a:ext cx="4891680" cy="2219040"/>
+            <a:ext cx="4891320" cy="2218680"/>
           </a:xfrm>
           <a:prstGeom prst="rect">
             <a:avLst/>

--- a/Презентация.pptx
+++ b/Презентация.pptx
@@ -300,7 +300,7 @@
             <a:pPr algn="r">
               <a:buNone/>
             </a:pPr>
-            <a:fld id="{683532CD-3D8B-463C-90A5-0FA2D729B66C}" type="slidenum">
+            <a:fld id="{3C4E0869-39A1-4C83-A88F-FCE4B40D454F}" type="slidenum">
               <a:rPr b="0" lang="ru-RU" sz="1400" spc="-1" strike="noStrike">
                 <a:latin typeface="Times New Roman"/>
               </a:rPr>
@@ -348,7 +348,7 @@
         <p:spPr>
           <a:xfrm>
             <a:off x="380880" y="685800"/>
-            <a:ext cx="6095160" cy="3428280"/>
+            <a:ext cx="6094800" cy="3427920"/>
           </a:xfrm>
           <a:prstGeom prst="rect">
             <a:avLst/>
@@ -371,7 +371,7 @@
         <p:spPr>
           <a:xfrm>
             <a:off x="685800" y="4343400"/>
-            <a:ext cx="5485680" cy="4114080"/>
+            <a:ext cx="5485320" cy="4113720"/>
           </a:xfrm>
           <a:prstGeom prst="rect">
             <a:avLst/>
@@ -405,7 +405,7 @@
         <p:spPr>
           <a:xfrm>
             <a:off x="3884760" y="8685360"/>
-            <a:ext cx="2971080" cy="456480"/>
+            <a:ext cx="2970720" cy="456120"/>
           </a:xfrm>
           <a:prstGeom prst="rect">
             <a:avLst/>
@@ -447,7 +447,7 @@
                 <a:tab algn="l" pos="0"/>
               </a:tabLst>
             </a:pPr>
-            <a:fld id="{43B07842-84FC-4F0F-ADFA-F64B7A7F1EAF}" type="slidenum">
+            <a:fld id="{C31DB460-B3FC-4502-A1DC-F57C5ABCD244}" type="slidenum">
               <a:rPr b="0" lang="ru" sz="1400" spc="-1" strike="noStrike">
                 <a:solidFill>
                   <a:srgbClr val="000000"/>
@@ -499,7 +499,7 @@
         <p:txBody>
           <a:bodyPr/>
           <a:p>
-            <a:fld id="{99FCCFCA-1F6A-4DCF-AA93-C22946CEB6A3}" type="slidenum">
+            <a:fld id="{560980E3-F0A5-4E33-B070-72CFFDCDE77F}" type="slidenum">
               <a:t>&lt;#&gt;</a:t>
             </a:fld>
           </a:p>
@@ -540,7 +540,7 @@
         <p:spPr>
           <a:xfrm>
             <a:off x="311760" y="744480"/>
-            <a:ext cx="8519760" cy="2052000"/>
+            <a:ext cx="8519400" cy="2051640"/>
           </a:xfrm>
           <a:prstGeom prst="rect">
             <a:avLst/>
@@ -577,7 +577,7 @@
         <p:spPr>
           <a:xfrm>
             <a:off x="457200" y="1203480"/>
-            <a:ext cx="8229240" cy="1422720"/>
+            <a:ext cx="8228880" cy="1422360"/>
           </a:xfrm>
           <a:prstGeom prst="rect">
             <a:avLst/>
@@ -610,8 +610,8 @@
         </p:nvSpPr>
         <p:spPr>
           <a:xfrm>
-            <a:off x="457200" y="2761920"/>
-            <a:ext cx="8229240" cy="1422720"/>
+            <a:off x="457200" y="2761200"/>
+            <a:ext cx="8228880" cy="1422360"/>
           </a:xfrm>
           <a:prstGeom prst="rect">
             <a:avLst/>
@@ -646,7 +646,7 @@
         <p:txBody>
           <a:bodyPr/>
           <a:p>
-            <a:fld id="{4408EE2F-1AD6-4326-8AC7-23E64DB6ED48}" type="slidenum">
+            <a:fld id="{F5E5DD22-83F7-4E6C-B879-31DCFC489BDF}" type="slidenum">
               <a:t>&lt;#&gt;</a:t>
             </a:fld>
           </a:p>
@@ -687,7 +687,7 @@
         <p:spPr>
           <a:xfrm>
             <a:off x="311760" y="744480"/>
-            <a:ext cx="8519760" cy="2052000"/>
+            <a:ext cx="8519400" cy="2051640"/>
           </a:xfrm>
           <a:prstGeom prst="rect">
             <a:avLst/>
@@ -724,7 +724,7 @@
         <p:spPr>
           <a:xfrm>
             <a:off x="457200" y="1203480"/>
-            <a:ext cx="4015800" cy="1422720"/>
+            <a:ext cx="4015440" cy="1422360"/>
           </a:xfrm>
           <a:prstGeom prst="rect">
             <a:avLst/>
@@ -757,8 +757,8 @@
         </p:nvSpPr>
         <p:spPr>
           <a:xfrm>
-            <a:off x="4674240" y="1203480"/>
-            <a:ext cx="4015800" cy="1422720"/>
+            <a:off x="4673880" y="1203480"/>
+            <a:ext cx="4015440" cy="1422360"/>
           </a:xfrm>
           <a:prstGeom prst="rect">
             <a:avLst/>
@@ -791,8 +791,8 @@
         </p:nvSpPr>
         <p:spPr>
           <a:xfrm>
-            <a:off x="457200" y="2761920"/>
-            <a:ext cx="4015800" cy="1422720"/>
+            <a:off x="457200" y="2761200"/>
+            <a:ext cx="4015440" cy="1422360"/>
           </a:xfrm>
           <a:prstGeom prst="rect">
             <a:avLst/>
@@ -825,8 +825,8 @@
         </p:nvSpPr>
         <p:spPr>
           <a:xfrm>
-            <a:off x="4674240" y="2761920"/>
-            <a:ext cx="4015800" cy="1422720"/>
+            <a:off x="4673880" y="2761200"/>
+            <a:ext cx="4015440" cy="1422360"/>
           </a:xfrm>
           <a:prstGeom prst="rect">
             <a:avLst/>
@@ -861,7 +861,7 @@
         <p:txBody>
           <a:bodyPr/>
           <a:p>
-            <a:fld id="{462AF8DD-E4F8-43E7-901B-60DFCDF7E844}" type="slidenum">
+            <a:fld id="{2C606952-C5BC-472E-9621-8B61D0E077C6}" type="slidenum">
               <a:t>&lt;#&gt;</a:t>
             </a:fld>
           </a:p>
@@ -902,7 +902,7 @@
         <p:spPr>
           <a:xfrm>
             <a:off x="311760" y="744480"/>
-            <a:ext cx="8519760" cy="2052000"/>
+            <a:ext cx="8519400" cy="2051640"/>
           </a:xfrm>
           <a:prstGeom prst="rect">
             <a:avLst/>
@@ -939,7 +939,7 @@
         <p:spPr>
           <a:xfrm>
             <a:off x="457200" y="1203480"/>
-            <a:ext cx="2649600" cy="1422720"/>
+            <a:ext cx="2649600" cy="1422360"/>
           </a:xfrm>
           <a:prstGeom prst="rect">
             <a:avLst/>
@@ -973,7 +973,7 @@
         <p:spPr>
           <a:xfrm>
             <a:off x="3239640" y="1203480"/>
-            <a:ext cx="2649600" cy="1422720"/>
+            <a:ext cx="2649600" cy="1422360"/>
           </a:xfrm>
           <a:prstGeom prst="rect">
             <a:avLst/>
@@ -1007,7 +1007,7 @@
         <p:spPr>
           <a:xfrm>
             <a:off x="6022080" y="1203480"/>
-            <a:ext cx="2649600" cy="1422720"/>
+            <a:ext cx="2649600" cy="1422360"/>
           </a:xfrm>
           <a:prstGeom prst="rect">
             <a:avLst/>
@@ -1040,8 +1040,8 @@
         </p:nvSpPr>
         <p:spPr>
           <a:xfrm>
-            <a:off x="457200" y="2761920"/>
-            <a:ext cx="2649600" cy="1422720"/>
+            <a:off x="457200" y="2761200"/>
+            <a:ext cx="2649600" cy="1422360"/>
           </a:xfrm>
           <a:prstGeom prst="rect">
             <a:avLst/>
@@ -1074,8 +1074,8 @@
         </p:nvSpPr>
         <p:spPr>
           <a:xfrm>
-            <a:off x="3239640" y="2761920"/>
-            <a:ext cx="2649600" cy="1422720"/>
+            <a:off x="3239640" y="2761200"/>
+            <a:ext cx="2649600" cy="1422360"/>
           </a:xfrm>
           <a:prstGeom prst="rect">
             <a:avLst/>
@@ -1108,8 +1108,8 @@
         </p:nvSpPr>
         <p:spPr>
           <a:xfrm>
-            <a:off x="6022080" y="2761920"/>
-            <a:ext cx="2649600" cy="1422720"/>
+            <a:off x="6022080" y="2761200"/>
+            <a:ext cx="2649600" cy="1422360"/>
           </a:xfrm>
           <a:prstGeom prst="rect">
             <a:avLst/>
@@ -1144,7 +1144,7 @@
         <p:txBody>
           <a:bodyPr/>
           <a:p>
-            <a:fld id="{303F0031-8CE7-456A-B0EE-5542E79F9242}" type="slidenum">
+            <a:fld id="{2B90141E-6537-451A-8FD8-6FD41D0D1595}" type="slidenum">
               <a:t>&lt;#&gt;</a:t>
             </a:fld>
           </a:p>
@@ -1206,7 +1206,7 @@
         <p:txBody>
           <a:bodyPr/>
           <a:p>
-            <a:fld id="{76F8427F-58AA-4FF9-BFCE-ED4C09E90063}" type="slidenum">
+            <a:fld id="{9F99FC2C-C97E-4EAC-B55F-69F59014DDAF}" type="slidenum">
               <a:t>&lt;#&gt;</a:t>
             </a:fld>
           </a:p>
@@ -1268,7 +1268,7 @@
         <p:spPr>
           <a:xfrm>
             <a:off x="311760" y="744480"/>
-            <a:ext cx="8519760" cy="2052000"/>
+            <a:ext cx="8519400" cy="2051640"/>
           </a:xfrm>
           <a:prstGeom prst="rect">
             <a:avLst/>
@@ -1305,7 +1305,7 @@
         <p:spPr>
           <a:xfrm>
             <a:off x="457200" y="1203480"/>
-            <a:ext cx="8229240" cy="2982960"/>
+            <a:ext cx="8228880" cy="2982600"/>
           </a:xfrm>
           <a:prstGeom prst="rect">
             <a:avLst/>
@@ -1363,7 +1363,7 @@
         <p:txBody>
           <a:bodyPr/>
           <a:p>
-            <a:fld id="{D48DF6C9-3659-400B-9AD1-5D3582BE8DE0}" type="slidenum">
+            <a:fld id="{D29163FA-4118-45C8-B1E5-FDFE544D0F79}" type="slidenum">
               <a:t>&lt;#&gt;</a:t>
             </a:fld>
           </a:p>
@@ -1425,7 +1425,7 @@
         <p:spPr>
           <a:xfrm>
             <a:off x="311760" y="744480"/>
-            <a:ext cx="8519760" cy="2052000"/>
+            <a:ext cx="8519400" cy="2051640"/>
           </a:xfrm>
           <a:prstGeom prst="rect">
             <a:avLst/>
@@ -1462,7 +1462,7 @@
         <p:spPr>
           <a:xfrm>
             <a:off x="457200" y="1203480"/>
-            <a:ext cx="8229240" cy="2982960"/>
+            <a:ext cx="8228880" cy="2982600"/>
           </a:xfrm>
           <a:prstGeom prst="rect">
             <a:avLst/>
@@ -1517,7 +1517,7 @@
         <p:txBody>
           <a:bodyPr/>
           <a:p>
-            <a:fld id="{4EBA8A51-1C6B-4BFB-B591-77C88C339AF2}" type="slidenum">
+            <a:fld id="{7FB6929C-61E6-4E2B-B4CA-B716DA08DB70}" type="slidenum">
               <a:t>&lt;#&gt;</a:t>
             </a:fld>
           </a:p>
@@ -1579,7 +1579,7 @@
         <p:spPr>
           <a:xfrm>
             <a:off x="311760" y="744480"/>
-            <a:ext cx="8519760" cy="2052000"/>
+            <a:ext cx="8519400" cy="2051640"/>
           </a:xfrm>
           <a:prstGeom prst="rect">
             <a:avLst/>
@@ -1616,7 +1616,7 @@
         <p:spPr>
           <a:xfrm>
             <a:off x="457200" y="1203480"/>
-            <a:ext cx="4015800" cy="2982960"/>
+            <a:ext cx="4015440" cy="2982600"/>
           </a:xfrm>
           <a:prstGeom prst="rect">
             <a:avLst/>
@@ -1649,8 +1649,8 @@
         </p:nvSpPr>
         <p:spPr>
           <a:xfrm>
-            <a:off x="4674240" y="1203480"/>
-            <a:ext cx="4015800" cy="2982960"/>
+            <a:off x="4673880" y="1203480"/>
+            <a:ext cx="4015440" cy="2982600"/>
           </a:xfrm>
           <a:prstGeom prst="rect">
             <a:avLst/>
@@ -1705,7 +1705,7 @@
         <p:txBody>
           <a:bodyPr/>
           <a:p>
-            <a:fld id="{94D6DF67-D1FB-4B88-8F37-C4B404E24BA4}" type="slidenum">
+            <a:fld id="{85AAD1D6-1133-4686-94D7-0993EFD9C788}" type="slidenum">
               <a:t>&lt;#&gt;</a:t>
             </a:fld>
           </a:p>
@@ -1767,7 +1767,7 @@
         <p:spPr>
           <a:xfrm>
             <a:off x="311760" y="744480"/>
-            <a:ext cx="8519760" cy="2052000"/>
+            <a:ext cx="8519400" cy="2051640"/>
           </a:xfrm>
           <a:prstGeom prst="rect">
             <a:avLst/>
@@ -1825,7 +1825,7 @@
         <p:txBody>
           <a:bodyPr/>
           <a:p>
-            <a:fld id="{F72F0E3C-F96E-4821-950A-7678160EE6B9}" type="slidenum">
+            <a:fld id="{1C69BBCA-F78A-4B31-AF14-04647A5B14AE}" type="slidenum">
               <a:t>&lt;#&gt;</a:t>
             </a:fld>
           </a:p>
@@ -1887,7 +1887,7 @@
         <p:spPr>
           <a:xfrm>
             <a:off x="311760" y="744480"/>
-            <a:ext cx="8519760" cy="9513000"/>
+            <a:ext cx="8519400" cy="9511560"/>
           </a:xfrm>
           <a:prstGeom prst="rect">
             <a:avLst/>
@@ -1945,7 +1945,7 @@
         <p:txBody>
           <a:bodyPr/>
           <a:p>
-            <a:fld id="{F53967BE-830E-4502-B0E4-DA99CA926A48}" type="slidenum">
+            <a:fld id="{48FAC74C-3405-469C-92D8-31F0193E85F6}" type="slidenum">
               <a:t>&lt;#&gt;</a:t>
             </a:fld>
           </a:p>
@@ -2007,7 +2007,7 @@
         <p:spPr>
           <a:xfrm>
             <a:off x="311760" y="744480"/>
-            <a:ext cx="8519760" cy="2052000"/>
+            <a:ext cx="8519400" cy="2051640"/>
           </a:xfrm>
           <a:prstGeom prst="rect">
             <a:avLst/>
@@ -2044,7 +2044,7 @@
         <p:spPr>
           <a:xfrm>
             <a:off x="457200" y="1203480"/>
-            <a:ext cx="4015800" cy="1422720"/>
+            <a:ext cx="4015440" cy="1422360"/>
           </a:xfrm>
           <a:prstGeom prst="rect">
             <a:avLst/>
@@ -2077,8 +2077,8 @@
         </p:nvSpPr>
         <p:spPr>
           <a:xfrm>
-            <a:off x="4674240" y="1203480"/>
-            <a:ext cx="4015800" cy="2982960"/>
+            <a:off x="4673880" y="1203480"/>
+            <a:ext cx="4015440" cy="2982600"/>
           </a:xfrm>
           <a:prstGeom prst="rect">
             <a:avLst/>
@@ -2111,8 +2111,8 @@
         </p:nvSpPr>
         <p:spPr>
           <a:xfrm>
-            <a:off x="457200" y="2761920"/>
-            <a:ext cx="4015800" cy="1422720"/>
+            <a:off x="457200" y="2761200"/>
+            <a:ext cx="4015440" cy="1422360"/>
           </a:xfrm>
           <a:prstGeom prst="rect">
             <a:avLst/>
@@ -2167,7 +2167,7 @@
         <p:txBody>
           <a:bodyPr/>
           <a:p>
-            <a:fld id="{97B2254C-3AD5-4D54-8F10-DBC0E38655EF}" type="slidenum">
+            <a:fld id="{86C80F7B-F617-488D-9C55-75518772AA7E}" type="slidenum">
               <a:t>&lt;#&gt;</a:t>
             </a:fld>
           </a:p>
@@ -2229,7 +2229,7 @@
         <p:spPr>
           <a:xfrm>
             <a:off x="311760" y="744480"/>
-            <a:ext cx="8519760" cy="2052000"/>
+            <a:ext cx="8519400" cy="2051640"/>
           </a:xfrm>
           <a:prstGeom prst="rect">
             <a:avLst/>
@@ -2266,7 +2266,7 @@
         <p:spPr>
           <a:xfrm>
             <a:off x="457200" y="1203480"/>
-            <a:ext cx="8229240" cy="2982960"/>
+            <a:ext cx="8228880" cy="2982600"/>
           </a:xfrm>
           <a:prstGeom prst="rect">
             <a:avLst/>
@@ -2304,7 +2304,7 @@
         <p:txBody>
           <a:bodyPr/>
           <a:p>
-            <a:fld id="{03E48BA8-BC25-4DA2-B248-C710B11A1AC7}" type="slidenum">
+            <a:fld id="{B688D8C0-3DB2-4555-B52D-82C7E92C0315}" type="slidenum">
               <a:t>&lt;#&gt;</a:t>
             </a:fld>
           </a:p>
@@ -2345,7 +2345,7 @@
         <p:spPr>
           <a:xfrm>
             <a:off x="311760" y="744480"/>
-            <a:ext cx="8519760" cy="2052000"/>
+            <a:ext cx="8519400" cy="2051640"/>
           </a:xfrm>
           <a:prstGeom prst="rect">
             <a:avLst/>
@@ -2382,7 +2382,7 @@
         <p:spPr>
           <a:xfrm>
             <a:off x="457200" y="1203480"/>
-            <a:ext cx="4015800" cy="2982960"/>
+            <a:ext cx="4015440" cy="2982600"/>
           </a:xfrm>
           <a:prstGeom prst="rect">
             <a:avLst/>
@@ -2415,8 +2415,8 @@
         </p:nvSpPr>
         <p:spPr>
           <a:xfrm>
-            <a:off x="4674240" y="1203480"/>
-            <a:ext cx="4015800" cy="1422720"/>
+            <a:off x="4673880" y="1203480"/>
+            <a:ext cx="4015440" cy="1422360"/>
           </a:xfrm>
           <a:prstGeom prst="rect">
             <a:avLst/>
@@ -2449,8 +2449,8 @@
         </p:nvSpPr>
         <p:spPr>
           <a:xfrm>
-            <a:off x="4674240" y="2761920"/>
-            <a:ext cx="4015800" cy="1422720"/>
+            <a:off x="4673880" y="2761200"/>
+            <a:ext cx="4015440" cy="1422360"/>
           </a:xfrm>
           <a:prstGeom prst="rect">
             <a:avLst/>
@@ -2505,7 +2505,7 @@
         <p:txBody>
           <a:bodyPr/>
           <a:p>
-            <a:fld id="{63D0149B-1CEA-4F24-A1BC-D3A3FAEBB079}" type="slidenum">
+            <a:fld id="{7B5A58D2-B245-4FF0-8AE3-45921A55D08A}" type="slidenum">
               <a:t>&lt;#&gt;</a:t>
             </a:fld>
           </a:p>
@@ -2567,7 +2567,7 @@
         <p:spPr>
           <a:xfrm>
             <a:off x="311760" y="744480"/>
-            <a:ext cx="8519760" cy="2052000"/>
+            <a:ext cx="8519400" cy="2051640"/>
           </a:xfrm>
           <a:prstGeom prst="rect">
             <a:avLst/>
@@ -2604,7 +2604,7 @@
         <p:spPr>
           <a:xfrm>
             <a:off x="457200" y="1203480"/>
-            <a:ext cx="4015800" cy="1422720"/>
+            <a:ext cx="4015440" cy="1422360"/>
           </a:xfrm>
           <a:prstGeom prst="rect">
             <a:avLst/>
@@ -2637,8 +2637,8 @@
         </p:nvSpPr>
         <p:spPr>
           <a:xfrm>
-            <a:off x="4674240" y="1203480"/>
-            <a:ext cx="4015800" cy="1422720"/>
+            <a:off x="4673880" y="1203480"/>
+            <a:ext cx="4015440" cy="1422360"/>
           </a:xfrm>
           <a:prstGeom prst="rect">
             <a:avLst/>
@@ -2671,8 +2671,8 @@
         </p:nvSpPr>
         <p:spPr>
           <a:xfrm>
-            <a:off x="457200" y="2761920"/>
-            <a:ext cx="8229240" cy="1422720"/>
+            <a:off x="457200" y="2761200"/>
+            <a:ext cx="8228880" cy="1422360"/>
           </a:xfrm>
           <a:prstGeom prst="rect">
             <a:avLst/>
@@ -2727,7 +2727,7 @@
         <p:txBody>
           <a:bodyPr/>
           <a:p>
-            <a:fld id="{89CF4204-3699-414B-8150-D08646724336}" type="slidenum">
+            <a:fld id="{9C502E2C-FEF5-475B-81B2-AC7CC6BB5C87}" type="slidenum">
               <a:t>&lt;#&gt;</a:t>
             </a:fld>
           </a:p>
@@ -2789,7 +2789,7 @@
         <p:spPr>
           <a:xfrm>
             <a:off x="311760" y="744480"/>
-            <a:ext cx="8519760" cy="2052000"/>
+            <a:ext cx="8519400" cy="2051640"/>
           </a:xfrm>
           <a:prstGeom prst="rect">
             <a:avLst/>
@@ -2826,7 +2826,7 @@
         <p:spPr>
           <a:xfrm>
             <a:off x="457200" y="1203480"/>
-            <a:ext cx="8229240" cy="1422720"/>
+            <a:ext cx="8228880" cy="1422360"/>
           </a:xfrm>
           <a:prstGeom prst="rect">
             <a:avLst/>
@@ -2859,8 +2859,8 @@
         </p:nvSpPr>
         <p:spPr>
           <a:xfrm>
-            <a:off x="457200" y="2761920"/>
-            <a:ext cx="8229240" cy="1422720"/>
+            <a:off x="457200" y="2761200"/>
+            <a:ext cx="8228880" cy="1422360"/>
           </a:xfrm>
           <a:prstGeom prst="rect">
             <a:avLst/>
@@ -2915,7 +2915,7 @@
         <p:txBody>
           <a:bodyPr/>
           <a:p>
-            <a:fld id="{5E92DA0C-3F83-4BEC-99A3-A156AFFF3539}" type="slidenum">
+            <a:fld id="{C47C0EB8-D3E1-46E9-9CE1-94A0A898149A}" type="slidenum">
               <a:t>&lt;#&gt;</a:t>
             </a:fld>
           </a:p>
@@ -2977,7 +2977,7 @@
         <p:spPr>
           <a:xfrm>
             <a:off x="311760" y="744480"/>
-            <a:ext cx="8519760" cy="2052000"/>
+            <a:ext cx="8519400" cy="2051640"/>
           </a:xfrm>
           <a:prstGeom prst="rect">
             <a:avLst/>
@@ -3014,7 +3014,7 @@
         <p:spPr>
           <a:xfrm>
             <a:off x="457200" y="1203480"/>
-            <a:ext cx="4015800" cy="1422720"/>
+            <a:ext cx="4015440" cy="1422360"/>
           </a:xfrm>
           <a:prstGeom prst="rect">
             <a:avLst/>
@@ -3047,8 +3047,8 @@
         </p:nvSpPr>
         <p:spPr>
           <a:xfrm>
-            <a:off x="4674240" y="1203480"/>
-            <a:ext cx="4015800" cy="1422720"/>
+            <a:off x="4673880" y="1203480"/>
+            <a:ext cx="4015440" cy="1422360"/>
           </a:xfrm>
           <a:prstGeom prst="rect">
             <a:avLst/>
@@ -3081,8 +3081,8 @@
         </p:nvSpPr>
         <p:spPr>
           <a:xfrm>
-            <a:off x="457200" y="2761920"/>
-            <a:ext cx="4015800" cy="1422720"/>
+            <a:off x="457200" y="2761200"/>
+            <a:ext cx="4015440" cy="1422360"/>
           </a:xfrm>
           <a:prstGeom prst="rect">
             <a:avLst/>
@@ -3115,8 +3115,8 @@
         </p:nvSpPr>
         <p:spPr>
           <a:xfrm>
-            <a:off x="4674240" y="2761920"/>
-            <a:ext cx="4015800" cy="1422720"/>
+            <a:off x="4673880" y="2761200"/>
+            <a:ext cx="4015440" cy="1422360"/>
           </a:xfrm>
           <a:prstGeom prst="rect">
             <a:avLst/>
@@ -3171,7 +3171,7 @@
         <p:txBody>
           <a:bodyPr/>
           <a:p>
-            <a:fld id="{84ED048B-55B1-4927-863C-A5E5B0AFF279}" type="slidenum">
+            <a:fld id="{4388A05D-96E4-43DB-9642-681A364CDB87}" type="slidenum">
               <a:t>&lt;#&gt;</a:t>
             </a:fld>
           </a:p>
@@ -3233,7 +3233,7 @@
         <p:spPr>
           <a:xfrm>
             <a:off x="311760" y="744480"/>
-            <a:ext cx="8519760" cy="2052000"/>
+            <a:ext cx="8519400" cy="2051640"/>
           </a:xfrm>
           <a:prstGeom prst="rect">
             <a:avLst/>
@@ -3270,7 +3270,7 @@
         <p:spPr>
           <a:xfrm>
             <a:off x="457200" y="1203480"/>
-            <a:ext cx="2649600" cy="1422720"/>
+            <a:ext cx="2649600" cy="1422360"/>
           </a:xfrm>
           <a:prstGeom prst="rect">
             <a:avLst/>
@@ -3304,7 +3304,7 @@
         <p:spPr>
           <a:xfrm>
             <a:off x="3239640" y="1203480"/>
-            <a:ext cx="2649600" cy="1422720"/>
+            <a:ext cx="2649600" cy="1422360"/>
           </a:xfrm>
           <a:prstGeom prst="rect">
             <a:avLst/>
@@ -3338,7 +3338,7 @@
         <p:spPr>
           <a:xfrm>
             <a:off x="6022080" y="1203480"/>
-            <a:ext cx="2649600" cy="1422720"/>
+            <a:ext cx="2649600" cy="1422360"/>
           </a:xfrm>
           <a:prstGeom prst="rect">
             <a:avLst/>
@@ -3371,8 +3371,8 @@
         </p:nvSpPr>
         <p:spPr>
           <a:xfrm>
-            <a:off x="457200" y="2761920"/>
-            <a:ext cx="2649600" cy="1422720"/>
+            <a:off x="457200" y="2761200"/>
+            <a:ext cx="2649600" cy="1422360"/>
           </a:xfrm>
           <a:prstGeom prst="rect">
             <a:avLst/>
@@ -3405,8 +3405,8 @@
         </p:nvSpPr>
         <p:spPr>
           <a:xfrm>
-            <a:off x="3239640" y="2761920"/>
-            <a:ext cx="2649600" cy="1422720"/>
+            <a:off x="3239640" y="2761200"/>
+            <a:ext cx="2649600" cy="1422360"/>
           </a:xfrm>
           <a:prstGeom prst="rect">
             <a:avLst/>
@@ -3439,8 +3439,8 @@
         </p:nvSpPr>
         <p:spPr>
           <a:xfrm>
-            <a:off x="6022080" y="2761920"/>
-            <a:ext cx="2649600" cy="1422720"/>
+            <a:off x="6022080" y="2761200"/>
+            <a:ext cx="2649600" cy="1422360"/>
           </a:xfrm>
           <a:prstGeom prst="rect">
             <a:avLst/>
@@ -3495,7 +3495,7 @@
         <p:txBody>
           <a:bodyPr/>
           <a:p>
-            <a:fld id="{C8A3ADE6-442C-4342-957C-0A8BE6D270AC}" type="slidenum">
+            <a:fld id="{0A02A54C-A33D-4D0F-8BFB-C7D6B99D8F16}" type="slidenum">
               <a:t>&lt;#&gt;</a:t>
             </a:fld>
           </a:p>
@@ -3557,7 +3557,7 @@
         <p:spPr>
           <a:xfrm>
             <a:off x="311760" y="744480"/>
-            <a:ext cx="8519760" cy="2052000"/>
+            <a:ext cx="8519400" cy="2051640"/>
           </a:xfrm>
           <a:prstGeom prst="rect">
             <a:avLst/>
@@ -3594,7 +3594,7 @@
         <p:spPr>
           <a:xfrm>
             <a:off x="457200" y="1203480"/>
-            <a:ext cx="8229240" cy="2982960"/>
+            <a:ext cx="8228880" cy="2982600"/>
           </a:xfrm>
           <a:prstGeom prst="rect">
             <a:avLst/>
@@ -3629,7 +3629,7 @@
         <p:txBody>
           <a:bodyPr/>
           <a:p>
-            <a:fld id="{5118EFB5-2CD9-4BF9-8945-4FDD99BB22E9}" type="slidenum">
+            <a:fld id="{79575756-A10F-49F1-B4EF-68933090EB4A}" type="slidenum">
               <a:t>&lt;#&gt;</a:t>
             </a:fld>
           </a:p>
@@ -3670,7 +3670,7 @@
         <p:spPr>
           <a:xfrm>
             <a:off x="311760" y="744480"/>
-            <a:ext cx="8519760" cy="2052000"/>
+            <a:ext cx="8519400" cy="2051640"/>
           </a:xfrm>
           <a:prstGeom prst="rect">
             <a:avLst/>
@@ -3707,7 +3707,7 @@
         <p:spPr>
           <a:xfrm>
             <a:off x="457200" y="1203480"/>
-            <a:ext cx="4015800" cy="2982960"/>
+            <a:ext cx="4015440" cy="2982600"/>
           </a:xfrm>
           <a:prstGeom prst="rect">
             <a:avLst/>
@@ -3740,8 +3740,8 @@
         </p:nvSpPr>
         <p:spPr>
           <a:xfrm>
-            <a:off x="4674240" y="1203480"/>
-            <a:ext cx="4015800" cy="2982960"/>
+            <a:off x="4673880" y="1203480"/>
+            <a:ext cx="4015440" cy="2982600"/>
           </a:xfrm>
           <a:prstGeom prst="rect">
             <a:avLst/>
@@ -3776,7 +3776,7 @@
         <p:txBody>
           <a:bodyPr/>
           <a:p>
-            <a:fld id="{5293023D-BCA9-4FB6-8A78-11687B85E59D}" type="slidenum">
+            <a:fld id="{FA8F7AEB-C546-4D94-BABD-346E1E50B696}" type="slidenum">
               <a:t>&lt;#&gt;</a:t>
             </a:fld>
           </a:p>
@@ -3817,7 +3817,7 @@
         <p:spPr>
           <a:xfrm>
             <a:off x="311760" y="744480"/>
-            <a:ext cx="8519760" cy="2052000"/>
+            <a:ext cx="8519400" cy="2051640"/>
           </a:xfrm>
           <a:prstGeom prst="rect">
             <a:avLst/>
@@ -3855,7 +3855,7 @@
         <p:txBody>
           <a:bodyPr/>
           <a:p>
-            <a:fld id="{47078F9D-8C0D-417A-AEF2-5787687221E2}" type="slidenum">
+            <a:fld id="{524A45FD-C018-4EED-8B8A-21CA32778FFC}" type="slidenum">
               <a:t>&lt;#&gt;</a:t>
             </a:fld>
           </a:p>
@@ -3896,7 +3896,7 @@
         <p:spPr>
           <a:xfrm>
             <a:off x="311760" y="744480"/>
-            <a:ext cx="8519760" cy="9513000"/>
+            <a:ext cx="8519400" cy="9511560"/>
           </a:xfrm>
           <a:prstGeom prst="rect">
             <a:avLst/>
@@ -3934,7 +3934,7 @@
         <p:txBody>
           <a:bodyPr/>
           <a:p>
-            <a:fld id="{44AC6E89-FFA3-452E-84DD-D7CB950E75A8}" type="slidenum">
+            <a:fld id="{A390BD79-184B-4B37-AE6E-CF289B6B1E40}" type="slidenum">
               <a:t>&lt;#&gt;</a:t>
             </a:fld>
           </a:p>
@@ -3975,7 +3975,7 @@
         <p:spPr>
           <a:xfrm>
             <a:off x="311760" y="744480"/>
-            <a:ext cx="8519760" cy="2052000"/>
+            <a:ext cx="8519400" cy="2051640"/>
           </a:xfrm>
           <a:prstGeom prst="rect">
             <a:avLst/>
@@ -4012,7 +4012,7 @@
         <p:spPr>
           <a:xfrm>
             <a:off x="457200" y="1203480"/>
-            <a:ext cx="4015800" cy="1422720"/>
+            <a:ext cx="4015440" cy="1422360"/>
           </a:xfrm>
           <a:prstGeom prst="rect">
             <a:avLst/>
@@ -4045,8 +4045,8 @@
         </p:nvSpPr>
         <p:spPr>
           <a:xfrm>
-            <a:off x="4674240" y="1203480"/>
-            <a:ext cx="4015800" cy="2982960"/>
+            <a:off x="4673880" y="1203480"/>
+            <a:ext cx="4015440" cy="2982600"/>
           </a:xfrm>
           <a:prstGeom prst="rect">
             <a:avLst/>
@@ -4079,8 +4079,8 @@
         </p:nvSpPr>
         <p:spPr>
           <a:xfrm>
-            <a:off x="457200" y="2761920"/>
-            <a:ext cx="4015800" cy="1422720"/>
+            <a:off x="457200" y="2761200"/>
+            <a:ext cx="4015440" cy="1422360"/>
           </a:xfrm>
           <a:prstGeom prst="rect">
             <a:avLst/>
@@ -4115,7 +4115,7 @@
         <p:txBody>
           <a:bodyPr/>
           <a:p>
-            <a:fld id="{F67EF232-3F7A-4E22-81E0-6A0DE8F73A5C}" type="slidenum">
+            <a:fld id="{77773347-8EA0-4F8B-908C-E9A90383D522}" type="slidenum">
               <a:t>&lt;#&gt;</a:t>
             </a:fld>
           </a:p>
@@ -4156,7 +4156,7 @@
         <p:spPr>
           <a:xfrm>
             <a:off x="311760" y="744480"/>
-            <a:ext cx="8519760" cy="2052000"/>
+            <a:ext cx="8519400" cy="2051640"/>
           </a:xfrm>
           <a:prstGeom prst="rect">
             <a:avLst/>
@@ -4193,7 +4193,7 @@
         <p:spPr>
           <a:xfrm>
             <a:off x="457200" y="1203480"/>
-            <a:ext cx="4015800" cy="2982960"/>
+            <a:ext cx="4015440" cy="2982600"/>
           </a:xfrm>
           <a:prstGeom prst="rect">
             <a:avLst/>
@@ -4226,8 +4226,8 @@
         </p:nvSpPr>
         <p:spPr>
           <a:xfrm>
-            <a:off x="4674240" y="1203480"/>
-            <a:ext cx="4015800" cy="1422720"/>
+            <a:off x="4673880" y="1203480"/>
+            <a:ext cx="4015440" cy="1422360"/>
           </a:xfrm>
           <a:prstGeom prst="rect">
             <a:avLst/>
@@ -4260,8 +4260,8 @@
         </p:nvSpPr>
         <p:spPr>
           <a:xfrm>
-            <a:off x="4674240" y="2761920"/>
-            <a:ext cx="4015800" cy="1422720"/>
+            <a:off x="4673880" y="2761200"/>
+            <a:ext cx="4015440" cy="1422360"/>
           </a:xfrm>
           <a:prstGeom prst="rect">
             <a:avLst/>
@@ -4296,7 +4296,7 @@
         <p:txBody>
           <a:bodyPr/>
           <a:p>
-            <a:fld id="{98B0ACD5-516C-4492-A9C0-FE7691DB3659}" type="slidenum">
+            <a:fld id="{346873F2-4176-4B24-B4D1-DC6C58F26158}" type="slidenum">
               <a:t>&lt;#&gt;</a:t>
             </a:fld>
           </a:p>
@@ -4337,7 +4337,7 @@
         <p:spPr>
           <a:xfrm>
             <a:off x="311760" y="744480"/>
-            <a:ext cx="8519760" cy="2052000"/>
+            <a:ext cx="8519400" cy="2051640"/>
           </a:xfrm>
           <a:prstGeom prst="rect">
             <a:avLst/>
@@ -4374,7 +4374,7 @@
         <p:spPr>
           <a:xfrm>
             <a:off x="457200" y="1203480"/>
-            <a:ext cx="4015800" cy="1422720"/>
+            <a:ext cx="4015440" cy="1422360"/>
           </a:xfrm>
           <a:prstGeom prst="rect">
             <a:avLst/>
@@ -4407,8 +4407,8 @@
         </p:nvSpPr>
         <p:spPr>
           <a:xfrm>
-            <a:off x="4674240" y="1203480"/>
-            <a:ext cx="4015800" cy="1422720"/>
+            <a:off x="4673880" y="1203480"/>
+            <a:ext cx="4015440" cy="1422360"/>
           </a:xfrm>
           <a:prstGeom prst="rect">
             <a:avLst/>
@@ -4441,8 +4441,8 @@
         </p:nvSpPr>
         <p:spPr>
           <a:xfrm>
-            <a:off x="457200" y="2761920"/>
-            <a:ext cx="8229240" cy="1422720"/>
+            <a:off x="457200" y="2761200"/>
+            <a:ext cx="8228880" cy="1422360"/>
           </a:xfrm>
           <a:prstGeom prst="rect">
             <a:avLst/>
@@ -4477,7 +4477,7 @@
         <p:txBody>
           <a:bodyPr/>
           <a:p>
-            <a:fld id="{D7266B34-64E4-4836-B762-9F563FB348B0}" type="slidenum">
+            <a:fld id="{AC4EB9BD-B7E4-42B0-BB3E-F9E60F173B14}" type="slidenum">
               <a:t>&lt;#&gt;</a:t>
             </a:fld>
           </a:p>
@@ -4525,7 +4525,7 @@
         <p:spPr>
           <a:xfrm>
             <a:off x="311760" y="744480"/>
-            <a:ext cx="8519760" cy="2052000"/>
+            <a:ext cx="8519400" cy="2051640"/>
           </a:xfrm>
           <a:prstGeom prst="rect">
             <a:avLst/>
@@ -4559,84 +4559,13 @@
             <a:spLocks noGrp="1"/>
           </p:cNvSpPr>
           <p:nvPr>
-            <p:ph type="sldNum" idx="1"/>
-          </p:nvPr>
-        </p:nvSpPr>
-        <p:spPr>
-          <a:xfrm>
-            <a:off x="8472600" y="4663080"/>
-            <a:ext cx="547920" cy="392760"/>
-          </a:xfrm>
-          <a:prstGeom prst="rect">
-            <a:avLst/>
-          </a:prstGeom>
-          <a:noFill/>
-          <a:ln w="0">
-            <a:noFill/>
-          </a:ln>
-        </p:spPr>
-        <p:txBody>
-          <a:bodyPr lIns="90000" rIns="90000" tIns="91440" bIns="91440" anchor="ctr">
-            <a:noAutofit/>
-          </a:bodyPr>
-          <a:lstStyle>
-            <a:lvl1pPr algn="r">
-              <a:lnSpc>
-                <a:spcPct val="100000"/>
-              </a:lnSpc>
-              <a:buNone/>
-              <a:tabLst>
-                <a:tab algn="l" pos="0"/>
-              </a:tabLst>
-              <a:defRPr b="0" lang="ru" sz="1000" spc="-1" strike="noStrike">
-                <a:solidFill>
-                  <a:srgbClr val="595959"/>
-                </a:solidFill>
-                <a:latin typeface="Arial"/>
-                <a:ea typeface="Arial"/>
-              </a:defRPr>
-            </a:lvl1pPr>
-          </a:lstStyle>
-          <a:p>
-            <a:pPr algn="r">
-              <a:lnSpc>
-                <a:spcPct val="100000"/>
-              </a:lnSpc>
-              <a:buNone/>
-              <a:tabLst>
-                <a:tab algn="l" pos="0"/>
-              </a:tabLst>
-            </a:pPr>
-            <a:fld id="{45C3FBE4-F694-474E-BBCC-249339B4E4D8}" type="slidenum">
-              <a:rPr b="0" lang="ru" sz="1000" spc="-1" strike="noStrike">
-                <a:solidFill>
-                  <a:srgbClr val="595959"/>
-                </a:solidFill>
-                <a:latin typeface="Arial"/>
-                <a:ea typeface="Arial"/>
-              </a:rPr>
-              <a:t>8</a:t>
-            </a:fld>
-            <a:endParaRPr b="0" lang="ru-RU" sz="1000" spc="-1" strike="noStrike">
-              <a:latin typeface="Times New Roman"/>
-            </a:endParaRPr>
-          </a:p>
-        </p:txBody>
-      </p:sp>
-      <p:sp>
-        <p:nvSpPr>
-          <p:cNvPr id="2" name="PlaceHolder 3"/>
-          <p:cNvSpPr>
-            <a:spLocks noGrp="1"/>
-          </p:cNvSpPr>
-          <p:nvPr>
             <p:ph type="body"/>
           </p:nvPr>
         </p:nvSpPr>
         <p:spPr>
           <a:xfrm>
             <a:off x="457200" y="1203480"/>
-            <a:ext cx="8229240" cy="2982960"/>
+            <a:ext cx="8228880" cy="2982600"/>
           </a:xfrm>
           <a:prstGeom prst="rect">
             <a:avLst/>
@@ -4663,12 +4592,12 @@
               <a:buChar char=""/>
             </a:pPr>
             <a:r>
-              <a:rPr b="0" lang="ru-RU" sz="3200" spc="-1" strike="noStrike">
+              <a:rPr b="0" lang="ru-RU" sz="1800" spc="-1" strike="noStrike">
                 <a:latin typeface="Arial"/>
               </a:rPr>
               <a:t>Для правки структуры щёлкните мышью</a:t>
             </a:r>
-            <a:endParaRPr b="0" lang="ru-RU" sz="3200" spc="-1" strike="noStrike">
+            <a:endParaRPr b="0" lang="ru-RU" sz="1800" spc="-1" strike="noStrike">
               <a:latin typeface="Arial"/>
             </a:endParaRPr>
           </a:p>
@@ -4685,12 +4614,12 @@
               <a:buChar char=""/>
             </a:pPr>
             <a:r>
-              <a:rPr b="0" lang="ru-RU" sz="2800" spc="-1" strike="noStrike">
+              <a:rPr b="0" lang="ru-RU" sz="1800" spc="-1" strike="noStrike">
                 <a:latin typeface="Arial"/>
               </a:rPr>
               <a:t>Второй уровень структуры</a:t>
             </a:r>
-            <a:endParaRPr b="0" lang="ru-RU" sz="2800" spc="-1" strike="noStrike">
+            <a:endParaRPr b="0" lang="ru-RU" sz="1800" spc="-1" strike="noStrike">
               <a:latin typeface="Arial"/>
             </a:endParaRPr>
           </a:p>
@@ -4707,12 +4636,12 @@
               <a:buChar char=""/>
             </a:pPr>
             <a:r>
-              <a:rPr b="0" lang="ru-RU" sz="2400" spc="-1" strike="noStrike">
+              <a:rPr b="0" lang="ru-RU" sz="1800" spc="-1" strike="noStrike">
                 <a:latin typeface="Arial"/>
               </a:rPr>
               <a:t>Третий уровень структуры</a:t>
             </a:r>
-            <a:endParaRPr b="0" lang="ru-RU" sz="2400" spc="-1" strike="noStrike">
+            <a:endParaRPr b="0" lang="ru-RU" sz="1800" spc="-1" strike="noStrike">
               <a:latin typeface="Arial"/>
             </a:endParaRPr>
           </a:p>
@@ -4729,12 +4658,12 @@
               <a:buChar char=""/>
             </a:pPr>
             <a:r>
-              <a:rPr b="0" lang="ru-RU" sz="2000" spc="-1" strike="noStrike">
+              <a:rPr b="0" lang="ru-RU" sz="1800" spc="-1" strike="noStrike">
                 <a:latin typeface="Arial"/>
               </a:rPr>
               <a:t>Четвёртый уровень структуры</a:t>
             </a:r>
-            <a:endParaRPr b="0" lang="ru-RU" sz="2000" spc="-1" strike="noStrike">
+            <a:endParaRPr b="0" lang="ru-RU" sz="1800" spc="-1" strike="noStrike">
               <a:latin typeface="Arial"/>
             </a:endParaRPr>
           </a:p>
@@ -4751,12 +4680,12 @@
               <a:buChar char=""/>
             </a:pPr>
             <a:r>
-              <a:rPr b="0" lang="ru-RU" sz="2000" spc="-1" strike="noStrike">
+              <a:rPr b="0" lang="ru-RU" sz="1800" spc="-1" strike="noStrike">
                 <a:latin typeface="Arial"/>
               </a:rPr>
               <a:t>Пятый уровень структуры</a:t>
             </a:r>
-            <a:endParaRPr b="0" lang="ru-RU" sz="2000" spc="-1" strike="noStrike">
+            <a:endParaRPr b="0" lang="ru-RU" sz="1800" spc="-1" strike="noStrike">
               <a:latin typeface="Arial"/>
             </a:endParaRPr>
           </a:p>
@@ -4773,12 +4702,12 @@
               <a:buChar char=""/>
             </a:pPr>
             <a:r>
-              <a:rPr b="0" lang="ru-RU" sz="2000" spc="-1" strike="noStrike">
+              <a:rPr b="0" lang="ru-RU" sz="1800" spc="-1" strike="noStrike">
                 <a:latin typeface="Arial"/>
               </a:rPr>
               <a:t>Шестой уровень структуры</a:t>
             </a:r>
-            <a:endParaRPr b="0" lang="ru-RU" sz="2000" spc="-1" strike="noStrike">
+            <a:endParaRPr b="0" lang="ru-RU" sz="1800" spc="-1" strike="noStrike">
               <a:latin typeface="Arial"/>
             </a:endParaRPr>
           </a:p>
@@ -4795,13 +4724,84 @@
               <a:buChar char=""/>
             </a:pPr>
             <a:r>
-              <a:rPr b="0" lang="ru-RU" sz="2000" spc="-1" strike="noStrike">
+              <a:rPr b="0" lang="ru-RU" sz="1800" spc="-1" strike="noStrike">
                 <a:latin typeface="Arial"/>
               </a:rPr>
               <a:t>Седьмой уровень структуры</a:t>
             </a:r>
-            <a:endParaRPr b="0" lang="ru-RU" sz="2000" spc="-1" strike="noStrike">
-              <a:latin typeface="Arial"/>
+            <a:endParaRPr b="0" lang="ru-RU" sz="1800" spc="-1" strike="noStrike">
+              <a:latin typeface="Arial"/>
+            </a:endParaRPr>
+          </a:p>
+        </p:txBody>
+      </p:sp>
+      <p:sp>
+        <p:nvSpPr>
+          <p:cNvPr id="2" name="PlaceHolder 3"/>
+          <p:cNvSpPr>
+            <a:spLocks noGrp="1"/>
+          </p:cNvSpPr>
+          <p:nvPr>
+            <p:ph type="sldNum" idx="1"/>
+          </p:nvPr>
+        </p:nvSpPr>
+        <p:spPr>
+          <a:xfrm>
+            <a:off x="8472600" y="4663080"/>
+            <a:ext cx="547560" cy="392400"/>
+          </a:xfrm>
+          <a:prstGeom prst="rect">
+            <a:avLst/>
+          </a:prstGeom>
+          <a:noFill/>
+          <a:ln w="0">
+            <a:noFill/>
+          </a:ln>
+        </p:spPr>
+        <p:txBody>
+          <a:bodyPr lIns="90000" rIns="90000" tIns="91440" bIns="91440" anchor="ctr">
+            <a:noAutofit/>
+          </a:bodyPr>
+          <a:lstStyle>
+            <a:lvl1pPr algn="r">
+              <a:lnSpc>
+                <a:spcPct val="100000"/>
+              </a:lnSpc>
+              <a:buNone/>
+              <a:tabLst>
+                <a:tab algn="l" pos="0"/>
+              </a:tabLst>
+              <a:defRPr b="0" lang="ru" sz="1000" spc="-1" strike="noStrike">
+                <a:solidFill>
+                  <a:srgbClr val="595959"/>
+                </a:solidFill>
+                <a:latin typeface="Arial"/>
+                <a:ea typeface="Arial"/>
+              </a:defRPr>
+            </a:lvl1pPr>
+          </a:lstStyle>
+          <a:p>
+            <a:pPr algn="r">
+              <a:lnSpc>
+                <a:spcPct val="100000"/>
+              </a:lnSpc>
+              <a:buNone/>
+              <a:tabLst>
+                <a:tab algn="l" pos="0"/>
+              </a:tabLst>
+            </a:pPr>
+            <a:fld id="{3E81BD27-64A8-4C39-8534-B6D1A682811D}" type="slidenum">
+              <a:rPr b="0" lang="ru" sz="1000" spc="-1" strike="noStrike">
+                <a:solidFill>
+                  <a:srgbClr val="595959"/>
+                </a:solidFill>
+                <a:latin typeface="Arial"/>
+                <a:ea typeface="Arial"/>
+              </a:rPr>
+              <a:t>&lt;номер&gt;</a:t>
+            </a:fld>
+            <a:endParaRPr b="0" lang="ru-RU" sz="1000" spc="-1" strike="noStrike">
+              <a:latin typeface="Times New Roman"/>
             </a:endParaRPr>
           </a:p>
         </p:txBody>
@@ -4863,7 +4863,7 @@
         <p:spPr>
           <a:xfrm>
             <a:off x="3124080" y="4767120"/>
-            <a:ext cx="2894760" cy="273240"/>
+            <a:ext cx="2894400" cy="272880"/>
           </a:xfrm>
           <a:prstGeom prst="rect">
             <a:avLst/>
@@ -4920,7 +4920,7 @@
         <p:spPr>
           <a:xfrm>
             <a:off x="6553080" y="4767120"/>
-            <a:ext cx="2133000" cy="273240"/>
+            <a:ext cx="2132640" cy="272880"/>
           </a:xfrm>
           <a:prstGeom prst="rect">
             <a:avLst/>
@@ -4962,7 +4962,7 @@
                 <a:tab algn="l" pos="0"/>
               </a:tabLst>
             </a:pPr>
-            <a:fld id="{C7725CF6-006B-4560-8B01-F2B4578DD4D7}" type="slidenum">
+            <a:fld id="{FA9BBA6A-C0F8-4253-8EBA-8147F854D7E9}" type="slidenum">
               <a:rPr b="0" lang="ru" sz="900" spc="-1" strike="noStrike">
                 <a:solidFill>
                   <a:srgbClr val="888888"/>
@@ -4991,7 +4991,7 @@
         <p:spPr>
           <a:xfrm>
             <a:off x="457200" y="4767120"/>
-            <a:ext cx="2133000" cy="273240"/>
+            <a:ext cx="2132640" cy="272880"/>
           </a:xfrm>
           <a:prstGeom prst="rect">
             <a:avLst/>
@@ -5301,7 +5301,7 @@
         <p:spPr>
           <a:xfrm>
             <a:off x="0" y="0"/>
-            <a:ext cx="9143280" cy="5142960"/>
+            <a:ext cx="9142920" cy="5142600"/>
           </a:xfrm>
           <a:prstGeom prst="rect">
             <a:avLst/>
@@ -5324,7 +5324,7 @@
         <p:spPr>
           <a:xfrm>
             <a:off x="853200" y="3867840"/>
-            <a:ext cx="2926080" cy="7920"/>
+            <a:ext cx="2925720" cy="7560"/>
           </a:xfrm>
           <a:prstGeom prst="rect">
             <a:avLst/>
@@ -5347,7 +5347,7 @@
         <p:spPr>
           <a:xfrm>
             <a:off x="725760" y="771480"/>
-            <a:ext cx="3125520" cy="729000"/>
+            <a:ext cx="3125160" cy="728640"/>
           </a:xfrm>
           <a:prstGeom prst="rect">
             <a:avLst/>
@@ -5366,7 +5366,7 @@
         <p:spPr>
           <a:xfrm>
             <a:off x="725760" y="1712160"/>
-            <a:ext cx="8041320" cy="1120680"/>
+            <a:ext cx="8040960" cy="1120320"/>
           </a:xfrm>
           <a:prstGeom prst="rect">
             <a:avLst/>
@@ -5446,7 +5446,7 @@
         <p:spPr>
           <a:xfrm>
             <a:off x="755640" y="3241440"/>
-            <a:ext cx="6750000" cy="617040"/>
+            <a:ext cx="6749640" cy="616680"/>
           </a:xfrm>
           <a:prstGeom prst="rect">
             <a:avLst/>
@@ -5579,7 +5579,7 @@
         <p:spPr>
           <a:xfrm>
             <a:off x="0" y="0"/>
-            <a:ext cx="9143280" cy="5142960"/>
+            <a:ext cx="9142920" cy="5142600"/>
           </a:xfrm>
           <a:prstGeom prst="rect">
             <a:avLst/>
@@ -5598,7 +5598,7 @@
         <p:spPr>
           <a:xfrm>
             <a:off x="205200" y="196200"/>
-            <a:ext cx="3513960" cy="214560"/>
+            <a:ext cx="3513600" cy="214200"/>
           </a:xfrm>
           <a:prstGeom prst="rect">
             <a:avLst/>
@@ -5657,7 +5657,7 @@
         <p:spPr>
           <a:xfrm>
             <a:off x="7812360" y="187920"/>
-            <a:ext cx="1079280" cy="245520"/>
+            <a:ext cx="1078920" cy="245160"/>
           </a:xfrm>
           <a:prstGeom prst="rect">
             <a:avLst/>
@@ -5680,7 +5680,7 @@
         <p:spPr>
           <a:xfrm>
             <a:off x="-1091160" y="474840"/>
-            <a:ext cx="2926080" cy="7920"/>
+            <a:ext cx="2925720" cy="7560"/>
           </a:xfrm>
           <a:prstGeom prst="rect">
             <a:avLst/>
@@ -5699,7 +5699,7 @@
         <p:spPr>
           <a:xfrm>
             <a:off x="323640" y="690120"/>
-            <a:ext cx="3132720" cy="368640"/>
+            <a:ext cx="3132360" cy="368280"/>
           </a:xfrm>
           <a:prstGeom prst="rect">
             <a:avLst/>
@@ -5754,7 +5754,7 @@
         <p:spPr>
           <a:xfrm>
             <a:off x="539640" y="1551960"/>
-            <a:ext cx="3527640" cy="1060920"/>
+            <a:ext cx="3527280" cy="1060560"/>
           </a:xfrm>
           <a:prstGeom prst="rect">
             <a:avLst/>
@@ -5780,7 +5780,7 @@
         <p:spPr>
           <a:xfrm>
             <a:off x="526320" y="1244160"/>
-            <a:ext cx="3513960" cy="941760"/>
+            <a:ext cx="3513600" cy="941400"/>
           </a:xfrm>
           <a:prstGeom prst="rect">
             <a:avLst/>
@@ -5887,7 +5887,7 @@
         <p:spPr>
           <a:xfrm>
             <a:off x="4816440" y="1551960"/>
-            <a:ext cx="4075200" cy="1269000"/>
+            <a:ext cx="4074840" cy="1268640"/>
           </a:xfrm>
           <a:prstGeom prst="rect">
             <a:avLst/>
@@ -5913,7 +5913,7 @@
         <p:spPr>
           <a:xfrm>
             <a:off x="4803480" y="1244160"/>
-            <a:ext cx="3513960" cy="1133640"/>
+            <a:ext cx="3513600" cy="1133280"/>
           </a:xfrm>
           <a:prstGeom prst="rect">
             <a:avLst/>
@@ -6010,7 +6010,7 @@
         <p:spPr>
           <a:xfrm>
             <a:off x="539640" y="3393000"/>
-            <a:ext cx="3527640" cy="1269000"/>
+            <a:ext cx="3527280" cy="1268640"/>
           </a:xfrm>
           <a:prstGeom prst="rect">
             <a:avLst/>
@@ -6036,7 +6036,7 @@
         <p:spPr>
           <a:xfrm>
             <a:off x="532800" y="2378520"/>
-            <a:ext cx="4276440" cy="2359440"/>
+            <a:ext cx="4276080" cy="2359080"/>
           </a:xfrm>
           <a:prstGeom prst="rect">
             <a:avLst/>
@@ -6207,7 +6207,7 @@
         <p:spPr>
           <a:xfrm>
             <a:off x="4501080" y="1347480"/>
-            <a:ext cx="70200" cy="70200"/>
+            <a:ext cx="69840" cy="69840"/>
           </a:xfrm>
           <a:prstGeom prst="ellipse">
             <a:avLst/>
@@ -6235,7 +6235,7 @@
         <p:spPr>
           <a:xfrm>
             <a:off x="-73080" y="3056040"/>
-            <a:ext cx="468000" cy="307080"/>
+            <a:ext cx="467640" cy="306720"/>
           </a:xfrm>
           <a:prstGeom prst="rect">
             <a:avLst/>
@@ -6295,7 +6295,7 @@
         <p:spPr>
           <a:xfrm>
             <a:off x="0" y="0"/>
-            <a:ext cx="9143280" cy="5142960"/>
+            <a:ext cx="9142920" cy="5142600"/>
           </a:xfrm>
           <a:prstGeom prst="rect">
             <a:avLst/>
@@ -6318,7 +6318,7 @@
         <p:spPr>
           <a:xfrm>
             <a:off x="7812360" y="187920"/>
-            <a:ext cx="1079280" cy="245520"/>
+            <a:ext cx="1078920" cy="245160"/>
           </a:xfrm>
           <a:prstGeom prst="rect">
             <a:avLst/>
@@ -6341,7 +6341,7 @@
         <p:spPr>
           <a:xfrm>
             <a:off x="-659160" y="474840"/>
-            <a:ext cx="2926080" cy="7920"/>
+            <a:ext cx="2925720" cy="7560"/>
           </a:xfrm>
           <a:prstGeom prst="rect">
             <a:avLst/>
@@ -6360,7 +6360,7 @@
         <p:spPr>
           <a:xfrm>
             <a:off x="362880" y="1456200"/>
-            <a:ext cx="4313160" cy="368640"/>
+            <a:ext cx="4312800" cy="368280"/>
           </a:xfrm>
           <a:prstGeom prst="rect">
             <a:avLst/>
@@ -6386,7 +6386,7 @@
         <p:spPr>
           <a:xfrm>
             <a:off x="284400" y="2523600"/>
-            <a:ext cx="4392000" cy="1199520"/>
+            <a:ext cx="4391640" cy="1199160"/>
           </a:xfrm>
           <a:prstGeom prst="rect">
             <a:avLst/>
@@ -6473,7 +6473,7 @@
         <p:spPr>
           <a:xfrm>
             <a:off x="849240" y="1117800"/>
-            <a:ext cx="3110400" cy="368640"/>
+            <a:ext cx="3110040" cy="368280"/>
           </a:xfrm>
           <a:prstGeom prst="rect">
             <a:avLst/>
@@ -6528,7 +6528,7 @@
         <p:spPr>
           <a:xfrm>
             <a:off x="876960" y="1463040"/>
-            <a:ext cx="2902680" cy="368640"/>
+            <a:ext cx="2902320" cy="368280"/>
           </a:xfrm>
           <a:prstGeom prst="rect">
             <a:avLst/>
@@ -6593,7 +6593,7 @@
         <p:spPr>
           <a:xfrm>
             <a:off x="804240" y="2192040"/>
-            <a:ext cx="1187280" cy="368640"/>
+            <a:ext cx="1186920" cy="368280"/>
           </a:xfrm>
           <a:prstGeom prst="rect">
             <a:avLst/>
@@ -6648,7 +6648,7 @@
         <p:spPr>
           <a:xfrm>
             <a:off x="849240" y="2558880"/>
-            <a:ext cx="2390760" cy="368640"/>
+            <a:ext cx="2390400" cy="368280"/>
           </a:xfrm>
           <a:prstGeom prst="rect">
             <a:avLst/>
@@ -6713,7 +6713,7 @@
         <p:spPr>
           <a:xfrm>
             <a:off x="4795200" y="1117800"/>
-            <a:ext cx="4227840" cy="3970080"/>
+            <a:ext cx="4227480" cy="3969720"/>
           </a:xfrm>
           <a:prstGeom prst="rect">
             <a:avLst/>
@@ -7347,7 +7347,7 @@
         <p:spPr>
           <a:xfrm>
             <a:off x="358920" y="699480"/>
-            <a:ext cx="2977560" cy="368640"/>
+            <a:ext cx="2977200" cy="368280"/>
           </a:xfrm>
           <a:prstGeom prst="rect">
             <a:avLst/>
@@ -7406,7 +7406,7 @@
         <p:spPr>
           <a:xfrm>
             <a:off x="4274280" y="1072080"/>
-            <a:ext cx="461880" cy="459720"/>
+            <a:ext cx="461520" cy="459360"/>
           </a:xfrm>
           <a:prstGeom prst="rect">
             <a:avLst/>
@@ -7429,7 +7429,7 @@
         <p:spPr>
           <a:xfrm>
             <a:off x="402480" y="2163600"/>
-            <a:ext cx="445680" cy="445680"/>
+            <a:ext cx="445320" cy="445320"/>
           </a:xfrm>
           <a:prstGeom prst="rect">
             <a:avLst/>
@@ -7452,7 +7452,7 @@
         <p:spPr>
           <a:xfrm>
             <a:off x="421560" y="1101600"/>
-            <a:ext cx="454680" cy="456840"/>
+            <a:ext cx="454320" cy="456480"/>
           </a:xfrm>
           <a:prstGeom prst="rect">
             <a:avLst/>
@@ -7471,7 +7471,7 @@
         <p:spPr>
           <a:xfrm>
             <a:off x="205200" y="196200"/>
-            <a:ext cx="3513960" cy="214560"/>
+            <a:ext cx="3513600" cy="214200"/>
           </a:xfrm>
           <a:prstGeom prst="rect">
             <a:avLst/>
@@ -7531,7 +7531,7 @@
         <p:spPr>
           <a:xfrm>
             <a:off x="0" y="0"/>
-            <a:ext cx="9143280" cy="5142960"/>
+            <a:ext cx="9142920" cy="5142600"/>
           </a:xfrm>
           <a:prstGeom prst="rect">
             <a:avLst/>
@@ -7554,7 +7554,7 @@
         <p:spPr>
           <a:xfrm>
             <a:off x="7812360" y="187920"/>
-            <a:ext cx="1079280" cy="245520"/>
+            <a:ext cx="1078920" cy="245160"/>
           </a:xfrm>
           <a:prstGeom prst="rect">
             <a:avLst/>
@@ -7573,7 +7573,7 @@
         <p:spPr>
           <a:xfrm>
             <a:off x="395640" y="1004040"/>
-            <a:ext cx="4571280" cy="3068640"/>
+            <a:ext cx="4570920" cy="3068280"/>
           </a:xfrm>
           <a:prstGeom prst="rect">
             <a:avLst/>
@@ -7830,7 +7830,7 @@
         <p:spPr>
           <a:xfrm>
             <a:off x="395640" y="3166920"/>
-            <a:ext cx="1799640" cy="784080"/>
+            <a:ext cx="1799280" cy="783720"/>
           </a:xfrm>
           <a:prstGeom prst="rect">
             <a:avLst/>
@@ -7856,7 +7856,7 @@
         <p:spPr>
           <a:xfrm>
             <a:off x="413280" y="2643840"/>
-            <a:ext cx="2231640" cy="522360"/>
+            <a:ext cx="2231280" cy="522000"/>
           </a:xfrm>
           <a:prstGeom prst="rect">
             <a:avLst/>
@@ -7882,7 +7882,7 @@
         <p:spPr>
           <a:xfrm>
             <a:off x="395640" y="1396440"/>
-            <a:ext cx="2231640" cy="2554560"/>
+            <a:ext cx="2231280" cy="2554200"/>
           </a:xfrm>
           <a:prstGeom prst="rect">
             <a:avLst/>
@@ -7912,7 +7912,7 @@
         <p:spPr>
           <a:xfrm>
             <a:off x="-1476720" y="474840"/>
-            <a:ext cx="2926080" cy="7920"/>
+            <a:ext cx="2925720" cy="7560"/>
           </a:xfrm>
           <a:prstGeom prst="rect">
             <a:avLst/>
@@ -7931,7 +7931,7 @@
         <p:spPr>
           <a:xfrm>
             <a:off x="2483640" y="3363840"/>
-            <a:ext cx="1871640" cy="507240"/>
+            <a:ext cx="1871280" cy="506880"/>
           </a:xfrm>
           <a:prstGeom prst="rect">
             <a:avLst/>
@@ -7957,7 +7957,7 @@
         <p:spPr>
           <a:xfrm>
             <a:off x="2501640" y="2643840"/>
-            <a:ext cx="1925640" cy="738000"/>
+            <a:ext cx="1925280" cy="737640"/>
           </a:xfrm>
           <a:prstGeom prst="rect">
             <a:avLst/>
@@ -7983,7 +7983,7 @@
         <p:spPr>
           <a:xfrm>
             <a:off x="4644000" y="3363840"/>
-            <a:ext cx="1871640" cy="784080"/>
+            <a:ext cx="1871280" cy="783720"/>
           </a:xfrm>
           <a:prstGeom prst="rect">
             <a:avLst/>
@@ -8009,7 +8009,7 @@
         <p:spPr>
           <a:xfrm>
             <a:off x="4662000" y="2643840"/>
-            <a:ext cx="2141640" cy="738000"/>
+            <a:ext cx="2141280" cy="737640"/>
           </a:xfrm>
           <a:prstGeom prst="rect">
             <a:avLst/>
@@ -8035,7 +8035,7 @@
         <p:spPr>
           <a:xfrm>
             <a:off x="6804360" y="3166920"/>
-            <a:ext cx="1912320" cy="922680"/>
+            <a:ext cx="1911960" cy="922320"/>
           </a:xfrm>
           <a:prstGeom prst="rect">
             <a:avLst/>
@@ -8061,7 +8061,7 @@
         <p:spPr>
           <a:xfrm>
             <a:off x="6822000" y="2643840"/>
-            <a:ext cx="2231640" cy="522360"/>
+            <a:ext cx="2231280" cy="522000"/>
           </a:xfrm>
           <a:prstGeom prst="rect">
             <a:avLst/>
@@ -8087,7 +8087,7 @@
         <p:spPr>
           <a:xfrm>
             <a:off x="205200" y="196200"/>
-            <a:ext cx="3513960" cy="214560"/>
+            <a:ext cx="3513600" cy="214200"/>
           </a:xfrm>
           <a:prstGeom prst="rect">
             <a:avLst/>
@@ -8176,7 +8176,7 @@
         <p:spPr>
           <a:xfrm>
             <a:off x="0" y="0"/>
-            <a:ext cx="9143280" cy="5142960"/>
+            <a:ext cx="9142920" cy="5142600"/>
           </a:xfrm>
           <a:prstGeom prst="rect">
             <a:avLst/>
@@ -8199,7 +8199,7 @@
         <p:spPr>
           <a:xfrm>
             <a:off x="7812360" y="187920"/>
-            <a:ext cx="1079280" cy="245520"/>
+            <a:ext cx="1078920" cy="245160"/>
           </a:xfrm>
           <a:prstGeom prst="rect">
             <a:avLst/>
@@ -8218,7 +8218,7 @@
         <p:spPr>
           <a:xfrm>
             <a:off x="359640" y="464760"/>
-            <a:ext cx="4571280" cy="4490280"/>
+            <a:ext cx="4570920" cy="4489920"/>
           </a:xfrm>
           <a:prstGeom prst="rect">
             <a:avLst/>
@@ -8609,7 +8609,7 @@
         <p:spPr>
           <a:xfrm>
             <a:off x="395640" y="3166920"/>
-            <a:ext cx="1799640" cy="784080"/>
+            <a:ext cx="1799280" cy="783720"/>
           </a:xfrm>
           <a:prstGeom prst="rect">
             <a:avLst/>
@@ -8635,7 +8635,7 @@
         <p:spPr>
           <a:xfrm>
             <a:off x="413280" y="2643840"/>
-            <a:ext cx="2231640" cy="522360"/>
+            <a:ext cx="2231280" cy="522000"/>
           </a:xfrm>
           <a:prstGeom prst="rect">
             <a:avLst/>
@@ -8661,7 +8661,7 @@
         <p:spPr>
           <a:xfrm>
             <a:off x="395640" y="1396440"/>
-            <a:ext cx="3547800" cy="2888280"/>
+            <a:ext cx="3547440" cy="2887920"/>
           </a:xfrm>
           <a:prstGeom prst="rect">
             <a:avLst/>
@@ -8691,7 +8691,7 @@
         <p:spPr>
           <a:xfrm>
             <a:off x="-1476720" y="474840"/>
-            <a:ext cx="2926080" cy="7920"/>
+            <a:ext cx="2925720" cy="7560"/>
           </a:xfrm>
           <a:prstGeom prst="rect">
             <a:avLst/>
@@ -8710,7 +8710,7 @@
         <p:spPr>
           <a:xfrm>
             <a:off x="2483640" y="3363840"/>
-            <a:ext cx="1871640" cy="507240"/>
+            <a:ext cx="1871280" cy="506880"/>
           </a:xfrm>
           <a:prstGeom prst="rect">
             <a:avLst/>
@@ -8736,7 +8736,7 @@
         <p:spPr>
           <a:xfrm>
             <a:off x="2501640" y="2643840"/>
-            <a:ext cx="1925640" cy="738000"/>
+            <a:ext cx="1925280" cy="737640"/>
           </a:xfrm>
           <a:prstGeom prst="rect">
             <a:avLst/>
@@ -8762,7 +8762,7 @@
         <p:spPr>
           <a:xfrm>
             <a:off x="4644000" y="3363840"/>
-            <a:ext cx="1871640" cy="784080"/>
+            <a:ext cx="1871280" cy="783720"/>
           </a:xfrm>
           <a:prstGeom prst="rect">
             <a:avLst/>
@@ -8788,7 +8788,7 @@
         <p:spPr>
           <a:xfrm>
             <a:off x="4662000" y="2643840"/>
-            <a:ext cx="2141640" cy="738000"/>
+            <a:ext cx="2141280" cy="737640"/>
           </a:xfrm>
           <a:prstGeom prst="rect">
             <a:avLst/>
@@ -8814,7 +8814,7 @@
         <p:spPr>
           <a:xfrm>
             <a:off x="6804360" y="3166920"/>
-            <a:ext cx="1912320" cy="922680"/>
+            <a:ext cx="1911960" cy="922320"/>
           </a:xfrm>
           <a:prstGeom prst="rect">
             <a:avLst/>
@@ -8840,7 +8840,7 @@
         <p:spPr>
           <a:xfrm>
             <a:off x="6822000" y="2643840"/>
-            <a:ext cx="2231640" cy="522360"/>
+            <a:ext cx="2231280" cy="522000"/>
           </a:xfrm>
           <a:prstGeom prst="rect">
             <a:avLst/>
@@ -8866,7 +8866,7 @@
         <p:spPr>
           <a:xfrm>
             <a:off x="205200" y="196200"/>
-            <a:ext cx="3513960" cy="214560"/>
+            <a:ext cx="3513600" cy="214200"/>
           </a:xfrm>
           <a:prstGeom prst="rect">
             <a:avLst/>
@@ -8955,7 +8955,7 @@
         <p:spPr>
           <a:xfrm>
             <a:off x="-7920" y="0"/>
-            <a:ext cx="9143280" cy="5142960"/>
+            <a:ext cx="9142920" cy="5142600"/>
           </a:xfrm>
           <a:prstGeom prst="rect">
             <a:avLst/>
@@ -8978,7 +8978,7 @@
         <p:spPr>
           <a:xfrm>
             <a:off x="7812360" y="187920"/>
-            <a:ext cx="1079280" cy="245520"/>
+            <a:ext cx="1078920" cy="245160"/>
           </a:xfrm>
           <a:prstGeom prst="rect">
             <a:avLst/>
@@ -9001,7 +9001,7 @@
         <p:spPr>
           <a:xfrm>
             <a:off x="-803160" y="474840"/>
-            <a:ext cx="2926080" cy="7920"/>
+            <a:ext cx="2925720" cy="7560"/>
           </a:xfrm>
           <a:prstGeom prst="rect">
             <a:avLst/>
@@ -9020,7 +9020,7 @@
         <p:spPr>
           <a:xfrm>
             <a:off x="286920" y="690120"/>
-            <a:ext cx="5536080" cy="368640"/>
+            <a:ext cx="5535720" cy="368280"/>
           </a:xfrm>
           <a:prstGeom prst="rect">
             <a:avLst/>
@@ -9092,7 +9092,7 @@
         <p:spPr>
           <a:xfrm>
             <a:off x="539640" y="1551960"/>
-            <a:ext cx="3887640" cy="1476360"/>
+            <a:ext cx="3887280" cy="1476000"/>
           </a:xfrm>
           <a:prstGeom prst="rect">
             <a:avLst/>
@@ -9118,7 +9118,7 @@
         <p:spPr>
           <a:xfrm>
             <a:off x="526320" y="1244160"/>
-            <a:ext cx="3513960" cy="307080"/>
+            <a:ext cx="3513600" cy="306720"/>
           </a:xfrm>
           <a:prstGeom prst="rect">
             <a:avLst/>
@@ -9144,7 +9144,7 @@
         <p:spPr>
           <a:xfrm>
             <a:off x="293760" y="1182600"/>
-            <a:ext cx="3018240" cy="1292040"/>
+            <a:ext cx="3017880" cy="1291680"/>
           </a:xfrm>
           <a:prstGeom prst="rect">
             <a:avLst/>
@@ -9238,7 +9238,7 @@
         <p:spPr>
           <a:xfrm>
             <a:off x="4600440" y="1551960"/>
-            <a:ext cx="4404240" cy="922680"/>
+            <a:ext cx="4403880" cy="922320"/>
           </a:xfrm>
           <a:prstGeom prst="rect">
             <a:avLst/>
@@ -9264,7 +9264,7 @@
         <p:spPr>
           <a:xfrm>
             <a:off x="4587480" y="1244160"/>
-            <a:ext cx="3513960" cy="307080"/>
+            <a:ext cx="3513600" cy="306720"/>
           </a:xfrm>
           <a:prstGeom prst="rect">
             <a:avLst/>
@@ -9290,7 +9290,7 @@
         <p:spPr>
           <a:xfrm>
             <a:off x="293760" y="2562840"/>
-            <a:ext cx="3513600" cy="1239120"/>
+            <a:ext cx="3513240" cy="1238760"/>
           </a:xfrm>
           <a:prstGeom prst="rect">
             <a:avLst/>
@@ -9364,7 +9364,7 @@
         <p:spPr>
           <a:xfrm>
             <a:off x="539640" y="3543840"/>
-            <a:ext cx="3527640" cy="1269000"/>
+            <a:ext cx="3527280" cy="1268640"/>
           </a:xfrm>
           <a:prstGeom prst="rect">
             <a:avLst/>
@@ -9390,7 +9390,7 @@
         <p:spPr>
           <a:xfrm>
             <a:off x="526320" y="3065400"/>
-            <a:ext cx="4276440" cy="522360"/>
+            <a:ext cx="4276080" cy="522000"/>
           </a:xfrm>
           <a:prstGeom prst="rect">
             <a:avLst/>
@@ -9416,7 +9416,7 @@
         <p:spPr>
           <a:xfrm>
             <a:off x="4428000" y="1244160"/>
-            <a:ext cx="2953440" cy="996120"/>
+            <a:ext cx="2953080" cy="995760"/>
           </a:xfrm>
           <a:prstGeom prst="rect">
             <a:avLst/>
@@ -9479,7 +9479,7 @@
         <p:spPr>
           <a:xfrm>
             <a:off x="4816440" y="3579840"/>
-            <a:ext cx="4075200" cy="714960"/>
+            <a:ext cx="4074840" cy="714600"/>
           </a:xfrm>
           <a:prstGeom prst="rect">
             <a:avLst/>
@@ -9505,7 +9505,7 @@
         <p:spPr>
           <a:xfrm>
             <a:off x="4803480" y="3065400"/>
-            <a:ext cx="4088160" cy="522360"/>
+            <a:ext cx="4087800" cy="522000"/>
           </a:xfrm>
           <a:prstGeom prst="rect">
             <a:avLst/>
@@ -9531,7 +9531,7 @@
         <p:spPr>
           <a:xfrm>
             <a:off x="4464360" y="2561040"/>
-            <a:ext cx="3398400" cy="1559880"/>
+            <a:ext cx="3398040" cy="1559520"/>
           </a:xfrm>
           <a:prstGeom prst="rect">
             <a:avLst/>
@@ -9594,7 +9594,7 @@
         <p:spPr>
           <a:xfrm>
             <a:off x="-73080" y="3035880"/>
-            <a:ext cx="468000" cy="307080"/>
+            <a:ext cx="467640" cy="306720"/>
           </a:xfrm>
           <a:prstGeom prst="rect">
             <a:avLst/>
@@ -9620,7 +9620,7 @@
         <p:spPr>
           <a:xfrm>
             <a:off x="205200" y="196200"/>
-            <a:ext cx="3513960" cy="214560"/>
+            <a:ext cx="3513600" cy="214200"/>
           </a:xfrm>
           <a:prstGeom prst="rect">
             <a:avLst/>
@@ -9675,7 +9675,7 @@
         <p:spPr>
           <a:xfrm>
             <a:off x="323640" y="3712680"/>
-            <a:ext cx="2953440" cy="1002960"/>
+            <a:ext cx="2953080" cy="1002600"/>
           </a:xfrm>
           <a:prstGeom prst="rect">
             <a:avLst/>
@@ -9772,7 +9772,7 @@
         <p:spPr>
           <a:xfrm>
             <a:off x="0" y="0"/>
-            <a:ext cx="9143280" cy="5142960"/>
+            <a:ext cx="9142920" cy="5142600"/>
           </a:xfrm>
           <a:prstGeom prst="rect">
             <a:avLst/>
@@ -9795,7 +9795,7 @@
         <p:spPr>
           <a:xfrm>
             <a:off x="7812360" y="187920"/>
-            <a:ext cx="1079280" cy="245520"/>
+            <a:ext cx="1078920" cy="245160"/>
           </a:xfrm>
           <a:prstGeom prst="rect">
             <a:avLst/>
@@ -9818,7 +9818,7 @@
         <p:spPr>
           <a:xfrm>
             <a:off x="-1836720" y="474840"/>
-            <a:ext cx="2926080" cy="7920"/>
+            <a:ext cx="2925720" cy="7560"/>
           </a:xfrm>
           <a:prstGeom prst="rect">
             <a:avLst/>
@@ -9837,7 +9837,7 @@
         <p:spPr>
           <a:xfrm>
             <a:off x="323640" y="555480"/>
-            <a:ext cx="4248000" cy="368640"/>
+            <a:ext cx="4247640" cy="368280"/>
           </a:xfrm>
           <a:prstGeom prst="rect">
             <a:avLst/>
@@ -9892,7 +9892,7 @@
         <p:spPr>
           <a:xfrm>
             <a:off x="539640" y="1715040"/>
-            <a:ext cx="2663640" cy="645480"/>
+            <a:ext cx="2663280" cy="645120"/>
           </a:xfrm>
           <a:prstGeom prst="rect">
             <a:avLst/>
@@ -9918,7 +9918,7 @@
         <p:spPr>
           <a:xfrm>
             <a:off x="526320" y="1244160"/>
-            <a:ext cx="2244960" cy="522360"/>
+            <a:ext cx="2244600" cy="522000"/>
           </a:xfrm>
           <a:prstGeom prst="rect">
             <a:avLst/>
@@ -9944,7 +9944,7 @@
         <p:spPr>
           <a:xfrm>
             <a:off x="205200" y="1850400"/>
-            <a:ext cx="2521800" cy="880560"/>
+            <a:ext cx="2521440" cy="880200"/>
           </a:xfrm>
           <a:prstGeom prst="rect">
             <a:avLst/>
@@ -10051,7 +10051,7 @@
         <p:spPr>
           <a:xfrm>
             <a:off x="3376440" y="1715040"/>
-            <a:ext cx="2420280" cy="645480"/>
+            <a:ext cx="2419920" cy="645120"/>
           </a:xfrm>
           <a:prstGeom prst="rect">
             <a:avLst/>
@@ -10077,7 +10077,7 @@
         <p:spPr>
           <a:xfrm>
             <a:off x="3363120" y="1244160"/>
-            <a:ext cx="2288160" cy="522360"/>
+            <a:ext cx="2287800" cy="522000"/>
           </a:xfrm>
           <a:prstGeom prst="rect">
             <a:avLst/>
@@ -10103,7 +10103,7 @@
         <p:spPr>
           <a:xfrm>
             <a:off x="4644000" y="1182600"/>
-            <a:ext cx="2608200" cy="1792440"/>
+            <a:ext cx="2607840" cy="1792080"/>
           </a:xfrm>
           <a:prstGeom prst="rect">
             <a:avLst/>
@@ -10393,7 +10393,7 @@
         <p:spPr>
           <a:xfrm>
             <a:off x="4570920" y="3024000"/>
-            <a:ext cx="183960" cy="368640"/>
+            <a:ext cx="183600" cy="368280"/>
           </a:xfrm>
           <a:prstGeom prst="rect">
             <a:avLst/>
@@ -10419,7 +10419,7 @@
         <p:spPr>
           <a:xfrm>
             <a:off x="2483640" y="1198080"/>
-            <a:ext cx="891720" cy="307080"/>
+            <a:ext cx="891360" cy="306720"/>
           </a:xfrm>
           <a:prstGeom prst="rect">
             <a:avLst/>
@@ -10445,7 +10445,7 @@
         <p:spPr>
           <a:xfrm>
             <a:off x="8215920" y="1203480"/>
-            <a:ext cx="1612080" cy="307080"/>
+            <a:ext cx="1611720" cy="306720"/>
           </a:xfrm>
           <a:prstGeom prst="rect">
             <a:avLst/>
@@ -10471,7 +10471,7 @@
         <p:spPr>
           <a:xfrm>
             <a:off x="5436000" y="1203480"/>
-            <a:ext cx="503280" cy="307080"/>
+            <a:ext cx="502920" cy="306720"/>
           </a:xfrm>
           <a:prstGeom prst="rect">
             <a:avLst/>
@@ -10497,7 +10497,7 @@
         <p:spPr>
           <a:xfrm>
             <a:off x="6112800" y="1722960"/>
-            <a:ext cx="2419200" cy="645480"/>
+            <a:ext cx="2418840" cy="645120"/>
           </a:xfrm>
           <a:prstGeom prst="rect">
             <a:avLst/>
@@ -10523,7 +10523,7 @@
         <p:spPr>
           <a:xfrm>
             <a:off x="6099480" y="1252080"/>
-            <a:ext cx="2288160" cy="522360"/>
+            <a:ext cx="2287800" cy="522000"/>
           </a:xfrm>
           <a:prstGeom prst="rect">
             <a:avLst/>
@@ -10549,7 +10549,7 @@
         <p:spPr>
           <a:xfrm>
             <a:off x="5866920" y="1190520"/>
-            <a:ext cx="317160" cy="368640"/>
+            <a:ext cx="316800" cy="368280"/>
           </a:xfrm>
           <a:prstGeom prst="rect">
             <a:avLst/>
@@ -10575,7 +10575,7 @@
         <p:spPr>
           <a:xfrm>
             <a:off x="526320" y="2831400"/>
-            <a:ext cx="2663640" cy="645480"/>
+            <a:ext cx="2663280" cy="645120"/>
           </a:xfrm>
           <a:prstGeom prst="rect">
             <a:avLst/>
@@ -10601,7 +10601,7 @@
         <p:spPr>
           <a:xfrm>
             <a:off x="526320" y="2526840"/>
-            <a:ext cx="2244960" cy="307080"/>
+            <a:ext cx="2244600" cy="306720"/>
           </a:xfrm>
           <a:prstGeom prst="rect">
             <a:avLst/>
@@ -10627,7 +10627,7 @@
         <p:spPr>
           <a:xfrm>
             <a:off x="205200" y="1173600"/>
-            <a:ext cx="1965600" cy="476280"/>
+            <a:ext cx="1965240" cy="475920"/>
           </a:xfrm>
           <a:prstGeom prst="rect">
             <a:avLst/>
@@ -10720,7 +10720,7 @@
         <p:spPr>
           <a:xfrm>
             <a:off x="3376440" y="2997720"/>
-            <a:ext cx="2420280" cy="784080"/>
+            <a:ext cx="2419920" cy="783720"/>
           </a:xfrm>
           <a:prstGeom prst="rect">
             <a:avLst/>
@@ -10746,7 +10746,7 @@
         <p:spPr>
           <a:xfrm>
             <a:off x="3363120" y="2526840"/>
-            <a:ext cx="2288160" cy="522360"/>
+            <a:ext cx="2287800" cy="522000"/>
           </a:xfrm>
           <a:prstGeom prst="rect">
             <a:avLst/>
@@ -10772,7 +10772,7 @@
         <p:spPr>
           <a:xfrm>
             <a:off x="4658040" y="2976120"/>
-            <a:ext cx="2304720" cy="1029240"/>
+            <a:ext cx="2304360" cy="1028880"/>
           </a:xfrm>
           <a:prstGeom prst="rect">
             <a:avLst/>
@@ -10910,7 +10910,7 @@
         <p:spPr>
           <a:xfrm>
             <a:off x="6112800" y="3005640"/>
-            <a:ext cx="2635200" cy="784080"/>
+            <a:ext cx="2634840" cy="783720"/>
           </a:xfrm>
           <a:prstGeom prst="rect">
             <a:avLst/>
@@ -10969,7 +10969,7 @@
         <p:spPr>
           <a:xfrm>
             <a:off x="6099480" y="2534760"/>
-            <a:ext cx="2288160" cy="522360"/>
+            <a:ext cx="2287800" cy="522000"/>
           </a:xfrm>
           <a:prstGeom prst="rect">
             <a:avLst/>
@@ -10995,7 +10995,7 @@
         <p:spPr>
           <a:xfrm>
             <a:off x="4570920" y="4269960"/>
-            <a:ext cx="183960" cy="368640"/>
+            <a:ext cx="183600" cy="368280"/>
           </a:xfrm>
           <a:prstGeom prst="rect">
             <a:avLst/>
@@ -11021,7 +11021,7 @@
         <p:spPr>
           <a:xfrm>
             <a:off x="507960" y="4281120"/>
-            <a:ext cx="2663640" cy="645480"/>
+            <a:ext cx="2663280" cy="645120"/>
           </a:xfrm>
           <a:prstGeom prst="rect">
             <a:avLst/>
@@ -11047,7 +11047,7 @@
         <p:spPr>
           <a:xfrm>
             <a:off x="526320" y="3773160"/>
-            <a:ext cx="2244960" cy="522360"/>
+            <a:ext cx="2244600" cy="522000"/>
           </a:xfrm>
           <a:prstGeom prst="rect">
             <a:avLst/>
@@ -11073,7 +11073,7 @@
         <p:spPr>
           <a:xfrm>
             <a:off x="3376440" y="4269960"/>
-            <a:ext cx="2673360" cy="645480"/>
+            <a:ext cx="2673000" cy="645120"/>
           </a:xfrm>
           <a:prstGeom prst="rect">
             <a:avLst/>
@@ -11099,7 +11099,7 @@
         <p:spPr>
           <a:xfrm>
             <a:off x="3363120" y="3773160"/>
-            <a:ext cx="2288160" cy="522360"/>
+            <a:ext cx="2287800" cy="522000"/>
           </a:xfrm>
           <a:prstGeom prst="rect">
             <a:avLst/>
@@ -11125,7 +11125,7 @@
         <p:spPr>
           <a:xfrm>
             <a:off x="6194880" y="4042440"/>
-            <a:ext cx="2635200" cy="645480"/>
+            <a:ext cx="2634840" cy="645120"/>
           </a:xfrm>
           <a:prstGeom prst="rect">
             <a:avLst/>
@@ -11151,7 +11151,7 @@
         <p:spPr>
           <a:xfrm>
             <a:off x="6194880" y="3758040"/>
-            <a:ext cx="2984760" cy="307080"/>
+            <a:ext cx="2984400" cy="306720"/>
           </a:xfrm>
           <a:prstGeom prst="rect">
             <a:avLst/>
@@ -11177,7 +11177,7 @@
         <p:spPr>
           <a:xfrm>
             <a:off x="205200" y="196200"/>
-            <a:ext cx="3513960" cy="214560"/>
+            <a:ext cx="3513600" cy="214200"/>
           </a:xfrm>
           <a:prstGeom prst="rect">
             <a:avLst/>
@@ -11266,7 +11266,7 @@
         <p:spPr>
           <a:xfrm>
             <a:off x="0" y="0"/>
-            <a:ext cx="9143280" cy="5142960"/>
+            <a:ext cx="9142920" cy="5142600"/>
           </a:xfrm>
           <a:prstGeom prst="rect">
             <a:avLst/>
@@ -11289,7 +11289,7 @@
         <p:spPr>
           <a:xfrm>
             <a:off x="-1260720" y="474840"/>
-            <a:ext cx="2926080" cy="7920"/>
+            <a:ext cx="2925720" cy="7560"/>
           </a:xfrm>
           <a:prstGeom prst="rect">
             <a:avLst/>
@@ -11312,7 +11312,7 @@
         <p:spPr>
           <a:xfrm>
             <a:off x="7821000" y="195480"/>
-            <a:ext cx="1062000" cy="247320"/>
+            <a:ext cx="1061640" cy="246960"/>
           </a:xfrm>
           <a:prstGeom prst="rect">
             <a:avLst/>
@@ -11331,7 +11331,7 @@
         <p:spPr>
           <a:xfrm>
             <a:off x="611640" y="1131480"/>
-            <a:ext cx="4571280" cy="830160"/>
+            <a:ext cx="4570920" cy="829800"/>
           </a:xfrm>
           <a:prstGeom prst="rect">
             <a:avLst/>
@@ -11386,7 +11386,7 @@
         <p:spPr>
           <a:xfrm>
             <a:off x="611640" y="1995840"/>
-            <a:ext cx="2231640" cy="307080"/>
+            <a:ext cx="2231280" cy="306720"/>
           </a:xfrm>
           <a:prstGeom prst="rect">
             <a:avLst/>
@@ -11412,7 +11412,7 @@
         <p:spPr>
           <a:xfrm>
             <a:off x="683640" y="2624760"/>
-            <a:ext cx="1727640" cy="522360"/>
+            <a:ext cx="1727280" cy="522000"/>
           </a:xfrm>
           <a:prstGeom prst="rect">
             <a:avLst/>
@@ -11438,7 +11438,7 @@
         <p:spPr>
           <a:xfrm>
             <a:off x="3780000" y="2624760"/>
-            <a:ext cx="1727640" cy="522360"/>
+            <a:ext cx="1727280" cy="522000"/>
           </a:xfrm>
           <a:prstGeom prst="rect">
             <a:avLst/>
@@ -11464,7 +11464,7 @@
         <p:spPr>
           <a:xfrm>
             <a:off x="6732360" y="2624760"/>
-            <a:ext cx="1727640" cy="522360"/>
+            <a:ext cx="1727280" cy="522000"/>
           </a:xfrm>
           <a:prstGeom prst="rect">
             <a:avLst/>
@@ -11490,7 +11490,7 @@
         <p:spPr>
           <a:xfrm>
             <a:off x="3804480" y="3890520"/>
-            <a:ext cx="1727640" cy="522360"/>
+            <a:ext cx="1727280" cy="522000"/>
           </a:xfrm>
           <a:prstGeom prst="rect">
             <a:avLst/>
@@ -11516,7 +11516,7 @@
         <p:spPr>
           <a:xfrm>
             <a:off x="6732360" y="3863160"/>
-            <a:ext cx="1727640" cy="522360"/>
+            <a:ext cx="1727280" cy="522000"/>
           </a:xfrm>
           <a:prstGeom prst="rect">
             <a:avLst/>
@@ -11542,7 +11542,7 @@
         <p:spPr>
           <a:xfrm>
             <a:off x="755640" y="2427840"/>
-            <a:ext cx="143280" cy="143280"/>
+            <a:ext cx="142920" cy="142920"/>
           </a:xfrm>
           <a:prstGeom prst="ellipse">
             <a:avLst/>
@@ -11570,7 +11570,7 @@
         <p:spPr>
           <a:xfrm>
             <a:off x="3852000" y="2427840"/>
-            <a:ext cx="143280" cy="143280"/>
+            <a:ext cx="142920" cy="142920"/>
           </a:xfrm>
           <a:prstGeom prst="ellipse">
             <a:avLst/>
@@ -11598,7 +11598,7 @@
         <p:spPr>
           <a:xfrm>
             <a:off x="6804360" y="2427840"/>
-            <a:ext cx="143280" cy="143280"/>
+            <a:ext cx="142920" cy="142920"/>
           </a:xfrm>
           <a:prstGeom prst="ellipse">
             <a:avLst/>
@@ -11626,7 +11626,7 @@
         <p:spPr>
           <a:xfrm>
             <a:off x="3852000" y="3665880"/>
-            <a:ext cx="143280" cy="143280"/>
+            <a:ext cx="142920" cy="142920"/>
           </a:xfrm>
           <a:prstGeom prst="ellipse">
             <a:avLst/>
@@ -11654,7 +11654,7 @@
         <p:spPr>
           <a:xfrm>
             <a:off x="6807960" y="3665880"/>
-            <a:ext cx="143280" cy="143280"/>
+            <a:ext cx="142920" cy="142920"/>
           </a:xfrm>
           <a:prstGeom prst="ellipse">
             <a:avLst/>
@@ -11682,7 +11682,7 @@
         <p:spPr>
           <a:xfrm>
             <a:off x="683640" y="3863160"/>
-            <a:ext cx="1727640" cy="522360"/>
+            <a:ext cx="1727280" cy="522000"/>
           </a:xfrm>
           <a:prstGeom prst="rect">
             <a:avLst/>
@@ -11708,7 +11708,7 @@
         <p:spPr>
           <a:xfrm>
             <a:off x="755640" y="3666240"/>
-            <a:ext cx="143280" cy="143280"/>
+            <a:ext cx="142920" cy="142920"/>
           </a:xfrm>
           <a:prstGeom prst="ellipse">
             <a:avLst/>
@@ -11736,7 +11736,7 @@
         <p:spPr>
           <a:xfrm>
             <a:off x="205200" y="196200"/>
-            <a:ext cx="3513960" cy="214560"/>
+            <a:ext cx="3513600" cy="214200"/>
           </a:xfrm>
           <a:prstGeom prst="rect">
             <a:avLst/>
@@ -12035,7 +12035,7 @@
         <p:spPr>
           <a:xfrm>
             <a:off x="402480" y="3866760"/>
-            <a:ext cx="8389080" cy="1004400"/>
+            <a:ext cx="8388720" cy="1004040"/>
           </a:xfrm>
           <a:prstGeom prst="rect">
             <a:avLst/>
@@ -12097,7 +12097,7 @@
                 <a:latin typeface="Arial"/>
                 <a:ea typeface="Arial"/>
               </a:rPr>
-              <a:t>По графикам можно видеть, что первые 9 секунд пользователь достаточно точно воспроизвёл движения тренера. Косинусное сходство (направление движений) выше 0.998, а взвешенное расстояние не превышает 40 (абсолютное отклонение положения). Затем точность несколько снижается, и если направление движений в целом совпадает (косинусное сходство 0,990 в худшем случае), то положение точек значительно отклонилось (взвешенное расстояние 125 в худшем случае). Таким образом, на итоговую оценку «Средне» значительно повлияли последние 5 секунд выполнения упражнения.</a:t>
+              <a:t>По графикам можно видеть, что первые 9 секунд пользователь достаточно точно воспроизвёл движения тренера. Косинусное сходство (направление движений) выше 0.998, а взвешенное расстояние не превышает 40 (абсолютное отклонение положения). Затем точность несколько снижается, и если направление движений в целом совпадает (косинусное сходство 0.990 в худшем случае), то положение точек значительно отклонилось (взвешенное расстояние 125 в худшем случае). Таким образом, на итоговую оценку «Средне» значительно повлияли последние 5 секунд выполнения упражнения.</a:t>
             </a:r>
             <a:endParaRPr b="0" lang="ru-RU" sz="1000" spc="-1" strike="noStrike">
               <a:latin typeface="Arial"/>
@@ -12118,7 +12118,7 @@
         <p:spPr>
           <a:xfrm>
             <a:off x="402480" y="1040040"/>
-            <a:ext cx="4891320" cy="2218680"/>
+            <a:ext cx="4890960" cy="2218320"/>
           </a:xfrm>
           <a:prstGeom prst="rect">
             <a:avLst/>

--- a/Презентация.pptx
+++ b/Презентация.pptx
@@ -300,7 +300,7 @@
             <a:pPr algn="r">
               <a:buNone/>
             </a:pPr>
-            <a:fld id="{3C4E0869-39A1-4C83-A88F-FCE4B40D454F}" type="slidenum">
+            <a:fld id="{00D4C497-E670-4CD8-BC5C-0478176B8375}" type="slidenum">
               <a:rPr b="0" lang="ru-RU" sz="1400" spc="-1" strike="noStrike">
                 <a:latin typeface="Times New Roman"/>
               </a:rPr>
@@ -348,7 +348,7 @@
         <p:spPr>
           <a:xfrm>
             <a:off x="380880" y="685800"/>
-            <a:ext cx="6094800" cy="3427920"/>
+            <a:ext cx="6094440" cy="3427560"/>
           </a:xfrm>
           <a:prstGeom prst="rect">
             <a:avLst/>
@@ -371,7 +371,7 @@
         <p:spPr>
           <a:xfrm>
             <a:off x="685800" y="4343400"/>
-            <a:ext cx="5485320" cy="4113720"/>
+            <a:ext cx="5484960" cy="4113360"/>
           </a:xfrm>
           <a:prstGeom prst="rect">
             <a:avLst/>
@@ -405,7 +405,7 @@
         <p:spPr>
           <a:xfrm>
             <a:off x="3884760" y="8685360"/>
-            <a:ext cx="2970720" cy="456120"/>
+            <a:ext cx="2970360" cy="455760"/>
           </a:xfrm>
           <a:prstGeom prst="rect">
             <a:avLst/>
@@ -447,7 +447,7 @@
                 <a:tab algn="l" pos="0"/>
               </a:tabLst>
             </a:pPr>
-            <a:fld id="{C31DB460-B3FC-4502-A1DC-F57C5ABCD244}" type="slidenum">
+            <a:fld id="{098DEF80-E224-405E-A20D-DC67CFCF3ADE}" type="slidenum">
               <a:rPr b="0" lang="ru" sz="1400" spc="-1" strike="noStrike">
                 <a:solidFill>
                   <a:srgbClr val="000000"/>
@@ -499,7 +499,7 @@
         <p:txBody>
           <a:bodyPr/>
           <a:p>
-            <a:fld id="{560980E3-F0A5-4E33-B070-72CFFDCDE77F}" type="slidenum">
+            <a:fld id="{BAFC4829-C250-4930-BC06-CAFE019E7E8C}" type="slidenum">
               <a:t>&lt;#&gt;</a:t>
             </a:fld>
           </a:p>
@@ -539,8 +539,8 @@
         </p:nvSpPr>
         <p:spPr>
           <a:xfrm>
-            <a:off x="311760" y="744480"/>
-            <a:ext cx="8519400" cy="2051640"/>
+            <a:off x="457200" y="9360"/>
+            <a:ext cx="8229240" cy="1250280"/>
           </a:xfrm>
           <a:prstGeom prst="rect">
             <a:avLst/>
@@ -577,7 +577,7 @@
         <p:spPr>
           <a:xfrm>
             <a:off x="457200" y="1203480"/>
-            <a:ext cx="8228880" cy="1422360"/>
+            <a:ext cx="8229240" cy="1422720"/>
           </a:xfrm>
           <a:prstGeom prst="rect">
             <a:avLst/>
@@ -610,8 +610,8 @@
         </p:nvSpPr>
         <p:spPr>
           <a:xfrm>
-            <a:off x="457200" y="2761200"/>
-            <a:ext cx="8228880" cy="1422360"/>
+            <a:off x="457200" y="2761920"/>
+            <a:ext cx="8229240" cy="1422720"/>
           </a:xfrm>
           <a:prstGeom prst="rect">
             <a:avLst/>
@@ -646,7 +646,7 @@
         <p:txBody>
           <a:bodyPr/>
           <a:p>
-            <a:fld id="{F5E5DD22-83F7-4E6C-B879-31DCFC489BDF}" type="slidenum">
+            <a:fld id="{83532957-B2A0-44A4-B2AC-D5F2AC273856}" type="slidenum">
               <a:t>&lt;#&gt;</a:t>
             </a:fld>
           </a:p>
@@ -686,8 +686,8 @@
         </p:nvSpPr>
         <p:spPr>
           <a:xfrm>
-            <a:off x="311760" y="744480"/>
-            <a:ext cx="8519400" cy="2051640"/>
+            <a:off x="457200" y="9360"/>
+            <a:ext cx="8229240" cy="1250280"/>
           </a:xfrm>
           <a:prstGeom prst="rect">
             <a:avLst/>
@@ -724,7 +724,7 @@
         <p:spPr>
           <a:xfrm>
             <a:off x="457200" y="1203480"/>
-            <a:ext cx="4015440" cy="1422360"/>
+            <a:ext cx="4015800" cy="1422720"/>
           </a:xfrm>
           <a:prstGeom prst="rect">
             <a:avLst/>
@@ -757,8 +757,8 @@
         </p:nvSpPr>
         <p:spPr>
           <a:xfrm>
-            <a:off x="4673880" y="1203480"/>
-            <a:ext cx="4015440" cy="1422360"/>
+            <a:off x="4674240" y="1203480"/>
+            <a:ext cx="4015800" cy="1422720"/>
           </a:xfrm>
           <a:prstGeom prst="rect">
             <a:avLst/>
@@ -791,8 +791,8 @@
         </p:nvSpPr>
         <p:spPr>
           <a:xfrm>
-            <a:off x="457200" y="2761200"/>
-            <a:ext cx="4015440" cy="1422360"/>
+            <a:off x="457200" y="2761920"/>
+            <a:ext cx="4015800" cy="1422720"/>
           </a:xfrm>
           <a:prstGeom prst="rect">
             <a:avLst/>
@@ -825,8 +825,8 @@
         </p:nvSpPr>
         <p:spPr>
           <a:xfrm>
-            <a:off x="4673880" y="2761200"/>
-            <a:ext cx="4015440" cy="1422360"/>
+            <a:off x="4674240" y="2761920"/>
+            <a:ext cx="4015800" cy="1422720"/>
           </a:xfrm>
           <a:prstGeom prst="rect">
             <a:avLst/>
@@ -861,7 +861,7 @@
         <p:txBody>
           <a:bodyPr/>
           <a:p>
-            <a:fld id="{2C606952-C5BC-472E-9621-8B61D0E077C6}" type="slidenum">
+            <a:fld id="{4F47E259-11BA-44EC-AE1E-FAA3993DFDB5}" type="slidenum">
               <a:t>&lt;#&gt;</a:t>
             </a:fld>
           </a:p>
@@ -901,8 +901,8 @@
         </p:nvSpPr>
         <p:spPr>
           <a:xfrm>
-            <a:off x="311760" y="744480"/>
-            <a:ext cx="8519400" cy="2051640"/>
+            <a:off x="457200" y="9360"/>
+            <a:ext cx="8229240" cy="1250280"/>
           </a:xfrm>
           <a:prstGeom prst="rect">
             <a:avLst/>
@@ -939,7 +939,7 @@
         <p:spPr>
           <a:xfrm>
             <a:off x="457200" y="1203480"/>
-            <a:ext cx="2649600" cy="1422360"/>
+            <a:ext cx="2649600" cy="1422720"/>
           </a:xfrm>
           <a:prstGeom prst="rect">
             <a:avLst/>
@@ -973,7 +973,7 @@
         <p:spPr>
           <a:xfrm>
             <a:off x="3239640" y="1203480"/>
-            <a:ext cx="2649600" cy="1422360"/>
+            <a:ext cx="2649600" cy="1422720"/>
           </a:xfrm>
           <a:prstGeom prst="rect">
             <a:avLst/>
@@ -1007,7 +1007,7 @@
         <p:spPr>
           <a:xfrm>
             <a:off x="6022080" y="1203480"/>
-            <a:ext cx="2649600" cy="1422360"/>
+            <a:ext cx="2649600" cy="1422720"/>
           </a:xfrm>
           <a:prstGeom prst="rect">
             <a:avLst/>
@@ -1040,8 +1040,8 @@
         </p:nvSpPr>
         <p:spPr>
           <a:xfrm>
-            <a:off x="457200" y="2761200"/>
-            <a:ext cx="2649600" cy="1422360"/>
+            <a:off x="457200" y="2761920"/>
+            <a:ext cx="2649600" cy="1422720"/>
           </a:xfrm>
           <a:prstGeom prst="rect">
             <a:avLst/>
@@ -1074,8 +1074,8 @@
         </p:nvSpPr>
         <p:spPr>
           <a:xfrm>
-            <a:off x="3239640" y="2761200"/>
-            <a:ext cx="2649600" cy="1422360"/>
+            <a:off x="3239640" y="2761920"/>
+            <a:ext cx="2649600" cy="1422720"/>
           </a:xfrm>
           <a:prstGeom prst="rect">
             <a:avLst/>
@@ -1108,8 +1108,8 @@
         </p:nvSpPr>
         <p:spPr>
           <a:xfrm>
-            <a:off x="6022080" y="2761200"/>
-            <a:ext cx="2649600" cy="1422360"/>
+            <a:off x="6022080" y="2761920"/>
+            <a:ext cx="2649600" cy="1422720"/>
           </a:xfrm>
           <a:prstGeom prst="rect">
             <a:avLst/>
@@ -1144,7 +1144,7 @@
         <p:txBody>
           <a:bodyPr/>
           <a:p>
-            <a:fld id="{2B90141E-6537-451A-8FD8-6FD41D0D1595}" type="slidenum">
+            <a:fld id="{4CFA4259-A180-4E7D-BD84-2EC150314BB2}" type="slidenum">
               <a:t>&lt;#&gt;</a:t>
             </a:fld>
           </a:p>
@@ -1206,7 +1206,7 @@
         <p:txBody>
           <a:bodyPr/>
           <a:p>
-            <a:fld id="{9F99FC2C-C97E-4EAC-B55F-69F59014DDAF}" type="slidenum">
+            <a:fld id="{FE01AE8E-7F07-4E11-AEF7-96539A3BA462}" type="slidenum">
               <a:t>&lt;#&gt;</a:t>
             </a:fld>
           </a:p>
@@ -1267,8 +1267,8 @@
         </p:nvSpPr>
         <p:spPr>
           <a:xfrm>
-            <a:off x="311760" y="744480"/>
-            <a:ext cx="8519400" cy="2051640"/>
+            <a:off x="457200" y="9360"/>
+            <a:ext cx="8229240" cy="1250280"/>
           </a:xfrm>
           <a:prstGeom prst="rect">
             <a:avLst/>
@@ -1305,7 +1305,7 @@
         <p:spPr>
           <a:xfrm>
             <a:off x="457200" y="1203480"/>
-            <a:ext cx="8228880" cy="2982600"/>
+            <a:ext cx="8229240" cy="2982960"/>
           </a:xfrm>
           <a:prstGeom prst="rect">
             <a:avLst/>
@@ -1363,7 +1363,7 @@
         <p:txBody>
           <a:bodyPr/>
           <a:p>
-            <a:fld id="{D29163FA-4118-45C8-B1E5-FDFE544D0F79}" type="slidenum">
+            <a:fld id="{B411064F-A5CE-4393-AB1F-1D0FB8847E01}" type="slidenum">
               <a:t>&lt;#&gt;</a:t>
             </a:fld>
           </a:p>
@@ -1424,8 +1424,8 @@
         </p:nvSpPr>
         <p:spPr>
           <a:xfrm>
-            <a:off x="311760" y="744480"/>
-            <a:ext cx="8519400" cy="2051640"/>
+            <a:off x="457200" y="9360"/>
+            <a:ext cx="8229240" cy="1250280"/>
           </a:xfrm>
           <a:prstGeom prst="rect">
             <a:avLst/>
@@ -1462,7 +1462,7 @@
         <p:spPr>
           <a:xfrm>
             <a:off x="457200" y="1203480"/>
-            <a:ext cx="8228880" cy="2982600"/>
+            <a:ext cx="8229240" cy="2982960"/>
           </a:xfrm>
           <a:prstGeom prst="rect">
             <a:avLst/>
@@ -1517,7 +1517,7 @@
         <p:txBody>
           <a:bodyPr/>
           <a:p>
-            <a:fld id="{7FB6929C-61E6-4E2B-B4CA-B716DA08DB70}" type="slidenum">
+            <a:fld id="{4CEA91FF-1ACC-4006-B18F-0A3B3DA67067}" type="slidenum">
               <a:t>&lt;#&gt;</a:t>
             </a:fld>
           </a:p>
@@ -1578,8 +1578,8 @@
         </p:nvSpPr>
         <p:spPr>
           <a:xfrm>
-            <a:off x="311760" y="744480"/>
-            <a:ext cx="8519400" cy="2051640"/>
+            <a:off x="457200" y="9360"/>
+            <a:ext cx="8229240" cy="1250280"/>
           </a:xfrm>
           <a:prstGeom prst="rect">
             <a:avLst/>
@@ -1616,7 +1616,7 @@
         <p:spPr>
           <a:xfrm>
             <a:off x="457200" y="1203480"/>
-            <a:ext cx="4015440" cy="2982600"/>
+            <a:ext cx="4015800" cy="2982960"/>
           </a:xfrm>
           <a:prstGeom prst="rect">
             <a:avLst/>
@@ -1649,8 +1649,8 @@
         </p:nvSpPr>
         <p:spPr>
           <a:xfrm>
-            <a:off x="4673880" y="1203480"/>
-            <a:ext cx="4015440" cy="2982600"/>
+            <a:off x="4674240" y="1203480"/>
+            <a:ext cx="4015800" cy="2982960"/>
           </a:xfrm>
           <a:prstGeom prst="rect">
             <a:avLst/>
@@ -1705,7 +1705,7 @@
         <p:txBody>
           <a:bodyPr/>
           <a:p>
-            <a:fld id="{85AAD1D6-1133-4686-94D7-0993EFD9C788}" type="slidenum">
+            <a:fld id="{C29DCDF8-9295-4D87-91C0-A85D252C0724}" type="slidenum">
               <a:t>&lt;#&gt;</a:t>
             </a:fld>
           </a:p>
@@ -1766,8 +1766,8 @@
         </p:nvSpPr>
         <p:spPr>
           <a:xfrm>
-            <a:off x="311760" y="744480"/>
-            <a:ext cx="8519400" cy="2051640"/>
+            <a:off x="457200" y="9360"/>
+            <a:ext cx="8229240" cy="1250280"/>
           </a:xfrm>
           <a:prstGeom prst="rect">
             <a:avLst/>
@@ -1825,7 +1825,7 @@
         <p:txBody>
           <a:bodyPr/>
           <a:p>
-            <a:fld id="{1C69BBCA-F78A-4B31-AF14-04647A5B14AE}" type="slidenum">
+            <a:fld id="{837396D1-F1F0-4323-8173-5AE912D686AF}" type="slidenum">
               <a:t>&lt;#&gt;</a:t>
             </a:fld>
           </a:p>
@@ -1886,8 +1886,8 @@
         </p:nvSpPr>
         <p:spPr>
           <a:xfrm>
-            <a:off x="311760" y="744480"/>
-            <a:ext cx="8519400" cy="9511560"/>
+            <a:off x="457200" y="205200"/>
+            <a:ext cx="8229240" cy="3981240"/>
           </a:xfrm>
           <a:prstGeom prst="rect">
             <a:avLst/>
@@ -1945,7 +1945,7 @@
         <p:txBody>
           <a:bodyPr/>
           <a:p>
-            <a:fld id="{48FAC74C-3405-469C-92D8-31F0193E85F6}" type="slidenum">
+            <a:fld id="{7970926C-15AA-4D13-9521-F0DB2C26B890}" type="slidenum">
               <a:t>&lt;#&gt;</a:t>
             </a:fld>
           </a:p>
@@ -2006,8 +2006,8 @@
         </p:nvSpPr>
         <p:spPr>
           <a:xfrm>
-            <a:off x="311760" y="744480"/>
-            <a:ext cx="8519400" cy="2051640"/>
+            <a:off x="457200" y="9360"/>
+            <a:ext cx="8229240" cy="1250280"/>
           </a:xfrm>
           <a:prstGeom prst="rect">
             <a:avLst/>
@@ -2044,7 +2044,7 @@
         <p:spPr>
           <a:xfrm>
             <a:off x="457200" y="1203480"/>
-            <a:ext cx="4015440" cy="1422360"/>
+            <a:ext cx="4015800" cy="1422720"/>
           </a:xfrm>
           <a:prstGeom prst="rect">
             <a:avLst/>
@@ -2077,8 +2077,8 @@
         </p:nvSpPr>
         <p:spPr>
           <a:xfrm>
-            <a:off x="4673880" y="1203480"/>
-            <a:ext cx="4015440" cy="2982600"/>
+            <a:off x="4674240" y="1203480"/>
+            <a:ext cx="4015800" cy="2982960"/>
           </a:xfrm>
           <a:prstGeom prst="rect">
             <a:avLst/>
@@ -2111,8 +2111,8 @@
         </p:nvSpPr>
         <p:spPr>
           <a:xfrm>
-            <a:off x="457200" y="2761200"/>
-            <a:ext cx="4015440" cy="1422360"/>
+            <a:off x="457200" y="2761920"/>
+            <a:ext cx="4015800" cy="1422720"/>
           </a:xfrm>
           <a:prstGeom prst="rect">
             <a:avLst/>
@@ -2167,7 +2167,7 @@
         <p:txBody>
           <a:bodyPr/>
           <a:p>
-            <a:fld id="{86C80F7B-F617-488D-9C55-75518772AA7E}" type="slidenum">
+            <a:fld id="{3E03AE0A-B675-43C7-B819-A2101A83BE05}" type="slidenum">
               <a:t>&lt;#&gt;</a:t>
             </a:fld>
           </a:p>
@@ -2228,8 +2228,8 @@
         </p:nvSpPr>
         <p:spPr>
           <a:xfrm>
-            <a:off x="311760" y="744480"/>
-            <a:ext cx="8519400" cy="2051640"/>
+            <a:off x="457200" y="9360"/>
+            <a:ext cx="8229240" cy="1250280"/>
           </a:xfrm>
           <a:prstGeom prst="rect">
             <a:avLst/>
@@ -2266,7 +2266,7 @@
         <p:spPr>
           <a:xfrm>
             <a:off x="457200" y="1203480"/>
-            <a:ext cx="8228880" cy="2982600"/>
+            <a:ext cx="8229240" cy="2982960"/>
           </a:xfrm>
           <a:prstGeom prst="rect">
             <a:avLst/>
@@ -2304,7 +2304,7 @@
         <p:txBody>
           <a:bodyPr/>
           <a:p>
-            <a:fld id="{B688D8C0-3DB2-4555-B52D-82C7E92C0315}" type="slidenum">
+            <a:fld id="{34B9A08D-724E-4D5A-A9C4-273502B82E35}" type="slidenum">
               <a:t>&lt;#&gt;</a:t>
             </a:fld>
           </a:p>
@@ -2344,8 +2344,8 @@
         </p:nvSpPr>
         <p:spPr>
           <a:xfrm>
-            <a:off x="311760" y="744480"/>
-            <a:ext cx="8519400" cy="2051640"/>
+            <a:off x="457200" y="9360"/>
+            <a:ext cx="8229240" cy="1250280"/>
           </a:xfrm>
           <a:prstGeom prst="rect">
             <a:avLst/>
@@ -2382,7 +2382,7 @@
         <p:spPr>
           <a:xfrm>
             <a:off x="457200" y="1203480"/>
-            <a:ext cx="4015440" cy="2982600"/>
+            <a:ext cx="4015800" cy="2982960"/>
           </a:xfrm>
           <a:prstGeom prst="rect">
             <a:avLst/>
@@ -2415,8 +2415,8 @@
         </p:nvSpPr>
         <p:spPr>
           <a:xfrm>
-            <a:off x="4673880" y="1203480"/>
-            <a:ext cx="4015440" cy="1422360"/>
+            <a:off x="4674240" y="1203480"/>
+            <a:ext cx="4015800" cy="1422720"/>
           </a:xfrm>
           <a:prstGeom prst="rect">
             <a:avLst/>
@@ -2449,8 +2449,8 @@
         </p:nvSpPr>
         <p:spPr>
           <a:xfrm>
-            <a:off x="4673880" y="2761200"/>
-            <a:ext cx="4015440" cy="1422360"/>
+            <a:off x="4674240" y="2761920"/>
+            <a:ext cx="4015800" cy="1422720"/>
           </a:xfrm>
           <a:prstGeom prst="rect">
             <a:avLst/>
@@ -2505,7 +2505,7 @@
         <p:txBody>
           <a:bodyPr/>
           <a:p>
-            <a:fld id="{7B5A58D2-B245-4FF0-8AE3-45921A55D08A}" type="slidenum">
+            <a:fld id="{3279EFAE-E9CA-4FF2-A116-37A9EAEB7011}" type="slidenum">
               <a:t>&lt;#&gt;</a:t>
             </a:fld>
           </a:p>
@@ -2566,8 +2566,8 @@
         </p:nvSpPr>
         <p:spPr>
           <a:xfrm>
-            <a:off x="311760" y="744480"/>
-            <a:ext cx="8519400" cy="2051640"/>
+            <a:off x="457200" y="9360"/>
+            <a:ext cx="8229240" cy="1250280"/>
           </a:xfrm>
           <a:prstGeom prst="rect">
             <a:avLst/>
@@ -2604,7 +2604,7 @@
         <p:spPr>
           <a:xfrm>
             <a:off x="457200" y="1203480"/>
-            <a:ext cx="4015440" cy="1422360"/>
+            <a:ext cx="4015800" cy="1422720"/>
           </a:xfrm>
           <a:prstGeom prst="rect">
             <a:avLst/>
@@ -2637,8 +2637,8 @@
         </p:nvSpPr>
         <p:spPr>
           <a:xfrm>
-            <a:off x="4673880" y="1203480"/>
-            <a:ext cx="4015440" cy="1422360"/>
+            <a:off x="4674240" y="1203480"/>
+            <a:ext cx="4015800" cy="1422720"/>
           </a:xfrm>
           <a:prstGeom prst="rect">
             <a:avLst/>
@@ -2671,8 +2671,8 @@
         </p:nvSpPr>
         <p:spPr>
           <a:xfrm>
-            <a:off x="457200" y="2761200"/>
-            <a:ext cx="8228880" cy="1422360"/>
+            <a:off x="457200" y="2761920"/>
+            <a:ext cx="8229240" cy="1422720"/>
           </a:xfrm>
           <a:prstGeom prst="rect">
             <a:avLst/>
@@ -2727,7 +2727,7 @@
         <p:txBody>
           <a:bodyPr/>
           <a:p>
-            <a:fld id="{9C502E2C-FEF5-475B-81B2-AC7CC6BB5C87}" type="slidenum">
+            <a:fld id="{B7941F83-79F7-4AEF-BB25-5A52935F2ABE}" type="slidenum">
               <a:t>&lt;#&gt;</a:t>
             </a:fld>
           </a:p>
@@ -2788,8 +2788,8 @@
         </p:nvSpPr>
         <p:spPr>
           <a:xfrm>
-            <a:off x="311760" y="744480"/>
-            <a:ext cx="8519400" cy="2051640"/>
+            <a:off x="457200" y="9360"/>
+            <a:ext cx="8229240" cy="1250280"/>
           </a:xfrm>
           <a:prstGeom prst="rect">
             <a:avLst/>
@@ -2826,7 +2826,7 @@
         <p:spPr>
           <a:xfrm>
             <a:off x="457200" y="1203480"/>
-            <a:ext cx="8228880" cy="1422360"/>
+            <a:ext cx="8229240" cy="1422720"/>
           </a:xfrm>
           <a:prstGeom prst="rect">
             <a:avLst/>
@@ -2859,8 +2859,8 @@
         </p:nvSpPr>
         <p:spPr>
           <a:xfrm>
-            <a:off x="457200" y="2761200"/>
-            <a:ext cx="8228880" cy="1422360"/>
+            <a:off x="457200" y="2761920"/>
+            <a:ext cx="8229240" cy="1422720"/>
           </a:xfrm>
           <a:prstGeom prst="rect">
             <a:avLst/>
@@ -2915,7 +2915,7 @@
         <p:txBody>
           <a:bodyPr/>
           <a:p>
-            <a:fld id="{C47C0EB8-D3E1-46E9-9CE1-94A0A898149A}" type="slidenum">
+            <a:fld id="{A2629A61-AEB0-408E-9166-2D5B8D7DE119}" type="slidenum">
               <a:t>&lt;#&gt;</a:t>
             </a:fld>
           </a:p>
@@ -2976,8 +2976,8 @@
         </p:nvSpPr>
         <p:spPr>
           <a:xfrm>
-            <a:off x="311760" y="744480"/>
-            <a:ext cx="8519400" cy="2051640"/>
+            <a:off x="457200" y="9360"/>
+            <a:ext cx="8229240" cy="1250280"/>
           </a:xfrm>
           <a:prstGeom prst="rect">
             <a:avLst/>
@@ -3014,7 +3014,7 @@
         <p:spPr>
           <a:xfrm>
             <a:off x="457200" y="1203480"/>
-            <a:ext cx="4015440" cy="1422360"/>
+            <a:ext cx="4015800" cy="1422720"/>
           </a:xfrm>
           <a:prstGeom prst="rect">
             <a:avLst/>
@@ -3047,8 +3047,8 @@
         </p:nvSpPr>
         <p:spPr>
           <a:xfrm>
-            <a:off x="4673880" y="1203480"/>
-            <a:ext cx="4015440" cy="1422360"/>
+            <a:off x="4674240" y="1203480"/>
+            <a:ext cx="4015800" cy="1422720"/>
           </a:xfrm>
           <a:prstGeom prst="rect">
             <a:avLst/>
@@ -3081,8 +3081,8 @@
         </p:nvSpPr>
         <p:spPr>
           <a:xfrm>
-            <a:off x="457200" y="2761200"/>
-            <a:ext cx="4015440" cy="1422360"/>
+            <a:off x="457200" y="2761920"/>
+            <a:ext cx="4015800" cy="1422720"/>
           </a:xfrm>
           <a:prstGeom prst="rect">
             <a:avLst/>
@@ -3115,8 +3115,8 @@
         </p:nvSpPr>
         <p:spPr>
           <a:xfrm>
-            <a:off x="4673880" y="2761200"/>
-            <a:ext cx="4015440" cy="1422360"/>
+            <a:off x="4674240" y="2761920"/>
+            <a:ext cx="4015800" cy="1422720"/>
           </a:xfrm>
           <a:prstGeom prst="rect">
             <a:avLst/>
@@ -3171,7 +3171,7 @@
         <p:txBody>
           <a:bodyPr/>
           <a:p>
-            <a:fld id="{4388A05D-96E4-43DB-9642-681A364CDB87}" type="slidenum">
+            <a:fld id="{25E3E959-1AF9-47C2-A4A1-56093C80C87A}" type="slidenum">
               <a:t>&lt;#&gt;</a:t>
             </a:fld>
           </a:p>
@@ -3232,8 +3232,8 @@
         </p:nvSpPr>
         <p:spPr>
           <a:xfrm>
-            <a:off x="311760" y="744480"/>
-            <a:ext cx="8519400" cy="2051640"/>
+            <a:off x="457200" y="9360"/>
+            <a:ext cx="8229240" cy="1250280"/>
           </a:xfrm>
           <a:prstGeom prst="rect">
             <a:avLst/>
@@ -3270,7 +3270,7 @@
         <p:spPr>
           <a:xfrm>
             <a:off x="457200" y="1203480"/>
-            <a:ext cx="2649600" cy="1422360"/>
+            <a:ext cx="2649600" cy="1422720"/>
           </a:xfrm>
           <a:prstGeom prst="rect">
             <a:avLst/>
@@ -3304,7 +3304,7 @@
         <p:spPr>
           <a:xfrm>
             <a:off x="3239640" y="1203480"/>
-            <a:ext cx="2649600" cy="1422360"/>
+            <a:ext cx="2649600" cy="1422720"/>
           </a:xfrm>
           <a:prstGeom prst="rect">
             <a:avLst/>
@@ -3338,7 +3338,7 @@
         <p:spPr>
           <a:xfrm>
             <a:off x="6022080" y="1203480"/>
-            <a:ext cx="2649600" cy="1422360"/>
+            <a:ext cx="2649600" cy="1422720"/>
           </a:xfrm>
           <a:prstGeom prst="rect">
             <a:avLst/>
@@ -3371,8 +3371,8 @@
         </p:nvSpPr>
         <p:spPr>
           <a:xfrm>
-            <a:off x="457200" y="2761200"/>
-            <a:ext cx="2649600" cy="1422360"/>
+            <a:off x="457200" y="2761920"/>
+            <a:ext cx="2649600" cy="1422720"/>
           </a:xfrm>
           <a:prstGeom prst="rect">
             <a:avLst/>
@@ -3405,8 +3405,8 @@
         </p:nvSpPr>
         <p:spPr>
           <a:xfrm>
-            <a:off x="3239640" y="2761200"/>
-            <a:ext cx="2649600" cy="1422360"/>
+            <a:off x="3239640" y="2761920"/>
+            <a:ext cx="2649600" cy="1422720"/>
           </a:xfrm>
           <a:prstGeom prst="rect">
             <a:avLst/>
@@ -3439,8 +3439,8 @@
         </p:nvSpPr>
         <p:spPr>
           <a:xfrm>
-            <a:off x="6022080" y="2761200"/>
-            <a:ext cx="2649600" cy="1422360"/>
+            <a:off x="6022080" y="2761920"/>
+            <a:ext cx="2649600" cy="1422720"/>
           </a:xfrm>
           <a:prstGeom prst="rect">
             <a:avLst/>
@@ -3495,7 +3495,7 @@
         <p:txBody>
           <a:bodyPr/>
           <a:p>
-            <a:fld id="{0A02A54C-A33D-4D0F-8BFB-C7D6B99D8F16}" type="slidenum">
+            <a:fld id="{6B21BA7D-E9B0-4F8F-8147-FDBC7B716569}" type="slidenum">
               <a:t>&lt;#&gt;</a:t>
             </a:fld>
           </a:p>
@@ -3556,8 +3556,8 @@
         </p:nvSpPr>
         <p:spPr>
           <a:xfrm>
-            <a:off x="311760" y="744480"/>
-            <a:ext cx="8519400" cy="2051640"/>
+            <a:off x="457200" y="9360"/>
+            <a:ext cx="8229240" cy="1250280"/>
           </a:xfrm>
           <a:prstGeom prst="rect">
             <a:avLst/>
@@ -3594,7 +3594,7 @@
         <p:spPr>
           <a:xfrm>
             <a:off x="457200" y="1203480"/>
-            <a:ext cx="8228880" cy="2982600"/>
+            <a:ext cx="8229240" cy="2982960"/>
           </a:xfrm>
           <a:prstGeom prst="rect">
             <a:avLst/>
@@ -3629,7 +3629,7 @@
         <p:txBody>
           <a:bodyPr/>
           <a:p>
-            <a:fld id="{79575756-A10F-49F1-B4EF-68933090EB4A}" type="slidenum">
+            <a:fld id="{6FF4FEC8-04C0-4E21-8FE6-32A99C83A613}" type="slidenum">
               <a:t>&lt;#&gt;</a:t>
             </a:fld>
           </a:p>
@@ -3669,8 +3669,8 @@
         </p:nvSpPr>
         <p:spPr>
           <a:xfrm>
-            <a:off x="311760" y="744480"/>
-            <a:ext cx="8519400" cy="2051640"/>
+            <a:off x="457200" y="9360"/>
+            <a:ext cx="8229240" cy="1250280"/>
           </a:xfrm>
           <a:prstGeom prst="rect">
             <a:avLst/>
@@ -3707,7 +3707,7 @@
         <p:spPr>
           <a:xfrm>
             <a:off x="457200" y="1203480"/>
-            <a:ext cx="4015440" cy="2982600"/>
+            <a:ext cx="4015800" cy="2982960"/>
           </a:xfrm>
           <a:prstGeom prst="rect">
             <a:avLst/>
@@ -3740,8 +3740,8 @@
         </p:nvSpPr>
         <p:spPr>
           <a:xfrm>
-            <a:off x="4673880" y="1203480"/>
-            <a:ext cx="4015440" cy="2982600"/>
+            <a:off x="4674240" y="1203480"/>
+            <a:ext cx="4015800" cy="2982960"/>
           </a:xfrm>
           <a:prstGeom prst="rect">
             <a:avLst/>
@@ -3776,7 +3776,7 @@
         <p:txBody>
           <a:bodyPr/>
           <a:p>
-            <a:fld id="{FA8F7AEB-C546-4D94-BABD-346E1E50B696}" type="slidenum">
+            <a:fld id="{06657684-1FCC-49B8-8D7F-DBADB32D7C46}" type="slidenum">
               <a:t>&lt;#&gt;</a:t>
             </a:fld>
           </a:p>
@@ -3816,8 +3816,8 @@
         </p:nvSpPr>
         <p:spPr>
           <a:xfrm>
-            <a:off x="311760" y="744480"/>
-            <a:ext cx="8519400" cy="2051640"/>
+            <a:off x="457200" y="9360"/>
+            <a:ext cx="8229240" cy="1250280"/>
           </a:xfrm>
           <a:prstGeom prst="rect">
             <a:avLst/>
@@ -3855,7 +3855,7 @@
         <p:txBody>
           <a:bodyPr/>
           <a:p>
-            <a:fld id="{524A45FD-C018-4EED-8B8A-21CA32778FFC}" type="slidenum">
+            <a:fld id="{539AD7CC-9EF7-43D5-952B-18B932E9A2ED}" type="slidenum">
               <a:t>&lt;#&gt;</a:t>
             </a:fld>
           </a:p>
@@ -3895,8 +3895,8 @@
         </p:nvSpPr>
         <p:spPr>
           <a:xfrm>
-            <a:off x="311760" y="744480"/>
-            <a:ext cx="8519400" cy="9511560"/>
+            <a:off x="457200" y="205200"/>
+            <a:ext cx="8229240" cy="3981240"/>
           </a:xfrm>
           <a:prstGeom prst="rect">
             <a:avLst/>
@@ -3934,7 +3934,7 @@
         <p:txBody>
           <a:bodyPr/>
           <a:p>
-            <a:fld id="{A390BD79-184B-4B37-AE6E-CF289B6B1E40}" type="slidenum">
+            <a:fld id="{311CC895-15F3-433E-934F-6C19792E40A3}" type="slidenum">
               <a:t>&lt;#&gt;</a:t>
             </a:fld>
           </a:p>
@@ -3974,8 +3974,8 @@
         </p:nvSpPr>
         <p:spPr>
           <a:xfrm>
-            <a:off x="311760" y="744480"/>
-            <a:ext cx="8519400" cy="2051640"/>
+            <a:off x="457200" y="9360"/>
+            <a:ext cx="8229240" cy="1250280"/>
           </a:xfrm>
           <a:prstGeom prst="rect">
             <a:avLst/>
@@ -4012,7 +4012,7 @@
         <p:spPr>
           <a:xfrm>
             <a:off x="457200" y="1203480"/>
-            <a:ext cx="4015440" cy="1422360"/>
+            <a:ext cx="4015800" cy="1422720"/>
           </a:xfrm>
           <a:prstGeom prst="rect">
             <a:avLst/>
@@ -4045,8 +4045,8 @@
         </p:nvSpPr>
         <p:spPr>
           <a:xfrm>
-            <a:off x="4673880" y="1203480"/>
-            <a:ext cx="4015440" cy="2982600"/>
+            <a:off x="4674240" y="1203480"/>
+            <a:ext cx="4015800" cy="2982960"/>
           </a:xfrm>
           <a:prstGeom prst="rect">
             <a:avLst/>
@@ -4079,8 +4079,8 @@
         </p:nvSpPr>
         <p:spPr>
           <a:xfrm>
-            <a:off x="457200" y="2761200"/>
-            <a:ext cx="4015440" cy="1422360"/>
+            <a:off x="457200" y="2761920"/>
+            <a:ext cx="4015800" cy="1422720"/>
           </a:xfrm>
           <a:prstGeom prst="rect">
             <a:avLst/>
@@ -4115,7 +4115,7 @@
         <p:txBody>
           <a:bodyPr/>
           <a:p>
-            <a:fld id="{77773347-8EA0-4F8B-908C-E9A90383D522}" type="slidenum">
+            <a:fld id="{2FE3E825-DD37-4BE0-AB60-F984E7B0E50C}" type="slidenum">
               <a:t>&lt;#&gt;</a:t>
             </a:fld>
           </a:p>
@@ -4155,8 +4155,8 @@
         </p:nvSpPr>
         <p:spPr>
           <a:xfrm>
-            <a:off x="311760" y="744480"/>
-            <a:ext cx="8519400" cy="2051640"/>
+            <a:off x="457200" y="9360"/>
+            <a:ext cx="8229240" cy="1250280"/>
           </a:xfrm>
           <a:prstGeom prst="rect">
             <a:avLst/>
@@ -4193,7 +4193,7 @@
         <p:spPr>
           <a:xfrm>
             <a:off x="457200" y="1203480"/>
-            <a:ext cx="4015440" cy="2982600"/>
+            <a:ext cx="4015800" cy="2982960"/>
           </a:xfrm>
           <a:prstGeom prst="rect">
             <a:avLst/>
@@ -4226,8 +4226,8 @@
         </p:nvSpPr>
         <p:spPr>
           <a:xfrm>
-            <a:off x="4673880" y="1203480"/>
-            <a:ext cx="4015440" cy="1422360"/>
+            <a:off x="4674240" y="1203480"/>
+            <a:ext cx="4015800" cy="1422720"/>
           </a:xfrm>
           <a:prstGeom prst="rect">
             <a:avLst/>
@@ -4260,8 +4260,8 @@
         </p:nvSpPr>
         <p:spPr>
           <a:xfrm>
-            <a:off x="4673880" y="2761200"/>
-            <a:ext cx="4015440" cy="1422360"/>
+            <a:off x="4674240" y="2761920"/>
+            <a:ext cx="4015800" cy="1422720"/>
           </a:xfrm>
           <a:prstGeom prst="rect">
             <a:avLst/>
@@ -4296,7 +4296,7 @@
         <p:txBody>
           <a:bodyPr/>
           <a:p>
-            <a:fld id="{346873F2-4176-4B24-B4D1-DC6C58F26158}" type="slidenum">
+            <a:fld id="{8025E577-2F62-42FF-9A85-C0B42C9221AC}" type="slidenum">
               <a:t>&lt;#&gt;</a:t>
             </a:fld>
           </a:p>
@@ -4336,8 +4336,8 @@
         </p:nvSpPr>
         <p:spPr>
           <a:xfrm>
-            <a:off x="311760" y="744480"/>
-            <a:ext cx="8519400" cy="2051640"/>
+            <a:off x="457200" y="9360"/>
+            <a:ext cx="8229240" cy="1250280"/>
           </a:xfrm>
           <a:prstGeom prst="rect">
             <a:avLst/>
@@ -4374,7 +4374,7 @@
         <p:spPr>
           <a:xfrm>
             <a:off x="457200" y="1203480"/>
-            <a:ext cx="4015440" cy="1422360"/>
+            <a:ext cx="4015800" cy="1422720"/>
           </a:xfrm>
           <a:prstGeom prst="rect">
             <a:avLst/>
@@ -4407,8 +4407,8 @@
         </p:nvSpPr>
         <p:spPr>
           <a:xfrm>
-            <a:off x="4673880" y="1203480"/>
-            <a:ext cx="4015440" cy="1422360"/>
+            <a:off x="4674240" y="1203480"/>
+            <a:ext cx="4015800" cy="1422720"/>
           </a:xfrm>
           <a:prstGeom prst="rect">
             <a:avLst/>
@@ -4441,8 +4441,8 @@
         </p:nvSpPr>
         <p:spPr>
           <a:xfrm>
-            <a:off x="457200" y="2761200"/>
-            <a:ext cx="8228880" cy="1422360"/>
+            <a:off x="457200" y="2761920"/>
+            <a:ext cx="8229240" cy="1422720"/>
           </a:xfrm>
           <a:prstGeom prst="rect">
             <a:avLst/>
@@ -4477,7 +4477,7 @@
         <p:txBody>
           <a:bodyPr/>
           <a:p>
-            <a:fld id="{AC4EB9BD-B7E4-42B0-BB3E-F9E60F173B14}" type="slidenum">
+            <a:fld id="{14857390-FBAE-4A1C-9656-3A709E117711}" type="slidenum">
               <a:t>&lt;#&gt;</a:t>
             </a:fld>
           </a:p>
@@ -4519,13 +4519,84 @@
             <a:spLocks noGrp="1"/>
           </p:cNvSpPr>
           <p:nvPr>
+            <p:ph type="sldNum" idx="1"/>
+          </p:nvPr>
+        </p:nvSpPr>
+        <p:spPr>
+          <a:xfrm>
+            <a:off x="8472600" y="4663080"/>
+            <a:ext cx="547200" cy="392040"/>
+          </a:xfrm>
+          <a:prstGeom prst="rect">
+            <a:avLst/>
+          </a:prstGeom>
+          <a:noFill/>
+          <a:ln w="0">
+            <a:noFill/>
+          </a:ln>
+        </p:spPr>
+        <p:txBody>
+          <a:bodyPr lIns="90000" rIns="90000" tIns="91440" bIns="91440" anchor="ctr">
+            <a:noAutofit/>
+          </a:bodyPr>
+          <a:lstStyle>
+            <a:lvl1pPr algn="r">
+              <a:lnSpc>
+                <a:spcPct val="100000"/>
+              </a:lnSpc>
+              <a:buNone/>
+              <a:tabLst>
+                <a:tab algn="l" pos="0"/>
+              </a:tabLst>
+              <a:defRPr b="0" lang="ru" sz="1000" spc="-1" strike="noStrike">
+                <a:solidFill>
+                  <a:srgbClr val="595959"/>
+                </a:solidFill>
+                <a:latin typeface="Arial"/>
+                <a:ea typeface="Arial"/>
+              </a:defRPr>
+            </a:lvl1pPr>
+          </a:lstStyle>
+          <a:p>
+            <a:pPr algn="r">
+              <a:lnSpc>
+                <a:spcPct val="100000"/>
+              </a:lnSpc>
+              <a:buNone/>
+              <a:tabLst>
+                <a:tab algn="l" pos="0"/>
+              </a:tabLst>
+            </a:pPr>
+            <a:fld id="{1368A135-35AD-42FF-A5F8-7E50FA5B8CD4}" type="slidenum">
+              <a:rPr b="0" lang="ru" sz="1000" spc="-1" strike="noStrike">
+                <a:solidFill>
+                  <a:srgbClr val="595959"/>
+                </a:solidFill>
+                <a:latin typeface="Arial"/>
+                <a:ea typeface="Arial"/>
+              </a:rPr>
+              <a:t>&lt;номер&gt;</a:t>
+            </a:fld>
+            <a:endParaRPr b="0" lang="ru-RU" sz="1000" spc="-1" strike="noStrike">
+              <a:latin typeface="Times New Roman"/>
+            </a:endParaRPr>
+          </a:p>
+        </p:txBody>
+      </p:sp>
+      <p:sp>
+        <p:nvSpPr>
+          <p:cNvPr id="1" name="PlaceHolder 2"/>
+          <p:cNvSpPr>
+            <a:spLocks noGrp="1"/>
+          </p:cNvSpPr>
+          <p:nvPr>
             <p:ph type="title"/>
           </p:nvPr>
         </p:nvSpPr>
         <p:spPr>
           <a:xfrm>
-            <a:off x="311760" y="744480"/>
-            <a:ext cx="8519400" cy="2051640"/>
+            <a:off x="457200" y="205200"/>
+            <a:ext cx="8229240" cy="858600"/>
           </a:xfrm>
           <a:prstGeom prst="rect">
             <a:avLst/>
@@ -4540,21 +4611,24 @@
             <a:noAutofit/>
           </a:bodyPr>
           <a:p>
-            <a:r>
-              <a:rPr b="0" lang="ru-RU" sz="1800" spc="-1" strike="noStrike">
+            <a:pPr algn="ctr">
+              <a:buNone/>
+            </a:pPr>
+            <a:r>
+              <a:rPr b="0" lang="ru-RU" sz="4400" spc="-1" strike="noStrike">
                 <a:latin typeface="Arial"/>
               </a:rPr>
               <a:t>Для правки текста заглавия щёлкните мышью</a:t>
             </a:r>
-            <a:endParaRPr b="0" lang="ru-RU" sz="1800" spc="-1" strike="noStrike">
-              <a:latin typeface="Arial"/>
-            </a:endParaRPr>
-          </a:p>
-        </p:txBody>
-      </p:sp>
-      <p:sp>
-        <p:nvSpPr>
-          <p:cNvPr id="1" name="PlaceHolder 2"/>
+            <a:endParaRPr b="0" lang="ru-RU" sz="4400" spc="-1" strike="noStrike">
+              <a:latin typeface="Arial"/>
+            </a:endParaRPr>
+          </a:p>
+        </p:txBody>
+      </p:sp>
+      <p:sp>
+        <p:nvSpPr>
+          <p:cNvPr id="2" name="PlaceHolder 3"/>
           <p:cNvSpPr>
             <a:spLocks noGrp="1"/>
           </p:cNvSpPr>
@@ -4565,7 +4639,7 @@
         <p:spPr>
           <a:xfrm>
             <a:off x="457200" y="1203480"/>
-            <a:ext cx="8228880" cy="2982600"/>
+            <a:ext cx="8229240" cy="2982960"/>
           </a:xfrm>
           <a:prstGeom prst="rect">
             <a:avLst/>
@@ -4592,12 +4666,12 @@
               <a:buChar char=""/>
             </a:pPr>
             <a:r>
-              <a:rPr b="0" lang="ru-RU" sz="1800" spc="-1" strike="noStrike">
+              <a:rPr b="0" lang="ru-RU" sz="3200" spc="-1" strike="noStrike">
                 <a:latin typeface="Arial"/>
               </a:rPr>
               <a:t>Для правки структуры щёлкните мышью</a:t>
             </a:r>
-            <a:endParaRPr b="0" lang="ru-RU" sz="1800" spc="-1" strike="noStrike">
+            <a:endParaRPr b="0" lang="ru-RU" sz="3200" spc="-1" strike="noStrike">
               <a:latin typeface="Arial"/>
             </a:endParaRPr>
           </a:p>
@@ -4614,12 +4688,12 @@
               <a:buChar char=""/>
             </a:pPr>
             <a:r>
-              <a:rPr b="0" lang="ru-RU" sz="1800" spc="-1" strike="noStrike">
+              <a:rPr b="0" lang="ru-RU" sz="2800" spc="-1" strike="noStrike">
                 <a:latin typeface="Arial"/>
               </a:rPr>
               <a:t>Второй уровень структуры</a:t>
             </a:r>
-            <a:endParaRPr b="0" lang="ru-RU" sz="1800" spc="-1" strike="noStrike">
+            <a:endParaRPr b="0" lang="ru-RU" sz="2800" spc="-1" strike="noStrike">
               <a:latin typeface="Arial"/>
             </a:endParaRPr>
           </a:p>
@@ -4636,12 +4710,12 @@
               <a:buChar char=""/>
             </a:pPr>
             <a:r>
-              <a:rPr b="0" lang="ru-RU" sz="1800" spc="-1" strike="noStrike">
+              <a:rPr b="0" lang="ru-RU" sz="2400" spc="-1" strike="noStrike">
                 <a:latin typeface="Arial"/>
               </a:rPr>
               <a:t>Третий уровень структуры</a:t>
             </a:r>
-            <a:endParaRPr b="0" lang="ru-RU" sz="1800" spc="-1" strike="noStrike">
+            <a:endParaRPr b="0" lang="ru-RU" sz="2400" spc="-1" strike="noStrike">
               <a:latin typeface="Arial"/>
             </a:endParaRPr>
           </a:p>
@@ -4658,12 +4732,12 @@
               <a:buChar char=""/>
             </a:pPr>
             <a:r>
-              <a:rPr b="0" lang="ru-RU" sz="1800" spc="-1" strike="noStrike">
+              <a:rPr b="0" lang="ru-RU" sz="2000" spc="-1" strike="noStrike">
                 <a:latin typeface="Arial"/>
               </a:rPr>
               <a:t>Четвёртый уровень структуры</a:t>
             </a:r>
-            <a:endParaRPr b="0" lang="ru-RU" sz="1800" spc="-1" strike="noStrike">
+            <a:endParaRPr b="0" lang="ru-RU" sz="2000" spc="-1" strike="noStrike">
               <a:latin typeface="Arial"/>
             </a:endParaRPr>
           </a:p>
@@ -4680,12 +4754,12 @@
               <a:buChar char=""/>
             </a:pPr>
             <a:r>
-              <a:rPr b="0" lang="ru-RU" sz="1800" spc="-1" strike="noStrike">
+              <a:rPr b="0" lang="ru-RU" sz="2000" spc="-1" strike="noStrike">
                 <a:latin typeface="Arial"/>
               </a:rPr>
               <a:t>Пятый уровень структуры</a:t>
             </a:r>
-            <a:endParaRPr b="0" lang="ru-RU" sz="1800" spc="-1" strike="noStrike">
+            <a:endParaRPr b="0" lang="ru-RU" sz="2000" spc="-1" strike="noStrike">
               <a:latin typeface="Arial"/>
             </a:endParaRPr>
           </a:p>
@@ -4702,12 +4776,12 @@
               <a:buChar char=""/>
             </a:pPr>
             <a:r>
-              <a:rPr b="0" lang="ru-RU" sz="1800" spc="-1" strike="noStrike">
+              <a:rPr b="0" lang="ru-RU" sz="2000" spc="-1" strike="noStrike">
                 <a:latin typeface="Arial"/>
               </a:rPr>
               <a:t>Шестой уровень структуры</a:t>
             </a:r>
-            <a:endParaRPr b="0" lang="ru-RU" sz="1800" spc="-1" strike="noStrike">
+            <a:endParaRPr b="0" lang="ru-RU" sz="2000" spc="-1" strike="noStrike">
               <a:latin typeface="Arial"/>
             </a:endParaRPr>
           </a:p>
@@ -4724,84 +4798,13 @@
               <a:buChar char=""/>
             </a:pPr>
             <a:r>
-              <a:rPr b="0" lang="ru-RU" sz="1800" spc="-1" strike="noStrike">
+              <a:rPr b="0" lang="ru-RU" sz="2000" spc="-1" strike="noStrike">
                 <a:latin typeface="Arial"/>
               </a:rPr>
               <a:t>Седьмой уровень структуры</a:t>
             </a:r>
-            <a:endParaRPr b="0" lang="ru-RU" sz="1800" spc="-1" strike="noStrike">
-              <a:latin typeface="Arial"/>
-            </a:endParaRPr>
-          </a:p>
-        </p:txBody>
-      </p:sp>
-      <p:sp>
-        <p:nvSpPr>
-          <p:cNvPr id="2" name="PlaceHolder 3"/>
-          <p:cNvSpPr>
-            <a:spLocks noGrp="1"/>
-          </p:cNvSpPr>
-          <p:nvPr>
-            <p:ph type="sldNum" idx="1"/>
-          </p:nvPr>
-        </p:nvSpPr>
-        <p:spPr>
-          <a:xfrm>
-            <a:off x="8472600" y="4663080"/>
-            <a:ext cx="547560" cy="392400"/>
-          </a:xfrm>
-          <a:prstGeom prst="rect">
-            <a:avLst/>
-          </a:prstGeom>
-          <a:noFill/>
-          <a:ln w="0">
-            <a:noFill/>
-          </a:ln>
-        </p:spPr>
-        <p:txBody>
-          <a:bodyPr lIns="90000" rIns="90000" tIns="91440" bIns="91440" anchor="ctr">
-            <a:noAutofit/>
-          </a:bodyPr>
-          <a:lstStyle>
-            <a:lvl1pPr algn="r">
-              <a:lnSpc>
-                <a:spcPct val="100000"/>
-              </a:lnSpc>
-              <a:buNone/>
-              <a:tabLst>
-                <a:tab algn="l" pos="0"/>
-              </a:tabLst>
-              <a:defRPr b="0" lang="ru" sz="1000" spc="-1" strike="noStrike">
-                <a:solidFill>
-                  <a:srgbClr val="595959"/>
-                </a:solidFill>
-                <a:latin typeface="Arial"/>
-                <a:ea typeface="Arial"/>
-              </a:defRPr>
-            </a:lvl1pPr>
-          </a:lstStyle>
-          <a:p>
-            <a:pPr algn="r">
-              <a:lnSpc>
-                <a:spcPct val="100000"/>
-              </a:lnSpc>
-              <a:buNone/>
-              <a:tabLst>
-                <a:tab algn="l" pos="0"/>
-              </a:tabLst>
-            </a:pPr>
-            <a:fld id="{3E81BD27-64A8-4C39-8534-B6D1A682811D}" type="slidenum">
-              <a:rPr b="0" lang="ru" sz="1000" spc="-1" strike="noStrike">
-                <a:solidFill>
-                  <a:srgbClr val="595959"/>
-                </a:solidFill>
-                <a:latin typeface="Arial"/>
-                <a:ea typeface="Arial"/>
-              </a:rPr>
-              <a:t>&lt;номер&gt;</a:t>
-            </a:fld>
-            <a:endParaRPr b="0" lang="ru-RU" sz="1000" spc="-1" strike="noStrike">
-              <a:latin typeface="Times New Roman"/>
+            <a:endParaRPr b="0" lang="ru-RU" sz="2000" spc="-1" strike="noStrike">
+              <a:latin typeface="Arial"/>
             </a:endParaRPr>
           </a:p>
         </p:txBody>
@@ -4863,7 +4866,7 @@
         <p:spPr>
           <a:xfrm>
             <a:off x="3124080" y="4767120"/>
-            <a:ext cx="2894400" cy="272880"/>
+            <a:ext cx="2894040" cy="272520"/>
           </a:xfrm>
           <a:prstGeom prst="rect">
             <a:avLst/>
@@ -4920,7 +4923,7 @@
         <p:spPr>
           <a:xfrm>
             <a:off x="6553080" y="4767120"/>
-            <a:ext cx="2132640" cy="272880"/>
+            <a:ext cx="2132280" cy="272520"/>
           </a:xfrm>
           <a:prstGeom prst="rect">
             <a:avLst/>
@@ -4962,7 +4965,7 @@
                 <a:tab algn="l" pos="0"/>
               </a:tabLst>
             </a:pPr>
-            <a:fld id="{FA9BBA6A-C0F8-4253-8EBA-8147F854D7E9}" type="slidenum">
+            <a:fld id="{8B582201-C6CD-45EE-93A5-2A9E5CFC9D00}" type="slidenum">
               <a:rPr b="0" lang="ru" sz="900" spc="-1" strike="noStrike">
                 <a:solidFill>
                   <a:srgbClr val="888888"/>
@@ -4991,7 +4994,7 @@
         <p:spPr>
           <a:xfrm>
             <a:off x="457200" y="4767120"/>
-            <a:ext cx="2132640" cy="272880"/>
+            <a:ext cx="2132280" cy="272520"/>
           </a:xfrm>
           <a:prstGeom prst="rect">
             <a:avLst/>
@@ -5301,7 +5304,7 @@
         <p:spPr>
           <a:xfrm>
             <a:off x="0" y="0"/>
-            <a:ext cx="9142920" cy="5142600"/>
+            <a:ext cx="9142560" cy="5142240"/>
           </a:xfrm>
           <a:prstGeom prst="rect">
             <a:avLst/>
@@ -5324,7 +5327,7 @@
         <p:spPr>
           <a:xfrm>
             <a:off x="853200" y="3867840"/>
-            <a:ext cx="2925720" cy="7560"/>
+            <a:ext cx="2925360" cy="7200"/>
           </a:xfrm>
           <a:prstGeom prst="rect">
             <a:avLst/>
@@ -5347,7 +5350,7 @@
         <p:spPr>
           <a:xfrm>
             <a:off x="725760" y="771480"/>
-            <a:ext cx="3125160" cy="728640"/>
+            <a:ext cx="3124800" cy="728280"/>
           </a:xfrm>
           <a:prstGeom prst="rect">
             <a:avLst/>
@@ -5366,7 +5369,7 @@
         <p:spPr>
           <a:xfrm>
             <a:off x="725760" y="1712160"/>
-            <a:ext cx="8040960" cy="1120320"/>
+            <a:ext cx="8040600" cy="1119960"/>
           </a:xfrm>
           <a:prstGeom prst="rect">
             <a:avLst/>
@@ -5446,7 +5449,7 @@
         <p:spPr>
           <a:xfrm>
             <a:off x="755640" y="3241440"/>
-            <a:ext cx="6749640" cy="616680"/>
+            <a:ext cx="6749280" cy="616320"/>
           </a:xfrm>
           <a:prstGeom prst="rect">
             <a:avLst/>
@@ -5528,7 +5531,7 @@
                 <a:latin typeface="Roboto"/>
                 <a:ea typeface="Roboto"/>
               </a:rPr>
-              <a:t>82</a:t>
+              <a:t>71</a:t>
             </a:r>
             <a:endParaRPr b="0" lang="ru-RU" sz="1600" spc="-1" strike="noStrike">
               <a:latin typeface="Arial"/>
@@ -5579,7 +5582,7 @@
         <p:spPr>
           <a:xfrm>
             <a:off x="0" y="0"/>
-            <a:ext cx="9142920" cy="5142600"/>
+            <a:ext cx="9142560" cy="5142240"/>
           </a:xfrm>
           <a:prstGeom prst="rect">
             <a:avLst/>
@@ -5598,7 +5601,7 @@
         <p:spPr>
           <a:xfrm>
             <a:off x="205200" y="196200"/>
-            <a:ext cx="3513600" cy="214200"/>
+            <a:ext cx="3513240" cy="213840"/>
           </a:xfrm>
           <a:prstGeom prst="rect">
             <a:avLst/>
@@ -5657,7 +5660,7 @@
         <p:spPr>
           <a:xfrm>
             <a:off x="7812360" y="187920"/>
-            <a:ext cx="1078920" cy="245160"/>
+            <a:ext cx="1078560" cy="244800"/>
           </a:xfrm>
           <a:prstGeom prst="rect">
             <a:avLst/>
@@ -5680,7 +5683,7 @@
         <p:spPr>
           <a:xfrm>
             <a:off x="-1091160" y="474840"/>
-            <a:ext cx="2925720" cy="7560"/>
+            <a:ext cx="2925360" cy="7200"/>
           </a:xfrm>
           <a:prstGeom prst="rect">
             <a:avLst/>
@@ -5699,7 +5702,7 @@
         <p:spPr>
           <a:xfrm>
             <a:off x="323640" y="690120"/>
-            <a:ext cx="3132360" cy="368280"/>
+            <a:ext cx="3132000" cy="367920"/>
           </a:xfrm>
           <a:prstGeom prst="rect">
             <a:avLst/>
@@ -5754,7 +5757,7 @@
         <p:spPr>
           <a:xfrm>
             <a:off x="539640" y="1551960"/>
-            <a:ext cx="3527280" cy="1060560"/>
+            <a:ext cx="3526920" cy="1060200"/>
           </a:xfrm>
           <a:prstGeom prst="rect">
             <a:avLst/>
@@ -5780,7 +5783,7 @@
         <p:spPr>
           <a:xfrm>
             <a:off x="526320" y="1244160"/>
-            <a:ext cx="3513600" cy="941400"/>
+            <a:ext cx="3513240" cy="941040"/>
           </a:xfrm>
           <a:prstGeom prst="rect">
             <a:avLst/>
@@ -5887,7 +5890,7 @@
         <p:spPr>
           <a:xfrm>
             <a:off x="4816440" y="1551960"/>
-            <a:ext cx="4074840" cy="1268640"/>
+            <a:ext cx="4074480" cy="1268280"/>
           </a:xfrm>
           <a:prstGeom prst="rect">
             <a:avLst/>
@@ -5913,7 +5916,7 @@
         <p:spPr>
           <a:xfrm>
             <a:off x="4803480" y="1244160"/>
-            <a:ext cx="3513600" cy="1133280"/>
+            <a:ext cx="3513240" cy="1132920"/>
           </a:xfrm>
           <a:prstGeom prst="rect">
             <a:avLst/>
@@ -6010,7 +6013,7 @@
         <p:spPr>
           <a:xfrm>
             <a:off x="539640" y="3393000"/>
-            <a:ext cx="3527280" cy="1268640"/>
+            <a:ext cx="3526920" cy="1268280"/>
           </a:xfrm>
           <a:prstGeom prst="rect">
             <a:avLst/>
@@ -6036,7 +6039,7 @@
         <p:spPr>
           <a:xfrm>
             <a:off x="532800" y="2378520"/>
-            <a:ext cx="4276080" cy="2359080"/>
+            <a:ext cx="4275720" cy="2358720"/>
           </a:xfrm>
           <a:prstGeom prst="rect">
             <a:avLst/>
@@ -6207,7 +6210,7 @@
         <p:spPr>
           <a:xfrm>
             <a:off x="4501080" y="1347480"/>
-            <a:ext cx="69840" cy="69840"/>
+            <a:ext cx="69480" cy="69480"/>
           </a:xfrm>
           <a:prstGeom prst="ellipse">
             <a:avLst/>
@@ -6235,7 +6238,7 @@
         <p:spPr>
           <a:xfrm>
             <a:off x="-73080" y="3056040"/>
-            <a:ext cx="467640" cy="306720"/>
+            <a:ext cx="467280" cy="306360"/>
           </a:xfrm>
           <a:prstGeom prst="rect">
             <a:avLst/>
@@ -6295,7 +6298,7 @@
         <p:spPr>
           <a:xfrm>
             <a:off x="0" y="0"/>
-            <a:ext cx="9142920" cy="5142600"/>
+            <a:ext cx="9142560" cy="5142240"/>
           </a:xfrm>
           <a:prstGeom prst="rect">
             <a:avLst/>
@@ -6318,7 +6321,7 @@
         <p:spPr>
           <a:xfrm>
             <a:off x="7812360" y="187920"/>
-            <a:ext cx="1078920" cy="245160"/>
+            <a:ext cx="1078560" cy="244800"/>
           </a:xfrm>
           <a:prstGeom prst="rect">
             <a:avLst/>
@@ -6341,7 +6344,7 @@
         <p:spPr>
           <a:xfrm>
             <a:off x="-659160" y="474840"/>
-            <a:ext cx="2925720" cy="7560"/>
+            <a:ext cx="2925360" cy="7200"/>
           </a:xfrm>
           <a:prstGeom prst="rect">
             <a:avLst/>
@@ -6360,7 +6363,7 @@
         <p:spPr>
           <a:xfrm>
             <a:off x="362880" y="1456200"/>
-            <a:ext cx="4312800" cy="368280"/>
+            <a:ext cx="4312440" cy="367920"/>
           </a:xfrm>
           <a:prstGeom prst="rect">
             <a:avLst/>
@@ -6386,7 +6389,7 @@
         <p:spPr>
           <a:xfrm>
             <a:off x="284400" y="2523600"/>
-            <a:ext cx="4391640" cy="1199160"/>
+            <a:ext cx="4391280" cy="1198800"/>
           </a:xfrm>
           <a:prstGeom prst="rect">
             <a:avLst/>
@@ -6473,7 +6476,7 @@
         <p:spPr>
           <a:xfrm>
             <a:off x="849240" y="1117800"/>
-            <a:ext cx="3110040" cy="368280"/>
+            <a:ext cx="3109680" cy="367920"/>
           </a:xfrm>
           <a:prstGeom prst="rect">
             <a:avLst/>
@@ -6528,7 +6531,7 @@
         <p:spPr>
           <a:xfrm>
             <a:off x="876960" y="1463040"/>
-            <a:ext cx="2902320" cy="368280"/>
+            <a:ext cx="2901960" cy="367920"/>
           </a:xfrm>
           <a:prstGeom prst="rect">
             <a:avLst/>
@@ -6593,7 +6596,7 @@
         <p:spPr>
           <a:xfrm>
             <a:off x="804240" y="2192040"/>
-            <a:ext cx="1186920" cy="368280"/>
+            <a:ext cx="1186560" cy="367920"/>
           </a:xfrm>
           <a:prstGeom prst="rect">
             <a:avLst/>
@@ -6648,7 +6651,7 @@
         <p:spPr>
           <a:xfrm>
             <a:off x="849240" y="2558880"/>
-            <a:ext cx="2390400" cy="368280"/>
+            <a:ext cx="2390040" cy="367920"/>
           </a:xfrm>
           <a:prstGeom prst="rect">
             <a:avLst/>
@@ -6713,7 +6716,7 @@
         <p:spPr>
           <a:xfrm>
             <a:off x="4795200" y="1117800"/>
-            <a:ext cx="4227480" cy="3969720"/>
+            <a:ext cx="4227120" cy="3969360"/>
           </a:xfrm>
           <a:prstGeom prst="rect">
             <a:avLst/>
@@ -7347,7 +7350,7 @@
         <p:spPr>
           <a:xfrm>
             <a:off x="358920" y="699480"/>
-            <a:ext cx="2977200" cy="368280"/>
+            <a:ext cx="2976840" cy="367920"/>
           </a:xfrm>
           <a:prstGeom prst="rect">
             <a:avLst/>
@@ -7406,7 +7409,7 @@
         <p:spPr>
           <a:xfrm>
             <a:off x="4274280" y="1072080"/>
-            <a:ext cx="461520" cy="459360"/>
+            <a:ext cx="461160" cy="459000"/>
           </a:xfrm>
           <a:prstGeom prst="rect">
             <a:avLst/>
@@ -7429,7 +7432,7 @@
         <p:spPr>
           <a:xfrm>
             <a:off x="402480" y="2163600"/>
-            <a:ext cx="445320" cy="445320"/>
+            <a:ext cx="444960" cy="444960"/>
           </a:xfrm>
           <a:prstGeom prst="rect">
             <a:avLst/>
@@ -7452,7 +7455,7 @@
         <p:spPr>
           <a:xfrm>
             <a:off x="421560" y="1101600"/>
-            <a:ext cx="454320" cy="456480"/>
+            <a:ext cx="453960" cy="456120"/>
           </a:xfrm>
           <a:prstGeom prst="rect">
             <a:avLst/>
@@ -7471,7 +7474,7 @@
         <p:spPr>
           <a:xfrm>
             <a:off x="205200" y="196200"/>
-            <a:ext cx="3513600" cy="214200"/>
+            <a:ext cx="3513240" cy="213840"/>
           </a:xfrm>
           <a:prstGeom prst="rect">
             <a:avLst/>
@@ -7531,7 +7534,7 @@
         <p:spPr>
           <a:xfrm>
             <a:off x="0" y="0"/>
-            <a:ext cx="9142920" cy="5142600"/>
+            <a:ext cx="9142560" cy="5142240"/>
           </a:xfrm>
           <a:prstGeom prst="rect">
             <a:avLst/>
@@ -7554,7 +7557,7 @@
         <p:spPr>
           <a:xfrm>
             <a:off x="7812360" y="187920"/>
-            <a:ext cx="1078920" cy="245160"/>
+            <a:ext cx="1078560" cy="244800"/>
           </a:xfrm>
           <a:prstGeom prst="rect">
             <a:avLst/>
@@ -7573,7 +7576,7 @@
         <p:spPr>
           <a:xfrm>
             <a:off x="395640" y="1004040"/>
-            <a:ext cx="4570920" cy="3068280"/>
+            <a:ext cx="4570560" cy="3067920"/>
           </a:xfrm>
           <a:prstGeom prst="rect">
             <a:avLst/>
@@ -7830,7 +7833,7 @@
         <p:spPr>
           <a:xfrm>
             <a:off x="395640" y="3166920"/>
-            <a:ext cx="1799280" cy="783720"/>
+            <a:ext cx="1798920" cy="783360"/>
           </a:xfrm>
           <a:prstGeom prst="rect">
             <a:avLst/>
@@ -7856,7 +7859,7 @@
         <p:spPr>
           <a:xfrm>
             <a:off x="413280" y="2643840"/>
-            <a:ext cx="2231280" cy="522000"/>
+            <a:ext cx="2230920" cy="521640"/>
           </a:xfrm>
           <a:prstGeom prst="rect">
             <a:avLst/>
@@ -7882,7 +7885,7 @@
         <p:spPr>
           <a:xfrm>
             <a:off x="395640" y="1396440"/>
-            <a:ext cx="2231280" cy="2554200"/>
+            <a:ext cx="2230920" cy="2553840"/>
           </a:xfrm>
           <a:prstGeom prst="rect">
             <a:avLst/>
@@ -7912,7 +7915,7 @@
         <p:spPr>
           <a:xfrm>
             <a:off x="-1476720" y="474840"/>
-            <a:ext cx="2925720" cy="7560"/>
+            <a:ext cx="2925360" cy="7200"/>
           </a:xfrm>
           <a:prstGeom prst="rect">
             <a:avLst/>
@@ -7931,7 +7934,7 @@
         <p:spPr>
           <a:xfrm>
             <a:off x="2483640" y="3363840"/>
-            <a:ext cx="1871280" cy="506880"/>
+            <a:ext cx="1870920" cy="506520"/>
           </a:xfrm>
           <a:prstGeom prst="rect">
             <a:avLst/>
@@ -7957,7 +7960,7 @@
         <p:spPr>
           <a:xfrm>
             <a:off x="2501640" y="2643840"/>
-            <a:ext cx="1925280" cy="737640"/>
+            <a:ext cx="1924920" cy="737280"/>
           </a:xfrm>
           <a:prstGeom prst="rect">
             <a:avLst/>
@@ -7983,7 +7986,7 @@
         <p:spPr>
           <a:xfrm>
             <a:off x="4644000" y="3363840"/>
-            <a:ext cx="1871280" cy="783720"/>
+            <a:ext cx="1870920" cy="783360"/>
           </a:xfrm>
           <a:prstGeom prst="rect">
             <a:avLst/>
@@ -8009,7 +8012,7 @@
         <p:spPr>
           <a:xfrm>
             <a:off x="4662000" y="2643840"/>
-            <a:ext cx="2141280" cy="737640"/>
+            <a:ext cx="2140920" cy="737280"/>
           </a:xfrm>
           <a:prstGeom prst="rect">
             <a:avLst/>
@@ -8035,7 +8038,7 @@
         <p:spPr>
           <a:xfrm>
             <a:off x="6804360" y="3166920"/>
-            <a:ext cx="1911960" cy="922320"/>
+            <a:ext cx="1911600" cy="921960"/>
           </a:xfrm>
           <a:prstGeom prst="rect">
             <a:avLst/>
@@ -8061,7 +8064,7 @@
         <p:spPr>
           <a:xfrm>
             <a:off x="6822000" y="2643840"/>
-            <a:ext cx="2231280" cy="522000"/>
+            <a:ext cx="2230920" cy="521640"/>
           </a:xfrm>
           <a:prstGeom prst="rect">
             <a:avLst/>
@@ -8087,7 +8090,7 @@
         <p:spPr>
           <a:xfrm>
             <a:off x="205200" y="196200"/>
-            <a:ext cx="3513600" cy="214200"/>
+            <a:ext cx="3513240" cy="213840"/>
           </a:xfrm>
           <a:prstGeom prst="rect">
             <a:avLst/>
@@ -8176,7 +8179,7 @@
         <p:spPr>
           <a:xfrm>
             <a:off x="0" y="0"/>
-            <a:ext cx="9142920" cy="5142600"/>
+            <a:ext cx="9142560" cy="5142240"/>
           </a:xfrm>
           <a:prstGeom prst="rect">
             <a:avLst/>
@@ -8199,7 +8202,7 @@
         <p:spPr>
           <a:xfrm>
             <a:off x="7812360" y="187920"/>
-            <a:ext cx="1078920" cy="245160"/>
+            <a:ext cx="1078560" cy="244800"/>
           </a:xfrm>
           <a:prstGeom prst="rect">
             <a:avLst/>
@@ -8218,7 +8221,7 @@
         <p:spPr>
           <a:xfrm>
             <a:off x="359640" y="464760"/>
-            <a:ext cx="4570920" cy="4489920"/>
+            <a:ext cx="4570560" cy="4489560"/>
           </a:xfrm>
           <a:prstGeom prst="rect">
             <a:avLst/>
@@ -8609,7 +8612,7 @@
         <p:spPr>
           <a:xfrm>
             <a:off x="395640" y="3166920"/>
-            <a:ext cx="1799280" cy="783720"/>
+            <a:ext cx="1798920" cy="783360"/>
           </a:xfrm>
           <a:prstGeom prst="rect">
             <a:avLst/>
@@ -8635,7 +8638,7 @@
         <p:spPr>
           <a:xfrm>
             <a:off x="413280" y="2643840"/>
-            <a:ext cx="2231280" cy="522000"/>
+            <a:ext cx="2230920" cy="521640"/>
           </a:xfrm>
           <a:prstGeom prst="rect">
             <a:avLst/>
@@ -8661,7 +8664,7 @@
         <p:spPr>
           <a:xfrm>
             <a:off x="395640" y="1396440"/>
-            <a:ext cx="3547440" cy="2887920"/>
+            <a:ext cx="3547080" cy="2887560"/>
           </a:xfrm>
           <a:prstGeom prst="rect">
             <a:avLst/>
@@ -8691,7 +8694,7 @@
         <p:spPr>
           <a:xfrm>
             <a:off x="-1476720" y="474840"/>
-            <a:ext cx="2925720" cy="7560"/>
+            <a:ext cx="2925360" cy="7200"/>
           </a:xfrm>
           <a:prstGeom prst="rect">
             <a:avLst/>
@@ -8710,7 +8713,7 @@
         <p:spPr>
           <a:xfrm>
             <a:off x="2483640" y="3363840"/>
-            <a:ext cx="1871280" cy="506880"/>
+            <a:ext cx="1870920" cy="506520"/>
           </a:xfrm>
           <a:prstGeom prst="rect">
             <a:avLst/>
@@ -8736,7 +8739,7 @@
         <p:spPr>
           <a:xfrm>
             <a:off x="2501640" y="2643840"/>
-            <a:ext cx="1925280" cy="737640"/>
+            <a:ext cx="1924920" cy="737280"/>
           </a:xfrm>
           <a:prstGeom prst="rect">
             <a:avLst/>
@@ -8762,7 +8765,7 @@
         <p:spPr>
           <a:xfrm>
             <a:off x="4644000" y="3363840"/>
-            <a:ext cx="1871280" cy="783720"/>
+            <a:ext cx="1870920" cy="783360"/>
           </a:xfrm>
           <a:prstGeom prst="rect">
             <a:avLst/>
@@ -8788,7 +8791,7 @@
         <p:spPr>
           <a:xfrm>
             <a:off x="4662000" y="2643840"/>
-            <a:ext cx="2141280" cy="737640"/>
+            <a:ext cx="2140920" cy="737280"/>
           </a:xfrm>
           <a:prstGeom prst="rect">
             <a:avLst/>
@@ -8814,7 +8817,7 @@
         <p:spPr>
           <a:xfrm>
             <a:off x="6804360" y="3166920"/>
-            <a:ext cx="1911960" cy="922320"/>
+            <a:ext cx="1911600" cy="921960"/>
           </a:xfrm>
           <a:prstGeom prst="rect">
             <a:avLst/>
@@ -8840,7 +8843,7 @@
         <p:spPr>
           <a:xfrm>
             <a:off x="6822000" y="2643840"/>
-            <a:ext cx="2231280" cy="522000"/>
+            <a:ext cx="2230920" cy="521640"/>
           </a:xfrm>
           <a:prstGeom prst="rect">
             <a:avLst/>
@@ -8866,7 +8869,7 @@
         <p:spPr>
           <a:xfrm>
             <a:off x="205200" y="196200"/>
-            <a:ext cx="3513600" cy="214200"/>
+            <a:ext cx="3513240" cy="213840"/>
           </a:xfrm>
           <a:prstGeom prst="rect">
             <a:avLst/>
@@ -8955,7 +8958,7 @@
         <p:spPr>
           <a:xfrm>
             <a:off x="-7920" y="0"/>
-            <a:ext cx="9142920" cy="5142600"/>
+            <a:ext cx="9142560" cy="5142240"/>
           </a:xfrm>
           <a:prstGeom prst="rect">
             <a:avLst/>
@@ -8978,7 +8981,7 @@
         <p:spPr>
           <a:xfrm>
             <a:off x="7812360" y="187920"/>
-            <a:ext cx="1078920" cy="245160"/>
+            <a:ext cx="1078560" cy="244800"/>
           </a:xfrm>
           <a:prstGeom prst="rect">
             <a:avLst/>
@@ -9001,7 +9004,7 @@
         <p:spPr>
           <a:xfrm>
             <a:off x="-803160" y="474840"/>
-            <a:ext cx="2925720" cy="7560"/>
+            <a:ext cx="2925360" cy="7200"/>
           </a:xfrm>
           <a:prstGeom prst="rect">
             <a:avLst/>
@@ -9020,7 +9023,7 @@
         <p:spPr>
           <a:xfrm>
             <a:off x="286920" y="690120"/>
-            <a:ext cx="5535720" cy="368280"/>
+            <a:ext cx="5535360" cy="367920"/>
           </a:xfrm>
           <a:prstGeom prst="rect">
             <a:avLst/>
@@ -9092,7 +9095,7 @@
         <p:spPr>
           <a:xfrm>
             <a:off x="539640" y="1551960"/>
-            <a:ext cx="3887280" cy="1476000"/>
+            <a:ext cx="3886920" cy="1475640"/>
           </a:xfrm>
           <a:prstGeom prst="rect">
             <a:avLst/>
@@ -9118,7 +9121,7 @@
         <p:spPr>
           <a:xfrm>
             <a:off x="526320" y="1244160"/>
-            <a:ext cx="3513600" cy="306720"/>
+            <a:ext cx="3513240" cy="306360"/>
           </a:xfrm>
           <a:prstGeom prst="rect">
             <a:avLst/>
@@ -9144,7 +9147,7 @@
         <p:spPr>
           <a:xfrm>
             <a:off x="293760" y="1182600"/>
-            <a:ext cx="3017880" cy="1291680"/>
+            <a:ext cx="3017520" cy="1291320"/>
           </a:xfrm>
           <a:prstGeom prst="rect">
             <a:avLst/>
@@ -9238,7 +9241,7 @@
         <p:spPr>
           <a:xfrm>
             <a:off x="4600440" y="1551960"/>
-            <a:ext cx="4403880" cy="922320"/>
+            <a:ext cx="4403520" cy="921960"/>
           </a:xfrm>
           <a:prstGeom prst="rect">
             <a:avLst/>
@@ -9264,7 +9267,7 @@
         <p:spPr>
           <a:xfrm>
             <a:off x="4587480" y="1244160"/>
-            <a:ext cx="3513600" cy="306720"/>
+            <a:ext cx="3513240" cy="306360"/>
           </a:xfrm>
           <a:prstGeom prst="rect">
             <a:avLst/>
@@ -9290,7 +9293,7 @@
         <p:spPr>
           <a:xfrm>
             <a:off x="293760" y="2562840"/>
-            <a:ext cx="3513240" cy="1238760"/>
+            <a:ext cx="3512880" cy="1238400"/>
           </a:xfrm>
           <a:prstGeom prst="rect">
             <a:avLst/>
@@ -9364,7 +9367,7 @@
         <p:spPr>
           <a:xfrm>
             <a:off x="539640" y="3543840"/>
-            <a:ext cx="3527280" cy="1268640"/>
+            <a:ext cx="3526920" cy="1268280"/>
           </a:xfrm>
           <a:prstGeom prst="rect">
             <a:avLst/>
@@ -9390,7 +9393,7 @@
         <p:spPr>
           <a:xfrm>
             <a:off x="526320" y="3065400"/>
-            <a:ext cx="4276080" cy="522000"/>
+            <a:ext cx="4275720" cy="521640"/>
           </a:xfrm>
           <a:prstGeom prst="rect">
             <a:avLst/>
@@ -9416,7 +9419,7 @@
         <p:spPr>
           <a:xfrm>
             <a:off x="4428000" y="1244160"/>
-            <a:ext cx="2953080" cy="995760"/>
+            <a:ext cx="2952720" cy="995400"/>
           </a:xfrm>
           <a:prstGeom prst="rect">
             <a:avLst/>
@@ -9479,7 +9482,7 @@
         <p:spPr>
           <a:xfrm>
             <a:off x="4816440" y="3579840"/>
-            <a:ext cx="4074840" cy="714600"/>
+            <a:ext cx="4074480" cy="714240"/>
           </a:xfrm>
           <a:prstGeom prst="rect">
             <a:avLst/>
@@ -9505,7 +9508,7 @@
         <p:spPr>
           <a:xfrm>
             <a:off x="4803480" y="3065400"/>
-            <a:ext cx="4087800" cy="522000"/>
+            <a:ext cx="4087440" cy="521640"/>
           </a:xfrm>
           <a:prstGeom prst="rect">
             <a:avLst/>
@@ -9531,7 +9534,7 @@
         <p:spPr>
           <a:xfrm>
             <a:off x="4464360" y="2561040"/>
-            <a:ext cx="3398040" cy="1559520"/>
+            <a:ext cx="3397680" cy="1559160"/>
           </a:xfrm>
           <a:prstGeom prst="rect">
             <a:avLst/>
@@ -9594,7 +9597,7 @@
         <p:spPr>
           <a:xfrm>
             <a:off x="-73080" y="3035880"/>
-            <a:ext cx="467640" cy="306720"/>
+            <a:ext cx="467280" cy="306360"/>
           </a:xfrm>
           <a:prstGeom prst="rect">
             <a:avLst/>
@@ -9620,7 +9623,7 @@
         <p:spPr>
           <a:xfrm>
             <a:off x="205200" y="196200"/>
-            <a:ext cx="3513600" cy="214200"/>
+            <a:ext cx="3513240" cy="213840"/>
           </a:xfrm>
           <a:prstGeom prst="rect">
             <a:avLst/>
@@ -9675,7 +9678,7 @@
         <p:spPr>
           <a:xfrm>
             <a:off x="323640" y="3712680"/>
-            <a:ext cx="2953080" cy="1002600"/>
+            <a:ext cx="2952720" cy="1002240"/>
           </a:xfrm>
           <a:prstGeom prst="rect">
             <a:avLst/>
@@ -9772,7 +9775,7 @@
         <p:spPr>
           <a:xfrm>
             <a:off x="0" y="0"/>
-            <a:ext cx="9142920" cy="5142600"/>
+            <a:ext cx="9142560" cy="5142240"/>
           </a:xfrm>
           <a:prstGeom prst="rect">
             <a:avLst/>
@@ -9795,7 +9798,7 @@
         <p:spPr>
           <a:xfrm>
             <a:off x="7812360" y="187920"/>
-            <a:ext cx="1078920" cy="245160"/>
+            <a:ext cx="1078560" cy="244800"/>
           </a:xfrm>
           <a:prstGeom prst="rect">
             <a:avLst/>
@@ -9818,7 +9821,7 @@
         <p:spPr>
           <a:xfrm>
             <a:off x="-1836720" y="474840"/>
-            <a:ext cx="2925720" cy="7560"/>
+            <a:ext cx="2925360" cy="7200"/>
           </a:xfrm>
           <a:prstGeom prst="rect">
             <a:avLst/>
@@ -9837,7 +9840,7 @@
         <p:spPr>
           <a:xfrm>
             <a:off x="323640" y="555480"/>
-            <a:ext cx="4247640" cy="368280"/>
+            <a:ext cx="4247280" cy="367920"/>
           </a:xfrm>
           <a:prstGeom prst="rect">
             <a:avLst/>
@@ -9892,7 +9895,7 @@
         <p:spPr>
           <a:xfrm>
             <a:off x="539640" y="1715040"/>
-            <a:ext cx="2663280" cy="645120"/>
+            <a:ext cx="2662920" cy="644760"/>
           </a:xfrm>
           <a:prstGeom prst="rect">
             <a:avLst/>
@@ -9918,7 +9921,7 @@
         <p:spPr>
           <a:xfrm>
             <a:off x="526320" y="1244160"/>
-            <a:ext cx="2244600" cy="522000"/>
+            <a:ext cx="2244240" cy="521640"/>
           </a:xfrm>
           <a:prstGeom prst="rect">
             <a:avLst/>
@@ -9944,7 +9947,7 @@
         <p:spPr>
           <a:xfrm>
             <a:off x="205200" y="1850400"/>
-            <a:ext cx="2521440" cy="880200"/>
+            <a:ext cx="2521080" cy="879840"/>
           </a:xfrm>
           <a:prstGeom prst="rect">
             <a:avLst/>
@@ -10051,7 +10054,7 @@
         <p:spPr>
           <a:xfrm>
             <a:off x="3376440" y="1715040"/>
-            <a:ext cx="2419920" cy="645120"/>
+            <a:ext cx="2419560" cy="644760"/>
           </a:xfrm>
           <a:prstGeom prst="rect">
             <a:avLst/>
@@ -10077,7 +10080,7 @@
         <p:spPr>
           <a:xfrm>
             <a:off x="3363120" y="1244160"/>
-            <a:ext cx="2287800" cy="522000"/>
+            <a:ext cx="2287440" cy="521640"/>
           </a:xfrm>
           <a:prstGeom prst="rect">
             <a:avLst/>
@@ -10103,7 +10106,7 @@
         <p:spPr>
           <a:xfrm>
             <a:off x="4644000" y="1182600"/>
-            <a:ext cx="2607840" cy="1792080"/>
+            <a:ext cx="2607480" cy="1791720"/>
           </a:xfrm>
           <a:prstGeom prst="rect">
             <a:avLst/>
@@ -10393,7 +10396,7 @@
         <p:spPr>
           <a:xfrm>
             <a:off x="4570920" y="3024000"/>
-            <a:ext cx="183600" cy="368280"/>
+            <a:ext cx="183240" cy="367920"/>
           </a:xfrm>
           <a:prstGeom prst="rect">
             <a:avLst/>
@@ -10419,7 +10422,7 @@
         <p:spPr>
           <a:xfrm>
             <a:off x="2483640" y="1198080"/>
-            <a:ext cx="891360" cy="306720"/>
+            <a:ext cx="891000" cy="306360"/>
           </a:xfrm>
           <a:prstGeom prst="rect">
             <a:avLst/>
@@ -10445,7 +10448,7 @@
         <p:spPr>
           <a:xfrm>
             <a:off x="8215920" y="1203480"/>
-            <a:ext cx="1611720" cy="306720"/>
+            <a:ext cx="1611360" cy="306360"/>
           </a:xfrm>
           <a:prstGeom prst="rect">
             <a:avLst/>
@@ -10471,7 +10474,7 @@
         <p:spPr>
           <a:xfrm>
             <a:off x="5436000" y="1203480"/>
-            <a:ext cx="502920" cy="306720"/>
+            <a:ext cx="502560" cy="306360"/>
           </a:xfrm>
           <a:prstGeom prst="rect">
             <a:avLst/>
@@ -10497,7 +10500,7 @@
         <p:spPr>
           <a:xfrm>
             <a:off x="6112800" y="1722960"/>
-            <a:ext cx="2418840" cy="645120"/>
+            <a:ext cx="2418480" cy="644760"/>
           </a:xfrm>
           <a:prstGeom prst="rect">
             <a:avLst/>
@@ -10523,7 +10526,7 @@
         <p:spPr>
           <a:xfrm>
             <a:off x="6099480" y="1252080"/>
-            <a:ext cx="2287800" cy="522000"/>
+            <a:ext cx="2287440" cy="521640"/>
           </a:xfrm>
           <a:prstGeom prst="rect">
             <a:avLst/>
@@ -10549,7 +10552,7 @@
         <p:spPr>
           <a:xfrm>
             <a:off x="5866920" y="1190520"/>
-            <a:ext cx="316800" cy="368280"/>
+            <a:ext cx="316440" cy="367920"/>
           </a:xfrm>
           <a:prstGeom prst="rect">
             <a:avLst/>
@@ -10575,7 +10578,7 @@
         <p:spPr>
           <a:xfrm>
             <a:off x="526320" y="2831400"/>
-            <a:ext cx="2663280" cy="645120"/>
+            <a:ext cx="2662920" cy="644760"/>
           </a:xfrm>
           <a:prstGeom prst="rect">
             <a:avLst/>
@@ -10601,7 +10604,7 @@
         <p:spPr>
           <a:xfrm>
             <a:off x="526320" y="2526840"/>
-            <a:ext cx="2244600" cy="306720"/>
+            <a:ext cx="2244240" cy="306360"/>
           </a:xfrm>
           <a:prstGeom prst="rect">
             <a:avLst/>
@@ -10627,7 +10630,7 @@
         <p:spPr>
           <a:xfrm>
             <a:off x="205200" y="1173600"/>
-            <a:ext cx="1965240" cy="475920"/>
+            <a:ext cx="1964880" cy="475560"/>
           </a:xfrm>
           <a:prstGeom prst="rect">
             <a:avLst/>
@@ -10720,7 +10723,7 @@
         <p:spPr>
           <a:xfrm>
             <a:off x="3376440" y="2997720"/>
-            <a:ext cx="2419920" cy="783720"/>
+            <a:ext cx="2419560" cy="783360"/>
           </a:xfrm>
           <a:prstGeom prst="rect">
             <a:avLst/>
@@ -10746,7 +10749,7 @@
         <p:spPr>
           <a:xfrm>
             <a:off x="3363120" y="2526840"/>
-            <a:ext cx="2287800" cy="522000"/>
+            <a:ext cx="2287440" cy="521640"/>
           </a:xfrm>
           <a:prstGeom prst="rect">
             <a:avLst/>
@@ -10772,7 +10775,7 @@
         <p:spPr>
           <a:xfrm>
             <a:off x="4658040" y="2976120"/>
-            <a:ext cx="2304360" cy="1028880"/>
+            <a:ext cx="2304000" cy="1028520"/>
           </a:xfrm>
           <a:prstGeom prst="rect">
             <a:avLst/>
@@ -10910,7 +10913,7 @@
         <p:spPr>
           <a:xfrm>
             <a:off x="6112800" y="3005640"/>
-            <a:ext cx="2634840" cy="783720"/>
+            <a:ext cx="2634480" cy="783360"/>
           </a:xfrm>
           <a:prstGeom prst="rect">
             <a:avLst/>
@@ -10969,7 +10972,7 @@
         <p:spPr>
           <a:xfrm>
             <a:off x="6099480" y="2534760"/>
-            <a:ext cx="2287800" cy="522000"/>
+            <a:ext cx="2287440" cy="521640"/>
           </a:xfrm>
           <a:prstGeom prst="rect">
             <a:avLst/>
@@ -10995,7 +10998,7 @@
         <p:spPr>
           <a:xfrm>
             <a:off x="4570920" y="4269960"/>
-            <a:ext cx="183600" cy="368280"/>
+            <a:ext cx="183240" cy="367920"/>
           </a:xfrm>
           <a:prstGeom prst="rect">
             <a:avLst/>
@@ -11021,7 +11024,7 @@
         <p:spPr>
           <a:xfrm>
             <a:off x="507960" y="4281120"/>
-            <a:ext cx="2663280" cy="645120"/>
+            <a:ext cx="2662920" cy="644760"/>
           </a:xfrm>
           <a:prstGeom prst="rect">
             <a:avLst/>
@@ -11047,7 +11050,7 @@
         <p:spPr>
           <a:xfrm>
             <a:off x="526320" y="3773160"/>
-            <a:ext cx="2244600" cy="522000"/>
+            <a:ext cx="2244240" cy="521640"/>
           </a:xfrm>
           <a:prstGeom prst="rect">
             <a:avLst/>
@@ -11073,7 +11076,7 @@
         <p:spPr>
           <a:xfrm>
             <a:off x="3376440" y="4269960"/>
-            <a:ext cx="2673000" cy="645120"/>
+            <a:ext cx="2672640" cy="644760"/>
           </a:xfrm>
           <a:prstGeom prst="rect">
             <a:avLst/>
@@ -11099,7 +11102,7 @@
         <p:spPr>
           <a:xfrm>
             <a:off x="3363120" y="3773160"/>
-            <a:ext cx="2287800" cy="522000"/>
+            <a:ext cx="2287440" cy="521640"/>
           </a:xfrm>
           <a:prstGeom prst="rect">
             <a:avLst/>
@@ -11125,7 +11128,7 @@
         <p:spPr>
           <a:xfrm>
             <a:off x="6194880" y="4042440"/>
-            <a:ext cx="2634840" cy="645120"/>
+            <a:ext cx="2634480" cy="644760"/>
           </a:xfrm>
           <a:prstGeom prst="rect">
             <a:avLst/>
@@ -11151,7 +11154,7 @@
         <p:spPr>
           <a:xfrm>
             <a:off x="6194880" y="3758040"/>
-            <a:ext cx="2984400" cy="306720"/>
+            <a:ext cx="2984040" cy="306360"/>
           </a:xfrm>
           <a:prstGeom prst="rect">
             <a:avLst/>
@@ -11177,7 +11180,7 @@
         <p:spPr>
           <a:xfrm>
             <a:off x="205200" y="196200"/>
-            <a:ext cx="3513600" cy="214200"/>
+            <a:ext cx="3513240" cy="213840"/>
           </a:xfrm>
           <a:prstGeom prst="rect">
             <a:avLst/>
@@ -11266,7 +11269,7 @@
         <p:spPr>
           <a:xfrm>
             <a:off x="0" y="0"/>
-            <a:ext cx="9142920" cy="5142600"/>
+            <a:ext cx="9142560" cy="5142240"/>
           </a:xfrm>
           <a:prstGeom prst="rect">
             <a:avLst/>
@@ -11289,7 +11292,7 @@
         <p:spPr>
           <a:xfrm>
             <a:off x="-1260720" y="474840"/>
-            <a:ext cx="2925720" cy="7560"/>
+            <a:ext cx="2925360" cy="7200"/>
           </a:xfrm>
           <a:prstGeom prst="rect">
             <a:avLst/>
@@ -11312,7 +11315,7 @@
         <p:spPr>
           <a:xfrm>
             <a:off x="7821000" y="195480"/>
-            <a:ext cx="1061640" cy="246960"/>
+            <a:ext cx="1061280" cy="246600"/>
           </a:xfrm>
           <a:prstGeom prst="rect">
             <a:avLst/>
@@ -11331,7 +11334,7 @@
         <p:spPr>
           <a:xfrm>
             <a:off x="611640" y="1131480"/>
-            <a:ext cx="4570920" cy="829800"/>
+            <a:ext cx="4570560" cy="829440"/>
           </a:xfrm>
           <a:prstGeom prst="rect">
             <a:avLst/>
@@ -11386,7 +11389,7 @@
         <p:spPr>
           <a:xfrm>
             <a:off x="611640" y="1995840"/>
-            <a:ext cx="2231280" cy="306720"/>
+            <a:ext cx="2230920" cy="306360"/>
           </a:xfrm>
           <a:prstGeom prst="rect">
             <a:avLst/>
@@ -11412,7 +11415,7 @@
         <p:spPr>
           <a:xfrm>
             <a:off x="683640" y="2624760"/>
-            <a:ext cx="1727280" cy="522000"/>
+            <a:ext cx="1726920" cy="521640"/>
           </a:xfrm>
           <a:prstGeom prst="rect">
             <a:avLst/>
@@ -11438,7 +11441,7 @@
         <p:spPr>
           <a:xfrm>
             <a:off x="3780000" y="2624760"/>
-            <a:ext cx="1727280" cy="522000"/>
+            <a:ext cx="1726920" cy="521640"/>
           </a:xfrm>
           <a:prstGeom prst="rect">
             <a:avLst/>
@@ -11464,7 +11467,7 @@
         <p:spPr>
           <a:xfrm>
             <a:off x="6732360" y="2624760"/>
-            <a:ext cx="1727280" cy="522000"/>
+            <a:ext cx="1726920" cy="521640"/>
           </a:xfrm>
           <a:prstGeom prst="rect">
             <a:avLst/>
@@ -11490,7 +11493,7 @@
         <p:spPr>
           <a:xfrm>
             <a:off x="3804480" y="3890520"/>
-            <a:ext cx="1727280" cy="522000"/>
+            <a:ext cx="1726920" cy="521640"/>
           </a:xfrm>
           <a:prstGeom prst="rect">
             <a:avLst/>
@@ -11516,7 +11519,7 @@
         <p:spPr>
           <a:xfrm>
             <a:off x="6732360" y="3863160"/>
-            <a:ext cx="1727280" cy="522000"/>
+            <a:ext cx="1726920" cy="521640"/>
           </a:xfrm>
           <a:prstGeom prst="rect">
             <a:avLst/>
@@ -11542,7 +11545,7 @@
         <p:spPr>
           <a:xfrm>
             <a:off x="755640" y="2427840"/>
-            <a:ext cx="142920" cy="142920"/>
+            <a:ext cx="142560" cy="142560"/>
           </a:xfrm>
           <a:prstGeom prst="ellipse">
             <a:avLst/>
@@ -11570,7 +11573,7 @@
         <p:spPr>
           <a:xfrm>
             <a:off x="3852000" y="2427840"/>
-            <a:ext cx="142920" cy="142920"/>
+            <a:ext cx="142560" cy="142560"/>
           </a:xfrm>
           <a:prstGeom prst="ellipse">
             <a:avLst/>
@@ -11598,7 +11601,7 @@
         <p:spPr>
           <a:xfrm>
             <a:off x="6804360" y="2427840"/>
-            <a:ext cx="142920" cy="142920"/>
+            <a:ext cx="142560" cy="142560"/>
           </a:xfrm>
           <a:prstGeom prst="ellipse">
             <a:avLst/>
@@ -11626,7 +11629,7 @@
         <p:spPr>
           <a:xfrm>
             <a:off x="3852000" y="3665880"/>
-            <a:ext cx="142920" cy="142920"/>
+            <a:ext cx="142560" cy="142560"/>
           </a:xfrm>
           <a:prstGeom prst="ellipse">
             <a:avLst/>
@@ -11654,7 +11657,7 @@
         <p:spPr>
           <a:xfrm>
             <a:off x="6807960" y="3665880"/>
-            <a:ext cx="142920" cy="142920"/>
+            <a:ext cx="142560" cy="142560"/>
           </a:xfrm>
           <a:prstGeom prst="ellipse">
             <a:avLst/>
@@ -11682,7 +11685,7 @@
         <p:spPr>
           <a:xfrm>
             <a:off x="683640" y="3863160"/>
-            <a:ext cx="1727280" cy="522000"/>
+            <a:ext cx="1726920" cy="521640"/>
           </a:xfrm>
           <a:prstGeom prst="rect">
             <a:avLst/>
@@ -11708,7 +11711,7 @@
         <p:spPr>
           <a:xfrm>
             <a:off x="755640" y="3666240"/>
-            <a:ext cx="142920" cy="142920"/>
+            <a:ext cx="142560" cy="142560"/>
           </a:xfrm>
           <a:prstGeom prst="ellipse">
             <a:avLst/>
@@ -11736,7 +11739,7 @@
         <p:spPr>
           <a:xfrm>
             <a:off x="205200" y="196200"/>
-            <a:ext cx="3513600" cy="214200"/>
+            <a:ext cx="3513240" cy="213840"/>
           </a:xfrm>
           <a:prstGeom prst="rect">
             <a:avLst/>
@@ -12035,7 +12038,7 @@
         <p:spPr>
           <a:xfrm>
             <a:off x="402480" y="3866760"/>
-            <a:ext cx="8388720" cy="1004040"/>
+            <a:ext cx="8388360" cy="1003680"/>
           </a:xfrm>
           <a:prstGeom prst="rect">
             <a:avLst/>
@@ -12118,7 +12121,7 @@
         <p:spPr>
           <a:xfrm>
             <a:off x="402480" y="1040040"/>
-            <a:ext cx="4890960" cy="2218320"/>
+            <a:ext cx="4890600" cy="2217960"/>
           </a:xfrm>
           <a:prstGeom prst="rect">
             <a:avLst/>
